--- a/thesis/Defense_Slides_Rose.pptx
+++ b/thesis/Defense_Slides_Rose.pptx
@@ -5665,8 +5665,8 @@
         </p:nvSpPr>
         <p:spPr>
           <a:xfrm>
-            <a:off x="548640" y="411480"/>
-            <a:ext cx="11064240" cy="731520"/>
+            <a:off x="502920" y="182880"/>
+            <a:ext cx="2011680" cy="1188720"/>
           </a:xfrm>
           <a:prstGeom prst="rect">
             <a:avLst/>
@@ -5679,7 +5679,7 @@
           </a:bodyPr>
           <a:lstStyle/>
           <a:p>
-            <a:pPr rtl="1" algn="r">
+            <a:pPr rtl="0" algn="l">
               <a:spcBef>
                 <a:spcPts val="0"/>
               </a:spcBef>
@@ -5688,7 +5688,92 @@
               </a:spcAft>
             </a:pPr>
             <a:r>
-              <a:rPr sz="2900" b="1" i="0">
+              <a:rPr sz="5800" b="1" i="0">
+                <a:solidFill>
+                  <a:srgbClr val="3B1729"/>
+                </a:solidFill>
+                <a:latin typeface="Arial"/>
+                <a:cs typeface="Arial"/>
+              </a:rPr>
+              <a:t>08</a:t>
+            </a:r>
+          </a:p>
+        </p:txBody>
+      </p:sp>
+      <p:sp>
+        <p:nvSpPr>
+          <p:cNvPr id="3" name="Rectangle 2"/>
+          <p:cNvSpPr/>
+          <p:nvPr/>
+        </p:nvSpPr>
+        <p:spPr>
+          <a:xfrm>
+            <a:off x="4754880" y="292608"/>
+            <a:ext cx="6903720" cy="1042415"/>
+          </a:xfrm>
+          <a:prstGeom prst="rect">
+            <a:avLst/>
+          </a:prstGeom>
+          <a:solidFill>
+            <a:srgbClr val="3D1730"/>
+          </a:solidFill>
+          <a:ln>
+            <a:noFill/>
+          </a:ln>
+          <a:effectLst/>
+        </p:spPr>
+        <p:style>
+          <a:lnRef idx="1">
+            <a:schemeClr val="accent1"/>
+          </a:lnRef>
+          <a:fillRef idx="3">
+            <a:schemeClr val="accent1"/>
+          </a:fillRef>
+          <a:effectRef idx="2">
+            <a:schemeClr val="accent1"/>
+          </a:effectRef>
+          <a:fontRef idx="minor">
+            <a:schemeClr val="lt1"/>
+          </a:fontRef>
+        </p:style>
+        <p:txBody>
+          <a:bodyPr rtlCol="0" anchor="ctr"/>
+          <a:lstStyle/>
+          <a:p/>
+        </p:txBody>
+      </p:sp>
+      <p:sp>
+        <p:nvSpPr>
+          <p:cNvPr id="4" name="TextBox 3"/>
+          <p:cNvSpPr txBox="1"/>
+          <p:nvPr/>
+        </p:nvSpPr>
+        <p:spPr>
+          <a:xfrm>
+            <a:off x="5029200" y="411480"/>
+            <a:ext cx="6355080" cy="502920"/>
+          </a:xfrm>
+          <a:prstGeom prst="rect">
+            <a:avLst/>
+          </a:prstGeom>
+          <a:noFill/>
+        </p:spPr>
+        <p:txBody>
+          <a:bodyPr wrap="square" anchor="t" lIns="0" rIns="0" tIns="0" bIns="0">
+            <a:spAutoFit/>
+          </a:bodyPr>
+          <a:lstStyle/>
+          <a:p>
+            <a:pPr rtl="1" algn="r">
+              <a:spcBef>
+                <a:spcPts val="0"/>
+              </a:spcBef>
+              <a:spcAft>
+                <a:spcPts val="0"/>
+              </a:spcAft>
+            </a:pPr>
+            <a:r>
+              <a:rPr sz="2400" b="1" i="0">
                 <a:solidFill>
                   <a:srgbClr val="FBEEF4"/>
                 </a:solidFill>
@@ -5702,14 +5787,14 @@
       </p:sp>
       <p:sp>
         <p:nvSpPr>
-          <p:cNvPr id="3" name="TextBox 2"/>
+          <p:cNvPr id="5" name="TextBox 4"/>
           <p:cNvSpPr txBox="1"/>
           <p:nvPr/>
         </p:nvSpPr>
         <p:spPr>
           <a:xfrm>
-            <a:off x="548640" y="1133856"/>
-            <a:ext cx="11064240" cy="292608"/>
+            <a:off x="5029200" y="950976"/>
+            <a:ext cx="6355080" cy="274320"/>
           </a:xfrm>
           <a:prstGeom prst="rect">
             <a:avLst/>
@@ -5731,7 +5816,7 @@
               </a:spcAft>
             </a:pPr>
             <a:r>
-              <a:rPr sz="1250" b="1" i="0">
+              <a:rPr sz="1150" b="1" i="0">
                 <a:solidFill>
                   <a:srgbClr val="FF6FA5"/>
                 </a:solidFill>
@@ -5745,7 +5830,7 @@
       </p:sp>
       <p:sp>
         <p:nvSpPr>
-          <p:cNvPr id="4" name="Rounded Rectangle 3"/>
+          <p:cNvPr id="6" name="Rectangle 5"/>
           <p:cNvSpPr/>
           <p:nvPr/>
         </p:nvSpPr>
@@ -5754,7 +5839,7 @@
             <a:off x="548640" y="1600200"/>
             <a:ext cx="5394960" cy="2286000"/>
           </a:xfrm>
-          <a:prstGeom prst="roundRect">
+          <a:prstGeom prst="rect">
             <a:avLst/>
           </a:prstGeom>
           <a:solidFill>
@@ -5787,7 +5872,7 @@
       </p:sp>
       <p:sp>
         <p:nvSpPr>
-          <p:cNvPr id="5" name="TextBox 4"/>
+          <p:cNvPr id="7" name="TextBox 6"/>
           <p:cNvSpPr txBox="1"/>
           <p:nvPr/>
         </p:nvSpPr>
@@ -5830,7 +5915,7 @@
       </p:sp>
       <p:sp>
         <p:nvSpPr>
-          <p:cNvPr id="6" name="TextBox 5"/>
+          <p:cNvPr id="8" name="TextBox 7"/>
           <p:cNvSpPr txBox="1"/>
           <p:nvPr/>
         </p:nvSpPr>
@@ -5876,7 +5961,7 @@
       </p:sp>
       <p:sp>
         <p:nvSpPr>
-          <p:cNvPr id="7" name="TextBox 6"/>
+          <p:cNvPr id="9" name="TextBox 8"/>
           <p:cNvSpPr txBox="1"/>
           <p:nvPr/>
         </p:nvSpPr>
@@ -5922,7 +6007,7 @@
       </p:sp>
       <p:sp>
         <p:nvSpPr>
-          <p:cNvPr id="8" name="Rounded Rectangle 7"/>
+          <p:cNvPr id="10" name="Rectangle 9"/>
           <p:cNvSpPr/>
           <p:nvPr/>
         </p:nvSpPr>
@@ -5931,7 +6016,7 @@
             <a:off x="6217920" y="1600200"/>
             <a:ext cx="5394960" cy="2286000"/>
           </a:xfrm>
-          <a:prstGeom prst="roundRect">
+          <a:prstGeom prst="rect">
             <a:avLst/>
           </a:prstGeom>
           <a:solidFill>
@@ -5964,7 +6049,7 @@
       </p:sp>
       <p:sp>
         <p:nvSpPr>
-          <p:cNvPr id="9" name="TextBox 8"/>
+          <p:cNvPr id="11" name="TextBox 10"/>
           <p:cNvSpPr txBox="1"/>
           <p:nvPr/>
         </p:nvSpPr>
@@ -6007,7 +6092,7 @@
       </p:sp>
       <p:sp>
         <p:nvSpPr>
-          <p:cNvPr id="10" name="TextBox 9"/>
+          <p:cNvPr id="12" name="TextBox 11"/>
           <p:cNvSpPr txBox="1"/>
           <p:nvPr/>
         </p:nvSpPr>
@@ -6053,7 +6138,7 @@
       </p:sp>
       <p:sp>
         <p:nvSpPr>
-          <p:cNvPr id="11" name="TextBox 10"/>
+          <p:cNvPr id="13" name="TextBox 12"/>
           <p:cNvSpPr txBox="1"/>
           <p:nvPr/>
         </p:nvSpPr>
@@ -6099,7 +6184,7 @@
       </p:sp>
       <p:sp>
         <p:nvSpPr>
-          <p:cNvPr id="12" name="TextBox 11"/>
+          <p:cNvPr id="14" name="TextBox 13"/>
           <p:cNvSpPr txBox="1"/>
           <p:nvPr/>
         </p:nvSpPr>
@@ -6142,7 +6227,7 @@
       </p:sp>
       <p:graphicFrame>
         <p:nvGraphicFramePr>
-          <p:cNvPr id="13" name="Table 12"/>
+          <p:cNvPr id="15" name="Table 14"/>
           <p:cNvGraphicFramePr>
             <a:graphicFrameLocks noGrp="1"/>
           </p:cNvGraphicFramePr>
@@ -6772,8 +6857,8 @@
         </p:nvSpPr>
         <p:spPr>
           <a:xfrm>
-            <a:off x="548640" y="411480"/>
-            <a:ext cx="11064240" cy="731520"/>
+            <a:off x="502920" y="182880"/>
+            <a:ext cx="2011680" cy="1188720"/>
           </a:xfrm>
           <a:prstGeom prst="rect">
             <a:avLst/>
@@ -6786,7 +6871,7 @@
           </a:bodyPr>
           <a:lstStyle/>
           <a:p>
-            <a:pPr rtl="1" algn="r">
+            <a:pPr rtl="0" algn="l">
               <a:spcBef>
                 <a:spcPts val="0"/>
               </a:spcBef>
@@ -6795,7 +6880,92 @@
               </a:spcAft>
             </a:pPr>
             <a:r>
-              <a:rPr sz="2900" b="1" i="0">
+              <a:rPr sz="5800" b="1" i="0">
+                <a:solidFill>
+                  <a:srgbClr val="3B1729"/>
+                </a:solidFill>
+                <a:latin typeface="Arial"/>
+                <a:cs typeface="Arial"/>
+              </a:rPr>
+              <a:t>09</a:t>
+            </a:r>
+          </a:p>
+        </p:txBody>
+      </p:sp>
+      <p:sp>
+        <p:nvSpPr>
+          <p:cNvPr id="3" name="Rectangle 2"/>
+          <p:cNvSpPr/>
+          <p:nvPr/>
+        </p:nvSpPr>
+        <p:spPr>
+          <a:xfrm>
+            <a:off x="4754880" y="292608"/>
+            <a:ext cx="6903720" cy="1042415"/>
+          </a:xfrm>
+          <a:prstGeom prst="rect">
+            <a:avLst/>
+          </a:prstGeom>
+          <a:solidFill>
+            <a:srgbClr val="3D1730"/>
+          </a:solidFill>
+          <a:ln>
+            <a:noFill/>
+          </a:ln>
+          <a:effectLst/>
+        </p:spPr>
+        <p:style>
+          <a:lnRef idx="1">
+            <a:schemeClr val="accent1"/>
+          </a:lnRef>
+          <a:fillRef idx="3">
+            <a:schemeClr val="accent1"/>
+          </a:fillRef>
+          <a:effectRef idx="2">
+            <a:schemeClr val="accent1"/>
+          </a:effectRef>
+          <a:fontRef idx="minor">
+            <a:schemeClr val="lt1"/>
+          </a:fontRef>
+        </p:style>
+        <p:txBody>
+          <a:bodyPr rtlCol="0" anchor="ctr"/>
+          <a:lstStyle/>
+          <a:p/>
+        </p:txBody>
+      </p:sp>
+      <p:sp>
+        <p:nvSpPr>
+          <p:cNvPr id="4" name="TextBox 3"/>
+          <p:cNvSpPr txBox="1"/>
+          <p:nvPr/>
+        </p:nvSpPr>
+        <p:spPr>
+          <a:xfrm>
+            <a:off x="5029200" y="411480"/>
+            <a:ext cx="6355080" cy="502920"/>
+          </a:xfrm>
+          <a:prstGeom prst="rect">
+            <a:avLst/>
+          </a:prstGeom>
+          <a:noFill/>
+        </p:spPr>
+        <p:txBody>
+          <a:bodyPr wrap="square" anchor="t" lIns="0" rIns="0" tIns="0" bIns="0">
+            <a:spAutoFit/>
+          </a:bodyPr>
+          <a:lstStyle/>
+          <a:p>
+            <a:pPr rtl="1" algn="r">
+              <a:spcBef>
+                <a:spcPts val="0"/>
+              </a:spcBef>
+              <a:spcAft>
+                <a:spcPts val="0"/>
+              </a:spcAft>
+            </a:pPr>
+            <a:r>
+              <a:rPr sz="2400" b="1" i="0">
                 <a:solidFill>
                   <a:srgbClr val="FBEEF4"/>
                 </a:solidFill>
@@ -6809,14 +6979,14 @@
       </p:sp>
       <p:sp>
         <p:nvSpPr>
-          <p:cNvPr id="3" name="TextBox 2"/>
+          <p:cNvPr id="5" name="TextBox 4"/>
           <p:cNvSpPr txBox="1"/>
           <p:nvPr/>
         </p:nvSpPr>
         <p:spPr>
           <a:xfrm>
-            <a:off x="548640" y="1133856"/>
-            <a:ext cx="11064240" cy="292608"/>
+            <a:off x="5029200" y="950976"/>
+            <a:ext cx="6355080" cy="274320"/>
           </a:xfrm>
           <a:prstGeom prst="rect">
             <a:avLst/>
@@ -6838,7 +7008,7 @@
               </a:spcAft>
             </a:pPr>
             <a:r>
-              <a:rPr sz="1250" b="1" i="0">
+              <a:rPr sz="1150" b="1" i="0">
                 <a:solidFill>
                   <a:srgbClr val="FF6FA5"/>
                 </a:solidFill>
@@ -6852,7 +7022,7 @@
       </p:sp>
       <p:sp>
         <p:nvSpPr>
-          <p:cNvPr id="4" name="TextBox 3"/>
+          <p:cNvPr id="6" name="TextBox 5"/>
           <p:cNvSpPr txBox="1"/>
           <p:nvPr/>
         </p:nvSpPr>
@@ -6895,7 +7065,7 @@
       </p:sp>
       <p:graphicFrame>
         <p:nvGraphicFramePr>
-          <p:cNvPr id="5" name="Table 4"/>
+          <p:cNvPr id="7" name="Table 6"/>
           <p:cNvGraphicFramePr>
             <a:graphicFrameLocks noGrp="1"/>
           </p:cNvGraphicFramePr>
@@ -8063,7 +8233,7 @@
       </p:graphicFrame>
       <p:sp>
         <p:nvSpPr>
-          <p:cNvPr id="6" name="Rounded Rectangle 5"/>
+          <p:cNvPr id="8" name="Rectangle 7"/>
           <p:cNvSpPr/>
           <p:nvPr/>
         </p:nvSpPr>
@@ -8072,7 +8242,7 @@
             <a:off x="7498079" y="2148840"/>
             <a:ext cx="4114800" cy="1874519"/>
           </a:xfrm>
-          <a:prstGeom prst="roundRect">
+          <a:prstGeom prst="rect">
             <a:avLst/>
           </a:prstGeom>
           <a:solidFill>
@@ -8105,7 +8275,7 @@
       </p:sp>
       <p:sp>
         <p:nvSpPr>
-          <p:cNvPr id="7" name="TextBox 6"/>
+          <p:cNvPr id="9" name="TextBox 8"/>
           <p:cNvSpPr txBox="1"/>
           <p:nvPr/>
         </p:nvSpPr>
@@ -8148,7 +8318,7 @@
       </p:sp>
       <p:sp>
         <p:nvSpPr>
-          <p:cNvPr id="8" name="TextBox 7"/>
+          <p:cNvPr id="10" name="TextBox 9"/>
           <p:cNvSpPr txBox="1"/>
           <p:nvPr/>
         </p:nvSpPr>
@@ -8194,7 +8364,7 @@
       </p:sp>
       <p:sp>
         <p:nvSpPr>
-          <p:cNvPr id="9" name="TextBox 8"/>
+          <p:cNvPr id="11" name="TextBox 10"/>
           <p:cNvSpPr txBox="1"/>
           <p:nvPr/>
         </p:nvSpPr>
@@ -8237,7 +8407,7 @@
       </p:sp>
       <p:sp>
         <p:nvSpPr>
-          <p:cNvPr id="10" name="TextBox 9"/>
+          <p:cNvPr id="12" name="TextBox 11"/>
           <p:cNvSpPr txBox="1"/>
           <p:nvPr/>
         </p:nvSpPr>
@@ -8361,8 +8531,8 @@
         </p:nvSpPr>
         <p:spPr>
           <a:xfrm>
-            <a:off x="548640" y="411480"/>
-            <a:ext cx="11064240" cy="731520"/>
+            <a:off x="502920" y="182880"/>
+            <a:ext cx="2011680" cy="1188720"/>
           </a:xfrm>
           <a:prstGeom prst="rect">
             <a:avLst/>
@@ -8375,7 +8545,7 @@
           </a:bodyPr>
           <a:lstStyle/>
           <a:p>
-            <a:pPr rtl="1" algn="r">
+            <a:pPr rtl="0" algn="l">
               <a:spcBef>
                 <a:spcPts val="0"/>
               </a:spcBef>
@@ -8384,7 +8554,92 @@
               </a:spcAft>
             </a:pPr>
             <a:r>
-              <a:rPr sz="2900" b="1" i="0">
+              <a:rPr sz="5800" b="1" i="0">
+                <a:solidFill>
+                  <a:srgbClr val="3B1729"/>
+                </a:solidFill>
+                <a:latin typeface="Arial"/>
+                <a:cs typeface="Arial"/>
+              </a:rPr>
+              <a:t>10</a:t>
+            </a:r>
+          </a:p>
+        </p:txBody>
+      </p:sp>
+      <p:sp>
+        <p:nvSpPr>
+          <p:cNvPr id="3" name="Rectangle 2"/>
+          <p:cNvSpPr/>
+          <p:nvPr/>
+        </p:nvSpPr>
+        <p:spPr>
+          <a:xfrm>
+            <a:off x="4754880" y="292608"/>
+            <a:ext cx="6903720" cy="1042415"/>
+          </a:xfrm>
+          <a:prstGeom prst="rect">
+            <a:avLst/>
+          </a:prstGeom>
+          <a:solidFill>
+            <a:srgbClr val="3D1730"/>
+          </a:solidFill>
+          <a:ln>
+            <a:noFill/>
+          </a:ln>
+          <a:effectLst/>
+        </p:spPr>
+        <p:style>
+          <a:lnRef idx="1">
+            <a:schemeClr val="accent1"/>
+          </a:lnRef>
+          <a:fillRef idx="3">
+            <a:schemeClr val="accent1"/>
+          </a:fillRef>
+          <a:effectRef idx="2">
+            <a:schemeClr val="accent1"/>
+          </a:effectRef>
+          <a:fontRef idx="minor">
+            <a:schemeClr val="lt1"/>
+          </a:fontRef>
+        </p:style>
+        <p:txBody>
+          <a:bodyPr rtlCol="0" anchor="ctr"/>
+          <a:lstStyle/>
+          <a:p/>
+        </p:txBody>
+      </p:sp>
+      <p:sp>
+        <p:nvSpPr>
+          <p:cNvPr id="4" name="TextBox 3"/>
+          <p:cNvSpPr txBox="1"/>
+          <p:nvPr/>
+        </p:nvSpPr>
+        <p:spPr>
+          <a:xfrm>
+            <a:off x="5029200" y="411480"/>
+            <a:ext cx="6355080" cy="502920"/>
+          </a:xfrm>
+          <a:prstGeom prst="rect">
+            <a:avLst/>
+          </a:prstGeom>
+          <a:noFill/>
+        </p:spPr>
+        <p:txBody>
+          <a:bodyPr wrap="square" anchor="t" lIns="0" rIns="0" tIns="0" bIns="0">
+            <a:spAutoFit/>
+          </a:bodyPr>
+          <a:lstStyle/>
+          <a:p>
+            <a:pPr rtl="1" algn="r">
+              <a:spcBef>
+                <a:spcPts val="0"/>
+              </a:spcBef>
+              <a:spcAft>
+                <a:spcPts val="0"/>
+              </a:spcAft>
+            </a:pPr>
+            <a:r>
+              <a:rPr sz="2400" b="1" i="0">
                 <a:solidFill>
                   <a:srgbClr val="FBEEF4"/>
                 </a:solidFill>
@@ -8398,14 +8653,14 @@
       </p:sp>
       <p:sp>
         <p:nvSpPr>
-          <p:cNvPr id="3" name="TextBox 2"/>
+          <p:cNvPr id="5" name="TextBox 4"/>
           <p:cNvSpPr txBox="1"/>
           <p:nvPr/>
         </p:nvSpPr>
         <p:spPr>
           <a:xfrm>
-            <a:off x="548640" y="1133856"/>
-            <a:ext cx="11064240" cy="292608"/>
+            <a:off x="5029200" y="950976"/>
+            <a:ext cx="6355080" cy="274320"/>
           </a:xfrm>
           <a:prstGeom prst="rect">
             <a:avLst/>
@@ -8427,7 +8682,7 @@
               </a:spcAft>
             </a:pPr>
             <a:r>
-              <a:rPr sz="1250" b="1" i="0">
+              <a:rPr sz="1150" b="1" i="0">
                 <a:solidFill>
                   <a:srgbClr val="FF6FA5"/>
                 </a:solidFill>
@@ -8441,7 +8696,7 @@
       </p:sp>
       <p:sp>
         <p:nvSpPr>
-          <p:cNvPr id="4" name="TextBox 3"/>
+          <p:cNvPr id="6" name="TextBox 5"/>
           <p:cNvSpPr txBox="1"/>
           <p:nvPr/>
         </p:nvSpPr>
@@ -8484,7 +8739,7 @@
       </p:sp>
       <p:graphicFrame>
         <p:nvGraphicFramePr>
-          <p:cNvPr id="5" name="Table 4"/>
+          <p:cNvPr id="7" name="Table 6"/>
           <p:cNvGraphicFramePr>
             <a:graphicFrameLocks noGrp="1"/>
           </p:cNvGraphicFramePr>
@@ -8990,7 +9245,7 @@
       </p:graphicFrame>
       <p:sp>
         <p:nvSpPr>
-          <p:cNvPr id="6" name="Rounded Rectangle 5"/>
+          <p:cNvPr id="8" name="Rectangle 7"/>
           <p:cNvSpPr/>
           <p:nvPr/>
         </p:nvSpPr>
@@ -8999,7 +9254,7 @@
             <a:off x="5852160" y="2148840"/>
             <a:ext cx="5760720" cy="1874519"/>
           </a:xfrm>
-          <a:prstGeom prst="roundRect">
+          <a:prstGeom prst="rect">
             <a:avLst/>
           </a:prstGeom>
           <a:solidFill>
@@ -9032,7 +9287,7 @@
       </p:sp>
       <p:sp>
         <p:nvSpPr>
-          <p:cNvPr id="7" name="TextBox 6"/>
+          <p:cNvPr id="9" name="TextBox 8"/>
           <p:cNvSpPr txBox="1"/>
           <p:nvPr/>
         </p:nvSpPr>
@@ -9075,7 +9330,7 @@
       </p:sp>
       <p:sp>
         <p:nvSpPr>
-          <p:cNvPr id="8" name="TextBox 7"/>
+          <p:cNvPr id="10" name="TextBox 9"/>
           <p:cNvSpPr txBox="1"/>
           <p:nvPr/>
         </p:nvSpPr>
@@ -9121,7 +9376,7 @@
       </p:sp>
       <p:sp>
         <p:nvSpPr>
-          <p:cNvPr id="9" name="TextBox 8"/>
+          <p:cNvPr id="11" name="TextBox 10"/>
           <p:cNvSpPr txBox="1"/>
           <p:nvPr/>
         </p:nvSpPr>
@@ -9164,7 +9419,7 @@
       </p:sp>
       <p:sp>
         <p:nvSpPr>
-          <p:cNvPr id="10" name="Rounded Rectangle 9"/>
+          <p:cNvPr id="12" name="Rectangle 11"/>
           <p:cNvSpPr/>
           <p:nvPr/>
         </p:nvSpPr>
@@ -9173,7 +9428,7 @@
             <a:off x="548640" y="4663440"/>
             <a:ext cx="5486400" cy="1280160"/>
           </a:xfrm>
-          <a:prstGeom prst="roundRect">
+          <a:prstGeom prst="rect">
             <a:avLst/>
           </a:prstGeom>
           <a:solidFill>
@@ -9206,7 +9461,7 @@
       </p:sp>
       <p:sp>
         <p:nvSpPr>
-          <p:cNvPr id="11" name="TextBox 10"/>
+          <p:cNvPr id="13" name="TextBox 12"/>
           <p:cNvSpPr txBox="1"/>
           <p:nvPr/>
         </p:nvSpPr>
@@ -9249,7 +9504,7 @@
       </p:sp>
       <p:sp>
         <p:nvSpPr>
-          <p:cNvPr id="12" name="TextBox 11"/>
+          <p:cNvPr id="14" name="TextBox 13"/>
           <p:cNvSpPr txBox="1"/>
           <p:nvPr/>
         </p:nvSpPr>
@@ -9292,7 +9547,7 @@
       </p:sp>
       <p:sp>
         <p:nvSpPr>
-          <p:cNvPr id="13" name="TextBox 12"/>
+          <p:cNvPr id="15" name="TextBox 14"/>
           <p:cNvSpPr txBox="1"/>
           <p:nvPr/>
         </p:nvSpPr>
@@ -9335,7 +9590,7 @@
       </p:sp>
       <p:sp>
         <p:nvSpPr>
-          <p:cNvPr id="14" name="Rounded Rectangle 13"/>
+          <p:cNvPr id="16" name="Rectangle 15"/>
           <p:cNvSpPr/>
           <p:nvPr/>
         </p:nvSpPr>
@@ -9344,7 +9599,7 @@
             <a:off x="6309360" y="4663440"/>
             <a:ext cx="5303520" cy="1280160"/>
           </a:xfrm>
-          <a:prstGeom prst="roundRect">
+          <a:prstGeom prst="rect">
             <a:avLst/>
           </a:prstGeom>
           <a:solidFill>
@@ -9377,7 +9632,7 @@
       </p:sp>
       <p:sp>
         <p:nvSpPr>
-          <p:cNvPr id="15" name="TextBox 14"/>
+          <p:cNvPr id="17" name="TextBox 16"/>
           <p:cNvSpPr txBox="1"/>
           <p:nvPr/>
         </p:nvSpPr>
@@ -9420,7 +9675,7 @@
       </p:sp>
       <p:sp>
         <p:nvSpPr>
-          <p:cNvPr id="16" name="TextBox 15"/>
+          <p:cNvPr id="18" name="TextBox 17"/>
           <p:cNvSpPr txBox="1"/>
           <p:nvPr/>
         </p:nvSpPr>
@@ -9463,7 +9718,7 @@
       </p:sp>
       <p:sp>
         <p:nvSpPr>
-          <p:cNvPr id="17" name="TextBox 16"/>
+          <p:cNvPr id="19" name="TextBox 18"/>
           <p:cNvSpPr txBox="1"/>
           <p:nvPr/>
         </p:nvSpPr>
@@ -9538,8 +9793,8 @@
         </p:nvSpPr>
         <p:spPr>
           <a:xfrm>
-            <a:off x="548640" y="411480"/>
-            <a:ext cx="11064240" cy="731520"/>
+            <a:off x="502920" y="182880"/>
+            <a:ext cx="2011680" cy="1188720"/>
           </a:xfrm>
           <a:prstGeom prst="rect">
             <a:avLst/>
@@ -9552,7 +9807,7 @@
           </a:bodyPr>
           <a:lstStyle/>
           <a:p>
-            <a:pPr rtl="1" algn="r">
+            <a:pPr rtl="0" algn="l">
               <a:spcBef>
                 <a:spcPts val="0"/>
               </a:spcBef>
@@ -9561,7 +9816,92 @@
               </a:spcAft>
             </a:pPr>
             <a:r>
-              <a:rPr sz="2900" b="1" i="0">
+              <a:rPr sz="5800" b="1" i="0">
+                <a:solidFill>
+                  <a:srgbClr val="3B1729"/>
+                </a:solidFill>
+                <a:latin typeface="Arial"/>
+                <a:cs typeface="Arial"/>
+              </a:rPr>
+              <a:t>11</a:t>
+            </a:r>
+          </a:p>
+        </p:txBody>
+      </p:sp>
+      <p:sp>
+        <p:nvSpPr>
+          <p:cNvPr id="3" name="Rectangle 2"/>
+          <p:cNvSpPr/>
+          <p:nvPr/>
+        </p:nvSpPr>
+        <p:spPr>
+          <a:xfrm>
+            <a:off x="4754880" y="292608"/>
+            <a:ext cx="6903720" cy="1042415"/>
+          </a:xfrm>
+          <a:prstGeom prst="rect">
+            <a:avLst/>
+          </a:prstGeom>
+          <a:solidFill>
+            <a:srgbClr val="3D1730"/>
+          </a:solidFill>
+          <a:ln>
+            <a:noFill/>
+          </a:ln>
+          <a:effectLst/>
+        </p:spPr>
+        <p:style>
+          <a:lnRef idx="1">
+            <a:schemeClr val="accent1"/>
+          </a:lnRef>
+          <a:fillRef idx="3">
+            <a:schemeClr val="accent1"/>
+          </a:fillRef>
+          <a:effectRef idx="2">
+            <a:schemeClr val="accent1"/>
+          </a:effectRef>
+          <a:fontRef idx="minor">
+            <a:schemeClr val="lt1"/>
+          </a:fontRef>
+        </p:style>
+        <p:txBody>
+          <a:bodyPr rtlCol="0" anchor="ctr"/>
+          <a:lstStyle/>
+          <a:p/>
+        </p:txBody>
+      </p:sp>
+      <p:sp>
+        <p:nvSpPr>
+          <p:cNvPr id="4" name="TextBox 3"/>
+          <p:cNvSpPr txBox="1"/>
+          <p:nvPr/>
+        </p:nvSpPr>
+        <p:spPr>
+          <a:xfrm>
+            <a:off x="5029200" y="411480"/>
+            <a:ext cx="6355080" cy="502920"/>
+          </a:xfrm>
+          <a:prstGeom prst="rect">
+            <a:avLst/>
+          </a:prstGeom>
+          <a:noFill/>
+        </p:spPr>
+        <p:txBody>
+          <a:bodyPr wrap="square" anchor="t" lIns="0" rIns="0" tIns="0" bIns="0">
+            <a:spAutoFit/>
+          </a:bodyPr>
+          <a:lstStyle/>
+          <a:p>
+            <a:pPr rtl="1" algn="r">
+              <a:spcBef>
+                <a:spcPts val="0"/>
+              </a:spcBef>
+              <a:spcAft>
+                <a:spcPts val="0"/>
+              </a:spcAft>
+            </a:pPr>
+            <a:r>
+              <a:rPr sz="2400" b="1" i="0">
                 <a:solidFill>
                   <a:srgbClr val="FBEEF4"/>
                 </a:solidFill>
@@ -9575,14 +9915,14 @@
       </p:sp>
       <p:sp>
         <p:nvSpPr>
-          <p:cNvPr id="3" name="TextBox 2"/>
+          <p:cNvPr id="5" name="TextBox 4"/>
           <p:cNvSpPr txBox="1"/>
           <p:nvPr/>
         </p:nvSpPr>
         <p:spPr>
           <a:xfrm>
-            <a:off x="548640" y="1133856"/>
-            <a:ext cx="11064240" cy="292608"/>
+            <a:off x="5029200" y="950976"/>
+            <a:ext cx="6355080" cy="274320"/>
           </a:xfrm>
           <a:prstGeom prst="rect">
             <a:avLst/>
@@ -9604,7 +9944,7 @@
               </a:spcAft>
             </a:pPr>
             <a:r>
-              <a:rPr sz="1250" b="1" i="0">
+              <a:rPr sz="1150" b="1" i="0">
                 <a:solidFill>
                   <a:srgbClr val="FF6FA5"/>
                 </a:solidFill>
@@ -9618,7 +9958,7 @@
       </p:sp>
       <p:graphicFrame>
         <p:nvGraphicFramePr>
-          <p:cNvPr id="4" name="Table 3"/>
+          <p:cNvPr id="6" name="Table 5"/>
           <p:cNvGraphicFramePr>
             <a:graphicFrameLocks noGrp="1"/>
           </p:cNvGraphicFramePr>
@@ -10595,7 +10935,7 @@
       </p:graphicFrame>
       <p:sp>
         <p:nvSpPr>
-          <p:cNvPr id="5" name="TextBox 4"/>
+          <p:cNvPr id="7" name="TextBox 6"/>
           <p:cNvSpPr txBox="1"/>
           <p:nvPr/>
         </p:nvSpPr>
@@ -10638,7 +10978,7 @@
       </p:sp>
       <p:graphicFrame>
         <p:nvGraphicFramePr>
-          <p:cNvPr id="6" name="Table 5"/>
+          <p:cNvPr id="8" name="Table 7"/>
           <p:cNvGraphicFramePr>
             <a:graphicFrameLocks noGrp="1"/>
           </p:cNvGraphicFramePr>
@@ -11380,7 +11720,7 @@
       </p:graphicFrame>
       <p:sp>
         <p:nvSpPr>
-          <p:cNvPr id="7" name="Rounded Rectangle 6"/>
+          <p:cNvPr id="9" name="Rectangle 8"/>
           <p:cNvSpPr/>
           <p:nvPr/>
         </p:nvSpPr>
@@ -11389,7 +11729,7 @@
             <a:off x="6400800" y="3611880"/>
             <a:ext cx="5212080" cy="2331720"/>
           </a:xfrm>
-          <a:prstGeom prst="roundRect">
+          <a:prstGeom prst="rect">
             <a:avLst/>
           </a:prstGeom>
           <a:solidFill>
@@ -11422,7 +11762,7 @@
       </p:sp>
       <p:sp>
         <p:nvSpPr>
-          <p:cNvPr id="8" name="TextBox 7"/>
+          <p:cNvPr id="10" name="TextBox 9"/>
           <p:cNvSpPr txBox="1"/>
           <p:nvPr/>
         </p:nvSpPr>
@@ -11465,7 +11805,7 @@
       </p:sp>
       <p:sp>
         <p:nvSpPr>
-          <p:cNvPr id="9" name="TextBox 8"/>
+          <p:cNvPr id="11" name="TextBox 10"/>
           <p:cNvSpPr txBox="1"/>
           <p:nvPr/>
         </p:nvSpPr>
@@ -11829,8 +12169,8 @@
         </p:nvSpPr>
         <p:spPr>
           <a:xfrm>
-            <a:off x="548640" y="411480"/>
-            <a:ext cx="11064240" cy="731520"/>
+            <a:off x="502920" y="182880"/>
+            <a:ext cx="2011680" cy="1188720"/>
           </a:xfrm>
           <a:prstGeom prst="rect">
             <a:avLst/>
@@ -11843,7 +12183,7 @@
           </a:bodyPr>
           <a:lstStyle/>
           <a:p>
-            <a:pPr rtl="1" algn="r">
+            <a:pPr rtl="0" algn="l">
               <a:spcBef>
                 <a:spcPts val="0"/>
               </a:spcBef>
@@ -11852,73 +12192,30 @@
               </a:spcAft>
             </a:pPr>
             <a:r>
-              <a:rPr sz="2900" b="1" i="0">
+              <a:rPr sz="5800" b="1" i="0">
                 <a:solidFill>
-                  <a:srgbClr val="FBEEF4"/>
+                  <a:srgbClr val="3B1729"/>
                 </a:solidFill>
                 <a:latin typeface="Arial"/>
                 <a:cs typeface="Arial"/>
               </a:rPr>
-              <a:t>VideoMAE چطور یاد گرفت</a:t>
+              <a:t>12</a:t>
             </a:r>
           </a:p>
         </p:txBody>
       </p:sp>
       <p:sp>
         <p:nvSpPr>
-          <p:cNvPr id="3" name="TextBox 2"/>
-          <p:cNvSpPr txBox="1"/>
+          <p:cNvPr id="3" name="Rectangle 2"/>
+          <p:cNvSpPr/>
           <p:nvPr/>
         </p:nvSpPr>
         <p:spPr>
           <a:xfrm>
-            <a:off x="548640" y="1133856"/>
-            <a:ext cx="11064240" cy="292608"/>
+            <a:off x="4754880" y="292608"/>
+            <a:ext cx="6903720" cy="1042415"/>
           </a:xfrm>
           <a:prstGeom prst="rect">
-            <a:avLst/>
-          </a:prstGeom>
-          <a:noFill/>
-        </p:spPr>
-        <p:txBody>
-          <a:bodyPr wrap="square" anchor="t" lIns="0" rIns="0" tIns="0" bIns="0">
-            <a:spAutoFit/>
-          </a:bodyPr>
-          <a:lstStyle/>
-          <a:p>
-            <a:pPr rtl="1" algn="r">
-              <a:spcBef>
-                <a:spcPts val="0"/>
-              </a:spcBef>
-              <a:spcAft>
-                <a:spcPts val="0"/>
-              </a:spcAft>
-            </a:pPr>
-            <a:r>
-              <a:rPr sz="1250" b="1" i="0">
-                <a:solidFill>
-                  <a:srgbClr val="FF6FA5"/>
-                </a:solidFill>
-                <a:latin typeface="Arial"/>
-                <a:cs typeface="Arial"/>
-              </a:rPr>
-              <a:t>مسیر دوم</a:t>
-            </a:r>
-          </a:p>
-        </p:txBody>
-      </p:sp>
-      <p:sp>
-        <p:nvSpPr>
-          <p:cNvPr id="4" name="Rounded Rectangle 3"/>
-          <p:cNvSpPr/>
-          <p:nvPr/>
-        </p:nvSpPr>
-        <p:spPr>
-          <a:xfrm>
-            <a:off x="548640" y="1645920"/>
-            <a:ext cx="7589520" cy="868680"/>
-          </a:xfrm>
-          <a:prstGeom prst="roundRect">
             <a:avLst/>
           </a:prstGeom>
           <a:solidFill>
@@ -11951,14 +12248,14 @@
       </p:sp>
       <p:sp>
         <p:nvSpPr>
-          <p:cNvPr id="5" name="TextBox 4"/>
+          <p:cNvPr id="4" name="TextBox 3"/>
           <p:cNvSpPr txBox="1"/>
           <p:nvPr/>
         </p:nvSpPr>
         <p:spPr>
           <a:xfrm>
-            <a:off x="7223759" y="1755648"/>
-            <a:ext cx="822960" cy="566928"/>
+            <a:off x="5029200" y="411480"/>
+            <a:ext cx="6355080" cy="502920"/>
           </a:xfrm>
           <a:prstGeom prst="rect">
             <a:avLst/>
@@ -11971,7 +12268,7 @@
           </a:bodyPr>
           <a:lstStyle/>
           <a:p>
-            <a:pPr rtl="0" algn="ctr">
+            <a:pPr rtl="1" algn="r">
               <a:spcBef>
                 <a:spcPts val="0"/>
               </a:spcBef>
@@ -11980,28 +12277,28 @@
               </a:spcAft>
             </a:pPr>
             <a:r>
-              <a:rPr sz="2700" b="1" i="0">
+              <a:rPr sz="2400" b="1" i="0">
                 <a:solidFill>
-                  <a:srgbClr val="F6CFDE"/>
+                  <a:srgbClr val="FBEEF4"/>
                 </a:solidFill>
                 <a:latin typeface="Arial"/>
                 <a:cs typeface="Arial"/>
               </a:rPr>
-              <a:t>1</a:t>
+              <a:t>VideoMAE چطور یاد گرفت</a:t>
             </a:r>
           </a:p>
         </p:txBody>
       </p:sp>
       <p:sp>
         <p:nvSpPr>
-          <p:cNvPr id="6" name="TextBox 5"/>
+          <p:cNvPr id="5" name="TextBox 4"/>
           <p:cNvSpPr txBox="1"/>
           <p:nvPr/>
         </p:nvSpPr>
         <p:spPr>
           <a:xfrm>
-            <a:off x="914400" y="1737360"/>
-            <a:ext cx="6309360" cy="292608"/>
+            <a:off x="5029200" y="950976"/>
+            <a:ext cx="6355080" cy="274320"/>
           </a:xfrm>
           <a:prstGeom prst="rect">
             <a:avLst/>
@@ -12023,73 +12320,30 @@
               </a:spcAft>
             </a:pPr>
             <a:r>
-              <a:rPr sz="1500" b="1" i="0">
+              <a:rPr sz="1150" b="1" i="0">
                 <a:solidFill>
-                  <a:srgbClr val="FBEEF4"/>
+                  <a:srgbClr val="FF6FA5"/>
                 </a:solidFill>
                 <a:latin typeface="Arial"/>
                 <a:cs typeface="Arial"/>
               </a:rPr>
-              <a:t>پوشاندن</a:t>
+              <a:t>مسیر دوم</a:t>
             </a:r>
           </a:p>
         </p:txBody>
       </p:sp>
       <p:sp>
         <p:nvSpPr>
-          <p:cNvPr id="7" name="TextBox 6"/>
-          <p:cNvSpPr txBox="1"/>
+          <p:cNvPr id="6" name="Rectangle 5"/>
+          <p:cNvSpPr/>
           <p:nvPr/>
         </p:nvSpPr>
         <p:spPr>
           <a:xfrm>
-            <a:off x="914400" y="2057400"/>
-            <a:ext cx="6309360" cy="384048"/>
+            <a:off x="548640" y="1645920"/>
+            <a:ext cx="7589520" cy="868680"/>
           </a:xfrm>
           <a:prstGeom prst="rect">
-            <a:avLst/>
-          </a:prstGeom>
-          <a:noFill/>
-        </p:spPr>
-        <p:txBody>
-          <a:bodyPr wrap="square" anchor="t" lIns="0" rIns="0" tIns="0" bIns="0">
-            <a:spAutoFit/>
-          </a:bodyPr>
-          <a:lstStyle/>
-          <a:p>
-            <a:pPr rtl="1" algn="r">
-              <a:spcBef>
-                <a:spcPts val="0"/>
-              </a:spcBef>
-              <a:spcAft>
-                <a:spcPts val="0"/>
-              </a:spcAft>
-            </a:pPr>
-            <a:r>
-              <a:rPr sz="1200" b="0" i="0">
-                <a:solidFill>
-                  <a:srgbClr val="B58FA2"/>
-                </a:solidFill>
-                <a:latin typeface="Arial"/>
-                <a:cs typeface="Arial"/>
-              </a:rPr>
-              <a:t>حدود ۹۰ درصد مکعب‌های فضازمانی پوشانده می‌شوند</a:t>
-            </a:r>
-          </a:p>
-        </p:txBody>
-      </p:sp>
-      <p:sp>
-        <p:nvSpPr>
-          <p:cNvPr id="8" name="Rounded Rectangle 7"/>
-          <p:cNvSpPr/>
-          <p:nvPr/>
-        </p:nvSpPr>
-        <p:spPr>
-          <a:xfrm>
-            <a:off x="548640" y="2670048"/>
-            <a:ext cx="7589520" cy="868680"/>
-          </a:xfrm>
-          <a:prstGeom prst="roundRect">
             <a:avLst/>
           </a:prstGeom>
           <a:solidFill>
@@ -12122,13 +12376,13 @@
       </p:sp>
       <p:sp>
         <p:nvSpPr>
-          <p:cNvPr id="9" name="TextBox 8"/>
+          <p:cNvPr id="7" name="TextBox 6"/>
           <p:cNvSpPr txBox="1"/>
           <p:nvPr/>
         </p:nvSpPr>
         <p:spPr>
           <a:xfrm>
-            <a:off x="7223759" y="2779776"/>
+            <a:off x="7223759" y="1755648"/>
             <a:ext cx="822960" cy="566928"/>
           </a:xfrm>
           <a:prstGeom prst="rect">
@@ -12158,20 +12412,20 @@
                 <a:latin typeface="Arial"/>
                 <a:cs typeface="Arial"/>
               </a:rPr>
-              <a:t>2</a:t>
+              <a:t>1</a:t>
             </a:r>
           </a:p>
         </p:txBody>
       </p:sp>
       <p:sp>
         <p:nvSpPr>
-          <p:cNvPr id="10" name="TextBox 9"/>
+          <p:cNvPr id="8" name="TextBox 7"/>
           <p:cNvSpPr txBox="1"/>
           <p:nvPr/>
         </p:nvSpPr>
         <p:spPr>
           <a:xfrm>
-            <a:off x="914400" y="2761488"/>
+            <a:off x="914400" y="1737360"/>
             <a:ext cx="6309360" cy="292608"/>
           </a:xfrm>
           <a:prstGeom prst="rect">
@@ -12201,20 +12455,20 @@
                 <a:latin typeface="Arial"/>
                 <a:cs typeface="Arial"/>
               </a:rPr>
-              <a:t>بازسازی</a:t>
+              <a:t>پوشاندن</a:t>
             </a:r>
           </a:p>
         </p:txBody>
       </p:sp>
       <p:sp>
         <p:nvSpPr>
-          <p:cNvPr id="11" name="TextBox 10"/>
+          <p:cNvPr id="9" name="TextBox 8"/>
           <p:cNvSpPr txBox="1"/>
           <p:nvPr/>
         </p:nvSpPr>
         <p:spPr>
           <a:xfrm>
-            <a:off x="914400" y="3081528"/>
+            <a:off x="914400" y="2057400"/>
             <a:ext cx="6309360" cy="384048"/>
           </a:xfrm>
           <a:prstGeom prst="rect">
@@ -12244,23 +12498,23 @@
                 <a:latin typeface="Arial"/>
                 <a:cs typeface="Arial"/>
               </a:rPr>
-              <a:t>رمزگذار فقط ۱۰ درصد باقی‌مانده را می‌بیند و رمزگشا جای خالی‌ها را حدس می‌زند</a:t>
+              <a:t>حدود ۹۰ درصد مکعب‌های فضازمانی پوشانده می‌شوند</a:t>
             </a:r>
           </a:p>
         </p:txBody>
       </p:sp>
       <p:sp>
         <p:nvSpPr>
-          <p:cNvPr id="12" name="Rounded Rectangle 11"/>
+          <p:cNvPr id="10" name="Rectangle 9"/>
           <p:cNvSpPr/>
           <p:nvPr/>
         </p:nvSpPr>
         <p:spPr>
           <a:xfrm>
-            <a:off x="548640" y="3694176"/>
+            <a:off x="548640" y="2670048"/>
             <a:ext cx="7589520" cy="868680"/>
           </a:xfrm>
-          <a:prstGeom prst="roundRect">
+          <a:prstGeom prst="rect">
             <a:avLst/>
           </a:prstGeom>
           <a:solidFill>
@@ -12293,13 +12547,13 @@
       </p:sp>
       <p:sp>
         <p:nvSpPr>
-          <p:cNvPr id="13" name="TextBox 12"/>
+          <p:cNvPr id="11" name="TextBox 10"/>
           <p:cNvSpPr txBox="1"/>
           <p:nvPr/>
         </p:nvSpPr>
         <p:spPr>
           <a:xfrm>
-            <a:off x="7223759" y="3803904"/>
+            <a:off x="7223759" y="2779776"/>
             <a:ext cx="822960" cy="566928"/>
           </a:xfrm>
           <a:prstGeom prst="rect">
@@ -12329,20 +12583,20 @@
                 <a:latin typeface="Arial"/>
                 <a:cs typeface="Arial"/>
               </a:rPr>
-              <a:t>3</a:t>
+              <a:t>2</a:t>
             </a:r>
           </a:p>
         </p:txBody>
       </p:sp>
       <p:sp>
         <p:nvSpPr>
-          <p:cNvPr id="14" name="TextBox 13"/>
+          <p:cNvPr id="12" name="TextBox 11"/>
           <p:cNvSpPr txBox="1"/>
           <p:nvPr/>
         </p:nvSpPr>
         <p:spPr>
           <a:xfrm>
-            <a:off x="914400" y="3785615"/>
+            <a:off x="914400" y="2761488"/>
             <a:ext cx="6309360" cy="292608"/>
           </a:xfrm>
           <a:prstGeom prst="rect">
@@ -12372,20 +12626,20 @@
                 <a:latin typeface="Arial"/>
                 <a:cs typeface="Arial"/>
               </a:rPr>
-              <a:t>بدون برچسب</a:t>
+              <a:t>بازسازی</a:t>
             </a:r>
           </a:p>
         </p:txBody>
       </p:sp>
       <p:sp>
         <p:nvSpPr>
-          <p:cNvPr id="15" name="TextBox 14"/>
+          <p:cNvPr id="13" name="TextBox 12"/>
           <p:cNvSpPr txBox="1"/>
           <p:nvPr/>
         </p:nvSpPr>
         <p:spPr>
           <a:xfrm>
-            <a:off x="914400" y="4105656"/>
+            <a:off x="914400" y="3081528"/>
             <a:ext cx="6309360" cy="384048"/>
           </a:xfrm>
           <a:prstGeom prst="rect">
@@ -12415,23 +12669,23 @@
                 <a:latin typeface="Arial"/>
                 <a:cs typeface="Arial"/>
               </a:rPr>
-              <a:t>خود ویدیو هم سؤال است و هم جواب، پس روی حجم عظیمی از داده ممکن است</a:t>
+              <a:t>رمزگذار فقط ۱۰ درصد باقی‌مانده را می‌بیند و رمزگشا جای خالی‌ها را حدس می‌زند</a:t>
             </a:r>
           </a:p>
         </p:txBody>
       </p:sp>
       <p:sp>
         <p:nvSpPr>
-          <p:cNvPr id="16" name="Rounded Rectangle 15"/>
+          <p:cNvPr id="14" name="Rectangle 13"/>
           <p:cNvSpPr/>
           <p:nvPr/>
         </p:nvSpPr>
         <p:spPr>
           <a:xfrm>
-            <a:off x="548640" y="4718304"/>
+            <a:off x="548640" y="3694176"/>
             <a:ext cx="7589520" cy="868680"/>
           </a:xfrm>
-          <a:prstGeom prst="roundRect">
+          <a:prstGeom prst="rect">
             <a:avLst/>
           </a:prstGeom>
           <a:solidFill>
@@ -12464,7 +12718,178 @@
       </p:sp>
       <p:sp>
         <p:nvSpPr>
+          <p:cNvPr id="15" name="TextBox 14"/>
+          <p:cNvSpPr txBox="1"/>
+          <p:nvPr/>
+        </p:nvSpPr>
+        <p:spPr>
+          <a:xfrm>
+            <a:off x="7223759" y="3803904"/>
+            <a:ext cx="822960" cy="566928"/>
+          </a:xfrm>
+          <a:prstGeom prst="rect">
+            <a:avLst/>
+          </a:prstGeom>
+          <a:noFill/>
+        </p:spPr>
+        <p:txBody>
+          <a:bodyPr wrap="square" anchor="t" lIns="0" rIns="0" tIns="0" bIns="0">
+            <a:spAutoFit/>
+          </a:bodyPr>
+          <a:lstStyle/>
+          <a:p>
+            <a:pPr rtl="0" algn="ctr">
+              <a:spcBef>
+                <a:spcPts val="0"/>
+              </a:spcBef>
+              <a:spcAft>
+                <a:spcPts val="0"/>
+              </a:spcAft>
+            </a:pPr>
+            <a:r>
+              <a:rPr sz="2700" b="1" i="0">
+                <a:solidFill>
+                  <a:srgbClr val="F6CFDE"/>
+                </a:solidFill>
+                <a:latin typeface="Arial"/>
+                <a:cs typeface="Arial"/>
+              </a:rPr>
+              <a:t>3</a:t>
+            </a:r>
+          </a:p>
+        </p:txBody>
+      </p:sp>
+      <p:sp>
+        <p:nvSpPr>
+          <p:cNvPr id="16" name="TextBox 15"/>
+          <p:cNvSpPr txBox="1"/>
+          <p:nvPr/>
+        </p:nvSpPr>
+        <p:spPr>
+          <a:xfrm>
+            <a:off x="914400" y="3785615"/>
+            <a:ext cx="6309360" cy="292608"/>
+          </a:xfrm>
+          <a:prstGeom prst="rect">
+            <a:avLst/>
+          </a:prstGeom>
+          <a:noFill/>
+        </p:spPr>
+        <p:txBody>
+          <a:bodyPr wrap="square" anchor="t" lIns="0" rIns="0" tIns="0" bIns="0">
+            <a:spAutoFit/>
+          </a:bodyPr>
+          <a:lstStyle/>
+          <a:p>
+            <a:pPr rtl="1" algn="r">
+              <a:spcBef>
+                <a:spcPts val="0"/>
+              </a:spcBef>
+              <a:spcAft>
+                <a:spcPts val="0"/>
+              </a:spcAft>
+            </a:pPr>
+            <a:r>
+              <a:rPr sz="1500" b="1" i="0">
+                <a:solidFill>
+                  <a:srgbClr val="FBEEF4"/>
+                </a:solidFill>
+                <a:latin typeface="Arial"/>
+                <a:cs typeface="Arial"/>
+              </a:rPr>
+              <a:t>بدون برچسب</a:t>
+            </a:r>
+          </a:p>
+        </p:txBody>
+      </p:sp>
+      <p:sp>
+        <p:nvSpPr>
           <p:cNvPr id="17" name="TextBox 16"/>
+          <p:cNvSpPr txBox="1"/>
+          <p:nvPr/>
+        </p:nvSpPr>
+        <p:spPr>
+          <a:xfrm>
+            <a:off x="914400" y="4105656"/>
+            <a:ext cx="6309360" cy="384048"/>
+          </a:xfrm>
+          <a:prstGeom prst="rect">
+            <a:avLst/>
+          </a:prstGeom>
+          <a:noFill/>
+        </p:spPr>
+        <p:txBody>
+          <a:bodyPr wrap="square" anchor="t" lIns="0" rIns="0" tIns="0" bIns="0">
+            <a:spAutoFit/>
+          </a:bodyPr>
+          <a:lstStyle/>
+          <a:p>
+            <a:pPr rtl="1" algn="r">
+              <a:spcBef>
+                <a:spcPts val="0"/>
+              </a:spcBef>
+              <a:spcAft>
+                <a:spcPts val="0"/>
+              </a:spcAft>
+            </a:pPr>
+            <a:r>
+              <a:rPr sz="1200" b="0" i="0">
+                <a:solidFill>
+                  <a:srgbClr val="B58FA2"/>
+                </a:solidFill>
+                <a:latin typeface="Arial"/>
+                <a:cs typeface="Arial"/>
+              </a:rPr>
+              <a:t>خود ویدیو هم سؤال است و هم جواب، پس روی حجم عظیمی از داده ممکن است</a:t>
+            </a:r>
+          </a:p>
+        </p:txBody>
+      </p:sp>
+      <p:sp>
+        <p:nvSpPr>
+          <p:cNvPr id="18" name="Rectangle 17"/>
+          <p:cNvSpPr/>
+          <p:nvPr/>
+        </p:nvSpPr>
+        <p:spPr>
+          <a:xfrm>
+            <a:off x="548640" y="4718304"/>
+            <a:ext cx="7589520" cy="868680"/>
+          </a:xfrm>
+          <a:prstGeom prst="rect">
+            <a:avLst/>
+          </a:prstGeom>
+          <a:solidFill>
+            <a:srgbClr val="3D1730"/>
+          </a:solidFill>
+          <a:ln>
+            <a:noFill/>
+          </a:ln>
+          <a:effectLst/>
+        </p:spPr>
+        <p:style>
+          <a:lnRef idx="1">
+            <a:schemeClr val="accent1"/>
+          </a:lnRef>
+          <a:fillRef idx="3">
+            <a:schemeClr val="accent1"/>
+          </a:fillRef>
+          <a:effectRef idx="2">
+            <a:schemeClr val="accent1"/>
+          </a:effectRef>
+          <a:fontRef idx="minor">
+            <a:schemeClr val="lt1"/>
+          </a:fontRef>
+        </p:style>
+        <p:txBody>
+          <a:bodyPr rtlCol="0" anchor="ctr"/>
+          <a:lstStyle/>
+          <a:p/>
+        </p:txBody>
+      </p:sp>
+      <p:sp>
+        <p:nvSpPr>
+          <p:cNvPr id="19" name="TextBox 18"/>
           <p:cNvSpPr txBox="1"/>
           <p:nvPr/>
         </p:nvSpPr>
@@ -12507,7 +12932,7 @@
       </p:sp>
       <p:sp>
         <p:nvSpPr>
-          <p:cNvPr id="18" name="TextBox 17"/>
+          <p:cNvPr id="20" name="TextBox 19"/>
           <p:cNvSpPr txBox="1"/>
           <p:nvPr/>
         </p:nvSpPr>
@@ -12550,7 +12975,7 @@
       </p:sp>
       <p:sp>
         <p:nvSpPr>
-          <p:cNvPr id="19" name="TextBox 18"/>
+          <p:cNvPr id="21" name="TextBox 20"/>
           <p:cNvSpPr txBox="1"/>
           <p:nvPr/>
         </p:nvSpPr>
@@ -12593,7 +13018,7 @@
       </p:sp>
       <p:sp>
         <p:nvSpPr>
-          <p:cNvPr id="20" name="Rounded Rectangle 19"/>
+          <p:cNvPr id="22" name="Rectangle 21"/>
           <p:cNvSpPr/>
           <p:nvPr/>
         </p:nvSpPr>
@@ -12602,7 +13027,7 @@
             <a:off x="8412480" y="1645920"/>
             <a:ext cx="3200400" cy="4023360"/>
           </a:xfrm>
-          <a:prstGeom prst="roundRect">
+          <a:prstGeom prst="rect">
             <a:avLst/>
           </a:prstGeom>
           <a:solidFill>
@@ -12635,7 +13060,7 @@
       </p:sp>
       <p:sp>
         <p:nvSpPr>
-          <p:cNvPr id="21" name="TextBox 20"/>
+          <p:cNvPr id="23" name="TextBox 22"/>
           <p:cNvSpPr txBox="1"/>
           <p:nvPr/>
         </p:nvSpPr>
@@ -12678,7 +13103,7 @@
       </p:sp>
       <p:sp>
         <p:nvSpPr>
-          <p:cNvPr id="22" name="TextBox 21"/>
+          <p:cNvPr id="24" name="TextBox 23"/>
           <p:cNvSpPr txBox="1"/>
           <p:nvPr/>
         </p:nvSpPr>
@@ -12848,8 +13273,8 @@
         </p:nvSpPr>
         <p:spPr>
           <a:xfrm>
-            <a:off x="548640" y="411480"/>
-            <a:ext cx="11064240" cy="731520"/>
+            <a:off x="502920" y="182880"/>
+            <a:ext cx="2011680" cy="1188720"/>
           </a:xfrm>
           <a:prstGeom prst="rect">
             <a:avLst/>
@@ -12862,7 +13287,7 @@
           </a:bodyPr>
           <a:lstStyle/>
           <a:p>
-            <a:pPr rtl="1" algn="r">
+            <a:pPr rtl="0" algn="l">
               <a:spcBef>
                 <a:spcPts val="0"/>
               </a:spcBef>
@@ -12871,7 +13296,92 @@
               </a:spcAft>
             </a:pPr>
             <a:r>
-              <a:rPr sz="2900" b="1" i="0">
+              <a:rPr sz="5800" b="1" i="0">
+                <a:solidFill>
+                  <a:srgbClr val="3B1729"/>
+                </a:solidFill>
+                <a:latin typeface="Arial"/>
+                <a:cs typeface="Arial"/>
+              </a:rPr>
+              <a:t>13</a:t>
+            </a:r>
+          </a:p>
+        </p:txBody>
+      </p:sp>
+      <p:sp>
+        <p:nvSpPr>
+          <p:cNvPr id="3" name="Rectangle 2"/>
+          <p:cNvSpPr/>
+          <p:nvPr/>
+        </p:nvSpPr>
+        <p:spPr>
+          <a:xfrm>
+            <a:off x="4754880" y="292608"/>
+            <a:ext cx="6903720" cy="1042415"/>
+          </a:xfrm>
+          <a:prstGeom prst="rect">
+            <a:avLst/>
+          </a:prstGeom>
+          <a:solidFill>
+            <a:srgbClr val="3D1730"/>
+          </a:solidFill>
+          <a:ln>
+            <a:noFill/>
+          </a:ln>
+          <a:effectLst/>
+        </p:spPr>
+        <p:style>
+          <a:lnRef idx="1">
+            <a:schemeClr val="accent1"/>
+          </a:lnRef>
+          <a:fillRef idx="3">
+            <a:schemeClr val="accent1"/>
+          </a:fillRef>
+          <a:effectRef idx="2">
+            <a:schemeClr val="accent1"/>
+          </a:effectRef>
+          <a:fontRef idx="minor">
+            <a:schemeClr val="lt1"/>
+          </a:fontRef>
+        </p:style>
+        <p:txBody>
+          <a:bodyPr rtlCol="0" anchor="ctr"/>
+          <a:lstStyle/>
+          <a:p/>
+        </p:txBody>
+      </p:sp>
+      <p:sp>
+        <p:nvSpPr>
+          <p:cNvPr id="4" name="TextBox 3"/>
+          <p:cNvSpPr txBox="1"/>
+          <p:nvPr/>
+        </p:nvSpPr>
+        <p:spPr>
+          <a:xfrm>
+            <a:off x="5029200" y="411480"/>
+            <a:ext cx="6355080" cy="502920"/>
+          </a:xfrm>
+          <a:prstGeom prst="rect">
+            <a:avLst/>
+          </a:prstGeom>
+          <a:noFill/>
+        </p:spPr>
+        <p:txBody>
+          <a:bodyPr wrap="square" anchor="t" lIns="0" rIns="0" tIns="0" bIns="0">
+            <a:spAutoFit/>
+          </a:bodyPr>
+          <a:lstStyle/>
+          <a:p>
+            <a:pPr rtl="1" algn="r">
+              <a:spcBef>
+                <a:spcPts val="0"/>
+              </a:spcBef>
+              <a:spcAft>
+                <a:spcPts val="0"/>
+              </a:spcAft>
+            </a:pPr>
+            <a:r>
+              <a:rPr sz="2400" b="1" i="0">
                 <a:solidFill>
                   <a:srgbClr val="FBEEF4"/>
                 </a:solidFill>
@@ -12885,14 +13395,14 @@
       </p:sp>
       <p:sp>
         <p:nvSpPr>
-          <p:cNvPr id="3" name="TextBox 2"/>
+          <p:cNvPr id="5" name="TextBox 4"/>
           <p:cNvSpPr txBox="1"/>
           <p:nvPr/>
         </p:nvSpPr>
         <p:spPr>
           <a:xfrm>
-            <a:off x="548640" y="1133856"/>
-            <a:ext cx="11064240" cy="292608"/>
+            <a:off x="5029200" y="950976"/>
+            <a:ext cx="6355080" cy="274320"/>
           </a:xfrm>
           <a:prstGeom prst="rect">
             <a:avLst/>
@@ -12914,7 +13424,7 @@
               </a:spcAft>
             </a:pPr>
             <a:r>
-              <a:rPr sz="1250" b="1" i="0">
+              <a:rPr sz="1150" b="1" i="0">
                 <a:solidFill>
                   <a:srgbClr val="FF6FA5"/>
                 </a:solidFill>
@@ -12928,7 +13438,7 @@
       </p:sp>
       <p:sp>
         <p:nvSpPr>
-          <p:cNvPr id="4" name="TextBox 3"/>
+          <p:cNvPr id="6" name="TextBox 5"/>
           <p:cNvSpPr txBox="1"/>
           <p:nvPr/>
         </p:nvSpPr>
@@ -12971,7 +13481,7 @@
       </p:sp>
       <p:sp>
         <p:nvSpPr>
-          <p:cNvPr id="5" name="TextBox 4"/>
+          <p:cNvPr id="7" name="TextBox 6"/>
           <p:cNvSpPr txBox="1"/>
           <p:nvPr/>
         </p:nvSpPr>
@@ -13014,7 +13524,7 @@
       </p:sp>
       <p:sp>
         <p:nvSpPr>
-          <p:cNvPr id="6" name="TextBox 5"/>
+          <p:cNvPr id="8" name="TextBox 7"/>
           <p:cNvSpPr txBox="1"/>
           <p:nvPr/>
         </p:nvSpPr>
@@ -13057,7 +13567,7 @@
       </p:sp>
       <p:sp>
         <p:nvSpPr>
-          <p:cNvPr id="7" name="Left Arrow 6"/>
+          <p:cNvPr id="9" name="Left Arrow 8"/>
           <p:cNvSpPr/>
           <p:nvPr/>
         </p:nvSpPr>
@@ -13099,7 +13609,7 @@
       </p:sp>
       <p:sp>
         <p:nvSpPr>
-          <p:cNvPr id="8" name="TextBox 7"/>
+          <p:cNvPr id="10" name="TextBox 9"/>
           <p:cNvSpPr txBox="1"/>
           <p:nvPr/>
         </p:nvSpPr>
@@ -13142,7 +13652,7 @@
       </p:sp>
       <p:sp>
         <p:nvSpPr>
-          <p:cNvPr id="9" name="TextBox 8"/>
+          <p:cNvPr id="11" name="TextBox 10"/>
           <p:cNvSpPr txBox="1"/>
           <p:nvPr/>
         </p:nvSpPr>
@@ -13185,7 +13695,7 @@
       </p:sp>
       <p:sp>
         <p:nvSpPr>
-          <p:cNvPr id="10" name="TextBox 9"/>
+          <p:cNvPr id="12" name="TextBox 11"/>
           <p:cNvSpPr txBox="1"/>
           <p:nvPr/>
         </p:nvSpPr>
@@ -13228,7 +13738,7 @@
       </p:sp>
       <p:sp>
         <p:nvSpPr>
-          <p:cNvPr id="11" name="TextBox 10"/>
+          <p:cNvPr id="13" name="TextBox 12"/>
           <p:cNvSpPr txBox="1"/>
           <p:nvPr/>
         </p:nvSpPr>
@@ -13271,7 +13781,7 @@
       </p:sp>
       <p:graphicFrame>
         <p:nvGraphicFramePr>
-          <p:cNvPr id="12" name="Table 11"/>
+          <p:cNvPr id="14" name="Table 13"/>
           <p:cNvGraphicFramePr>
             <a:graphicFrameLocks noGrp="1"/>
           </p:cNvGraphicFramePr>
@@ -14156,7 +14666,7 @@
       </p:graphicFrame>
       <p:sp>
         <p:nvSpPr>
-          <p:cNvPr id="13" name="TextBox 12"/>
+          <p:cNvPr id="15" name="TextBox 14"/>
           <p:cNvSpPr txBox="1"/>
           <p:nvPr/>
         </p:nvSpPr>
@@ -14231,8 +14741,8 @@
         </p:nvSpPr>
         <p:spPr>
           <a:xfrm>
-            <a:off x="548640" y="411480"/>
-            <a:ext cx="11064240" cy="731520"/>
+            <a:off x="502920" y="182880"/>
+            <a:ext cx="2011680" cy="1188720"/>
           </a:xfrm>
           <a:prstGeom prst="rect">
             <a:avLst/>
@@ -14245,7 +14755,7 @@
           </a:bodyPr>
           <a:lstStyle/>
           <a:p>
-            <a:pPr rtl="1" algn="r">
+            <a:pPr rtl="0" algn="l">
               <a:spcBef>
                 <a:spcPts val="0"/>
               </a:spcBef>
@@ -14254,73 +14764,30 @@
               </a:spcAft>
             </a:pPr>
             <a:r>
-              <a:rPr sz="2900" b="1" i="0">
+              <a:rPr sz="5800" b="1" i="0">
                 <a:solidFill>
-                  <a:srgbClr val="FBEEF4"/>
+                  <a:srgbClr val="3B1729"/>
                 </a:solidFill>
                 <a:latin typeface="Arial"/>
                 <a:cs typeface="Arial"/>
               </a:rPr>
-              <a:t>خط لوله نهایی</a:t>
+              <a:t>14</a:t>
             </a:r>
           </a:p>
         </p:txBody>
       </p:sp>
       <p:sp>
         <p:nvSpPr>
-          <p:cNvPr id="3" name="TextBox 2"/>
-          <p:cNvSpPr txBox="1"/>
+          <p:cNvPr id="3" name="Rectangle 2"/>
+          <p:cNvSpPr/>
           <p:nvPr/>
         </p:nvSpPr>
         <p:spPr>
           <a:xfrm>
-            <a:off x="548640" y="1133856"/>
-            <a:ext cx="11064240" cy="292608"/>
+            <a:off x="4754880" y="292608"/>
+            <a:ext cx="6903720" cy="1042415"/>
           </a:xfrm>
           <a:prstGeom prst="rect">
-            <a:avLst/>
-          </a:prstGeom>
-          <a:noFill/>
-        </p:spPr>
-        <p:txBody>
-          <a:bodyPr wrap="square" anchor="t" lIns="0" rIns="0" tIns="0" bIns="0">
-            <a:spAutoFit/>
-          </a:bodyPr>
-          <a:lstStyle/>
-          <a:p>
-            <a:pPr rtl="1" algn="r">
-              <a:spcBef>
-                <a:spcPts val="0"/>
-              </a:spcBef>
-              <a:spcAft>
-                <a:spcPts val="0"/>
-              </a:spcAft>
-            </a:pPr>
-            <a:r>
-              <a:rPr sz="1250" b="1" i="0">
-                <a:solidFill>
-                  <a:srgbClr val="FF6FA5"/>
-                </a:solidFill>
-                <a:latin typeface="Arial"/>
-                <a:cs typeface="Arial"/>
-              </a:rPr>
-              <a:t>مسیر دوم</a:t>
-            </a:r>
-          </a:p>
-        </p:txBody>
-      </p:sp>
-      <p:sp>
-        <p:nvSpPr>
-          <p:cNvPr id="4" name="Rounded Rectangle 3"/>
-          <p:cNvSpPr/>
-          <p:nvPr/>
-        </p:nvSpPr>
-        <p:spPr>
-          <a:xfrm>
-            <a:off x="9098280" y="1737360"/>
-            <a:ext cx="2560320" cy="1371600"/>
-          </a:xfrm>
-          <a:prstGeom prst="roundRect">
             <a:avLst/>
           </a:prstGeom>
           <a:solidFill>
@@ -14353,7 +14820,135 @@
       </p:sp>
       <p:sp>
         <p:nvSpPr>
+          <p:cNvPr id="4" name="TextBox 3"/>
+          <p:cNvSpPr txBox="1"/>
+          <p:nvPr/>
+        </p:nvSpPr>
+        <p:spPr>
+          <a:xfrm>
+            <a:off x="5029200" y="411480"/>
+            <a:ext cx="6355080" cy="502920"/>
+          </a:xfrm>
+          <a:prstGeom prst="rect">
+            <a:avLst/>
+          </a:prstGeom>
+          <a:noFill/>
+        </p:spPr>
+        <p:txBody>
+          <a:bodyPr wrap="square" anchor="t" lIns="0" rIns="0" tIns="0" bIns="0">
+            <a:spAutoFit/>
+          </a:bodyPr>
+          <a:lstStyle/>
+          <a:p>
+            <a:pPr rtl="1" algn="r">
+              <a:spcBef>
+                <a:spcPts val="0"/>
+              </a:spcBef>
+              <a:spcAft>
+                <a:spcPts val="0"/>
+              </a:spcAft>
+            </a:pPr>
+            <a:r>
+              <a:rPr sz="2400" b="1" i="0">
+                <a:solidFill>
+                  <a:srgbClr val="FBEEF4"/>
+                </a:solidFill>
+                <a:latin typeface="Arial"/>
+                <a:cs typeface="Arial"/>
+              </a:rPr>
+              <a:t>خط لوله نهایی</a:t>
+            </a:r>
+          </a:p>
+        </p:txBody>
+      </p:sp>
+      <p:sp>
+        <p:nvSpPr>
           <p:cNvPr id="5" name="TextBox 4"/>
+          <p:cNvSpPr txBox="1"/>
+          <p:nvPr/>
+        </p:nvSpPr>
+        <p:spPr>
+          <a:xfrm>
+            <a:off x="5029200" y="950976"/>
+            <a:ext cx="6355080" cy="274320"/>
+          </a:xfrm>
+          <a:prstGeom prst="rect">
+            <a:avLst/>
+          </a:prstGeom>
+          <a:noFill/>
+        </p:spPr>
+        <p:txBody>
+          <a:bodyPr wrap="square" anchor="t" lIns="0" rIns="0" tIns="0" bIns="0">
+            <a:spAutoFit/>
+          </a:bodyPr>
+          <a:lstStyle/>
+          <a:p>
+            <a:pPr rtl="1" algn="r">
+              <a:spcBef>
+                <a:spcPts val="0"/>
+              </a:spcBef>
+              <a:spcAft>
+                <a:spcPts val="0"/>
+              </a:spcAft>
+            </a:pPr>
+            <a:r>
+              <a:rPr sz="1150" b="1" i="0">
+                <a:solidFill>
+                  <a:srgbClr val="FF6FA5"/>
+                </a:solidFill>
+                <a:latin typeface="Arial"/>
+                <a:cs typeface="Arial"/>
+              </a:rPr>
+              <a:t>مسیر دوم</a:t>
+            </a:r>
+          </a:p>
+        </p:txBody>
+      </p:sp>
+      <p:sp>
+        <p:nvSpPr>
+          <p:cNvPr id="6" name="Rectangle 5"/>
+          <p:cNvSpPr/>
+          <p:nvPr/>
+        </p:nvSpPr>
+        <p:spPr>
+          <a:xfrm>
+            <a:off x="9098280" y="1737360"/>
+            <a:ext cx="2560320" cy="1371600"/>
+          </a:xfrm>
+          <a:prstGeom prst="rect">
+            <a:avLst/>
+          </a:prstGeom>
+          <a:solidFill>
+            <a:srgbClr val="3D1730"/>
+          </a:solidFill>
+          <a:ln>
+            <a:noFill/>
+          </a:ln>
+          <a:effectLst/>
+        </p:spPr>
+        <p:style>
+          <a:lnRef idx="1">
+            <a:schemeClr val="accent1"/>
+          </a:lnRef>
+          <a:fillRef idx="3">
+            <a:schemeClr val="accent1"/>
+          </a:fillRef>
+          <a:effectRef idx="2">
+            <a:schemeClr val="accent1"/>
+          </a:effectRef>
+          <a:fontRef idx="minor">
+            <a:schemeClr val="lt1"/>
+          </a:fontRef>
+        </p:style>
+        <p:txBody>
+          <a:bodyPr rtlCol="0" anchor="ctr"/>
+          <a:lstStyle/>
+          <a:p/>
+        </p:txBody>
+      </p:sp>
+      <p:sp>
+        <p:nvSpPr>
+          <p:cNvPr id="7" name="TextBox 6"/>
           <p:cNvSpPr txBox="1"/>
           <p:nvPr/>
         </p:nvSpPr>
@@ -14396,7 +14991,7 @@
       </p:sp>
       <p:sp>
         <p:nvSpPr>
-          <p:cNvPr id="6" name="TextBox 5"/>
+          <p:cNvPr id="8" name="TextBox 7"/>
           <p:cNvSpPr txBox="1"/>
           <p:nvPr/>
         </p:nvSpPr>
@@ -14465,7 +15060,7 @@
       </p:sp>
       <p:sp>
         <p:nvSpPr>
-          <p:cNvPr id="7" name="Left Arrow 6"/>
+          <p:cNvPr id="9" name="Left Arrow 8"/>
           <p:cNvSpPr/>
           <p:nvPr/>
         </p:nvSpPr>
@@ -14507,7 +15102,7 @@
       </p:sp>
       <p:sp>
         <p:nvSpPr>
-          <p:cNvPr id="8" name="Rounded Rectangle 7"/>
+          <p:cNvPr id="10" name="Rectangle 9"/>
           <p:cNvSpPr/>
           <p:nvPr/>
         </p:nvSpPr>
@@ -14516,7 +15111,7 @@
             <a:off x="6217919" y="1737360"/>
             <a:ext cx="2560320" cy="1371600"/>
           </a:xfrm>
-          <a:prstGeom prst="roundRect">
+          <a:prstGeom prst="rect">
             <a:avLst/>
           </a:prstGeom>
           <a:solidFill>
@@ -14549,7 +15144,7 @@
       </p:sp>
       <p:sp>
         <p:nvSpPr>
-          <p:cNvPr id="9" name="TextBox 8"/>
+          <p:cNvPr id="11" name="TextBox 10"/>
           <p:cNvSpPr txBox="1"/>
           <p:nvPr/>
         </p:nvSpPr>
@@ -14592,7 +15187,7 @@
       </p:sp>
       <p:sp>
         <p:nvSpPr>
-          <p:cNvPr id="10" name="TextBox 9"/>
+          <p:cNvPr id="12" name="TextBox 11"/>
           <p:cNvSpPr txBox="1"/>
           <p:nvPr/>
         </p:nvSpPr>
@@ -14661,7 +15256,7 @@
       </p:sp>
       <p:sp>
         <p:nvSpPr>
-          <p:cNvPr id="11" name="Left Arrow 10"/>
+          <p:cNvPr id="13" name="Left Arrow 12"/>
           <p:cNvSpPr/>
           <p:nvPr/>
         </p:nvSpPr>
@@ -14703,7 +15298,7 @@
       </p:sp>
       <p:sp>
         <p:nvSpPr>
-          <p:cNvPr id="12" name="Rounded Rectangle 11"/>
+          <p:cNvPr id="14" name="Rectangle 13"/>
           <p:cNvSpPr/>
           <p:nvPr/>
         </p:nvSpPr>
@@ -14712,7 +15307,7 @@
             <a:off x="3337559" y="1737360"/>
             <a:ext cx="2560320" cy="1371600"/>
           </a:xfrm>
-          <a:prstGeom prst="roundRect">
+          <a:prstGeom prst="rect">
             <a:avLst/>
           </a:prstGeom>
           <a:solidFill>
@@ -14745,7 +15340,7 @@
       </p:sp>
       <p:sp>
         <p:nvSpPr>
-          <p:cNvPr id="13" name="TextBox 12"/>
+          <p:cNvPr id="15" name="TextBox 14"/>
           <p:cNvSpPr txBox="1"/>
           <p:nvPr/>
         </p:nvSpPr>
@@ -14788,7 +15383,7 @@
       </p:sp>
       <p:sp>
         <p:nvSpPr>
-          <p:cNvPr id="14" name="TextBox 13"/>
+          <p:cNvPr id="16" name="TextBox 15"/>
           <p:cNvSpPr txBox="1"/>
           <p:nvPr/>
         </p:nvSpPr>
@@ -14857,7 +15452,7 @@
       </p:sp>
       <p:sp>
         <p:nvSpPr>
-          <p:cNvPr id="15" name="Left Arrow 14"/>
+          <p:cNvPr id="17" name="Left Arrow 16"/>
           <p:cNvSpPr/>
           <p:nvPr/>
         </p:nvSpPr>
@@ -14899,7 +15494,7 @@
       </p:sp>
       <p:sp>
         <p:nvSpPr>
-          <p:cNvPr id="16" name="Rounded Rectangle 15"/>
+          <p:cNvPr id="18" name="Rectangle 17"/>
           <p:cNvSpPr/>
           <p:nvPr/>
         </p:nvSpPr>
@@ -14908,7 +15503,7 @@
             <a:off x="457200" y="1737360"/>
             <a:ext cx="2560320" cy="1371600"/>
           </a:xfrm>
-          <a:prstGeom prst="roundRect">
+          <a:prstGeom prst="rect">
             <a:avLst/>
           </a:prstGeom>
           <a:solidFill>
@@ -14941,7 +15536,7 @@
       </p:sp>
       <p:sp>
         <p:nvSpPr>
-          <p:cNvPr id="17" name="TextBox 16"/>
+          <p:cNvPr id="19" name="TextBox 18"/>
           <p:cNvSpPr txBox="1"/>
           <p:nvPr/>
         </p:nvSpPr>
@@ -14984,7 +15579,7 @@
       </p:sp>
       <p:sp>
         <p:nvSpPr>
-          <p:cNvPr id="18" name="TextBox 17"/>
+          <p:cNvPr id="20" name="TextBox 19"/>
           <p:cNvSpPr txBox="1"/>
           <p:nvPr/>
         </p:nvSpPr>
@@ -15053,7 +15648,7 @@
       </p:sp>
       <p:sp>
         <p:nvSpPr>
-          <p:cNvPr id="19" name="TextBox 18"/>
+          <p:cNvPr id="21" name="TextBox 20"/>
           <p:cNvSpPr txBox="1"/>
           <p:nvPr/>
         </p:nvSpPr>
@@ -15096,7 +15691,7 @@
       </p:sp>
       <p:sp>
         <p:nvSpPr>
-          <p:cNvPr id="20" name="Rounded Rectangle 19"/>
+          <p:cNvPr id="22" name="Rectangle 21"/>
           <p:cNvSpPr/>
           <p:nvPr/>
         </p:nvSpPr>
@@ -15105,7 +15700,7 @@
             <a:off x="9098280" y="3840480"/>
             <a:ext cx="2560320" cy="1371600"/>
           </a:xfrm>
-          <a:prstGeom prst="roundRect">
+          <a:prstGeom prst="rect">
             <a:avLst/>
           </a:prstGeom>
           <a:solidFill>
@@ -15138,7 +15733,7 @@
       </p:sp>
       <p:sp>
         <p:nvSpPr>
-          <p:cNvPr id="21" name="TextBox 20"/>
+          <p:cNvPr id="23" name="TextBox 22"/>
           <p:cNvSpPr txBox="1"/>
           <p:nvPr/>
         </p:nvSpPr>
@@ -15181,7 +15776,7 @@
       </p:sp>
       <p:sp>
         <p:nvSpPr>
-          <p:cNvPr id="22" name="TextBox 21"/>
+          <p:cNvPr id="24" name="TextBox 23"/>
           <p:cNvSpPr txBox="1"/>
           <p:nvPr/>
         </p:nvSpPr>
@@ -15250,7 +15845,7 @@
       </p:sp>
       <p:sp>
         <p:nvSpPr>
-          <p:cNvPr id="23" name="Left Arrow 22"/>
+          <p:cNvPr id="25" name="Left Arrow 24"/>
           <p:cNvSpPr/>
           <p:nvPr/>
         </p:nvSpPr>
@@ -15292,7 +15887,7 @@
       </p:sp>
       <p:sp>
         <p:nvSpPr>
-          <p:cNvPr id="24" name="Rounded Rectangle 23"/>
+          <p:cNvPr id="26" name="Rectangle 25"/>
           <p:cNvSpPr/>
           <p:nvPr/>
         </p:nvSpPr>
@@ -15301,7 +15896,7 @@
             <a:off x="6217919" y="3840480"/>
             <a:ext cx="2560320" cy="1371600"/>
           </a:xfrm>
-          <a:prstGeom prst="roundRect">
+          <a:prstGeom prst="rect">
             <a:avLst/>
           </a:prstGeom>
           <a:solidFill>
@@ -15334,7 +15929,7 @@
       </p:sp>
       <p:sp>
         <p:nvSpPr>
-          <p:cNvPr id="25" name="TextBox 24"/>
+          <p:cNvPr id="27" name="TextBox 26"/>
           <p:cNvSpPr txBox="1"/>
           <p:nvPr/>
         </p:nvSpPr>
@@ -15377,7 +15972,7 @@
       </p:sp>
       <p:sp>
         <p:nvSpPr>
-          <p:cNvPr id="26" name="TextBox 25"/>
+          <p:cNvPr id="28" name="TextBox 27"/>
           <p:cNvSpPr txBox="1"/>
           <p:nvPr/>
         </p:nvSpPr>
@@ -15423,7 +16018,7 @@
       </p:sp>
       <p:sp>
         <p:nvSpPr>
-          <p:cNvPr id="27" name="Left Arrow 26"/>
+          <p:cNvPr id="29" name="Left Arrow 28"/>
           <p:cNvSpPr/>
           <p:nvPr/>
         </p:nvSpPr>
@@ -15465,7 +16060,7 @@
       </p:sp>
       <p:sp>
         <p:nvSpPr>
-          <p:cNvPr id="28" name="Rounded Rectangle 27"/>
+          <p:cNvPr id="30" name="Rectangle 29"/>
           <p:cNvSpPr/>
           <p:nvPr/>
         </p:nvSpPr>
@@ -15474,7 +16069,7 @@
             <a:off x="3337559" y="3840480"/>
             <a:ext cx="2560320" cy="1371600"/>
           </a:xfrm>
-          <a:prstGeom prst="roundRect">
+          <a:prstGeom prst="rect">
             <a:avLst/>
           </a:prstGeom>
           <a:solidFill>
@@ -15507,7 +16102,7 @@
       </p:sp>
       <p:sp>
         <p:nvSpPr>
-          <p:cNvPr id="29" name="TextBox 28"/>
+          <p:cNvPr id="31" name="TextBox 30"/>
           <p:cNvSpPr txBox="1"/>
           <p:nvPr/>
         </p:nvSpPr>
@@ -15550,7 +16145,7 @@
       </p:sp>
       <p:sp>
         <p:nvSpPr>
-          <p:cNvPr id="30" name="TextBox 29"/>
+          <p:cNvPr id="32" name="TextBox 31"/>
           <p:cNvSpPr txBox="1"/>
           <p:nvPr/>
         </p:nvSpPr>
@@ -15596,7 +16191,7 @@
       </p:sp>
       <p:sp>
         <p:nvSpPr>
-          <p:cNvPr id="31" name="Left Arrow 30"/>
+          <p:cNvPr id="33" name="Left Arrow 32"/>
           <p:cNvSpPr/>
           <p:nvPr/>
         </p:nvSpPr>
@@ -15638,7 +16233,7 @@
       </p:sp>
       <p:sp>
         <p:nvSpPr>
-          <p:cNvPr id="32" name="Rounded Rectangle 31"/>
+          <p:cNvPr id="34" name="Rectangle 33"/>
           <p:cNvSpPr/>
           <p:nvPr/>
         </p:nvSpPr>
@@ -15647,7 +16242,7 @@
             <a:off x="457200" y="3840480"/>
             <a:ext cx="2560320" cy="1371600"/>
           </a:xfrm>
-          <a:prstGeom prst="roundRect">
+          <a:prstGeom prst="rect">
             <a:avLst/>
           </a:prstGeom>
           <a:solidFill>
@@ -15680,7 +16275,7 @@
       </p:sp>
       <p:sp>
         <p:nvSpPr>
-          <p:cNvPr id="33" name="TextBox 32"/>
+          <p:cNvPr id="35" name="TextBox 34"/>
           <p:cNvSpPr txBox="1"/>
           <p:nvPr/>
         </p:nvSpPr>
@@ -15723,7 +16318,7 @@
       </p:sp>
       <p:sp>
         <p:nvSpPr>
-          <p:cNvPr id="34" name="TextBox 33"/>
+          <p:cNvPr id="36" name="TextBox 35"/>
           <p:cNvSpPr txBox="1"/>
           <p:nvPr/>
         </p:nvSpPr>
@@ -15769,7 +16364,7 @@
       </p:sp>
       <p:sp>
         <p:nvSpPr>
-          <p:cNvPr id="35" name="TextBox 34"/>
+          <p:cNvPr id="37" name="TextBox 36"/>
           <p:cNvSpPr txBox="1"/>
           <p:nvPr/>
         </p:nvSpPr>
@@ -15812,7 +16407,7 @@
       </p:sp>
       <p:sp>
         <p:nvSpPr>
-          <p:cNvPr id="36" name="TextBox 35"/>
+          <p:cNvPr id="38" name="TextBox 37"/>
           <p:cNvSpPr txBox="1"/>
           <p:nvPr/>
         </p:nvSpPr>
@@ -15887,8 +16482,8 @@
         </p:nvSpPr>
         <p:spPr>
           <a:xfrm>
-            <a:off x="548640" y="411480"/>
-            <a:ext cx="11064240" cy="731520"/>
+            <a:off x="502920" y="182880"/>
+            <a:ext cx="2011680" cy="1188720"/>
           </a:xfrm>
           <a:prstGeom prst="rect">
             <a:avLst/>
@@ -15901,7 +16496,7 @@
           </a:bodyPr>
           <a:lstStyle/>
           <a:p>
-            <a:pPr rtl="1" algn="r">
+            <a:pPr rtl="0" algn="l">
               <a:spcBef>
                 <a:spcPts val="0"/>
               </a:spcBef>
@@ -15910,73 +16505,30 @@
               </a:spcAft>
             </a:pPr>
             <a:r>
-              <a:rPr sz="2900" b="1" i="0">
+              <a:rPr sz="5800" b="1" i="0">
                 <a:solidFill>
-                  <a:srgbClr val="FBEEF4"/>
+                  <a:srgbClr val="3B1729"/>
                 </a:solidFill>
                 <a:latin typeface="Arial"/>
                 <a:cs typeface="Arial"/>
               </a:rPr>
-              <a:t>سر ترنسفورمر روی محور زمان</a:t>
+              <a:t>15</a:t>
             </a:r>
           </a:p>
         </p:txBody>
       </p:sp>
       <p:sp>
         <p:nvSpPr>
-          <p:cNvPr id="3" name="TextBox 2"/>
-          <p:cNvSpPr txBox="1"/>
+          <p:cNvPr id="3" name="Rectangle 2"/>
+          <p:cNvSpPr/>
           <p:nvPr/>
         </p:nvSpPr>
         <p:spPr>
           <a:xfrm>
-            <a:off x="548640" y="1133856"/>
-            <a:ext cx="11064240" cy="292608"/>
+            <a:off x="4754880" y="292608"/>
+            <a:ext cx="6903720" cy="1042415"/>
           </a:xfrm>
           <a:prstGeom prst="rect">
-            <a:avLst/>
-          </a:prstGeom>
-          <a:noFill/>
-        </p:spPr>
-        <p:txBody>
-          <a:bodyPr wrap="square" anchor="t" lIns="0" rIns="0" tIns="0" bIns="0">
-            <a:spAutoFit/>
-          </a:bodyPr>
-          <a:lstStyle/>
-          <a:p>
-            <a:pPr rtl="1" algn="r">
-              <a:spcBef>
-                <a:spcPts val="0"/>
-              </a:spcBef>
-              <a:spcAft>
-                <a:spcPts val="0"/>
-              </a:spcAft>
-            </a:pPr>
-            <a:r>
-              <a:rPr sz="1250" b="1" i="0">
-                <a:solidFill>
-                  <a:srgbClr val="FF6FA5"/>
-                </a:solidFill>
-                <a:latin typeface="Arial"/>
-                <a:cs typeface="Arial"/>
-              </a:rPr>
-              <a:t>مسیر دوم</a:t>
-            </a:r>
-          </a:p>
-        </p:txBody>
-      </p:sp>
-      <p:sp>
-        <p:nvSpPr>
-          <p:cNvPr id="4" name="Rounded Rectangle 3"/>
-          <p:cNvSpPr/>
-          <p:nvPr/>
-        </p:nvSpPr>
-        <p:spPr>
-          <a:xfrm>
-            <a:off x="548640" y="1645920"/>
-            <a:ext cx="5394960" cy="2103120"/>
-          </a:xfrm>
-          <a:prstGeom prst="roundRect">
             <a:avLst/>
           </a:prstGeom>
           <a:solidFill>
@@ -16009,7 +16561,135 @@
       </p:sp>
       <p:sp>
         <p:nvSpPr>
+          <p:cNvPr id="4" name="TextBox 3"/>
+          <p:cNvSpPr txBox="1"/>
+          <p:nvPr/>
+        </p:nvSpPr>
+        <p:spPr>
+          <a:xfrm>
+            <a:off x="5029200" y="411480"/>
+            <a:ext cx="6355080" cy="502920"/>
+          </a:xfrm>
+          <a:prstGeom prst="rect">
+            <a:avLst/>
+          </a:prstGeom>
+          <a:noFill/>
+        </p:spPr>
+        <p:txBody>
+          <a:bodyPr wrap="square" anchor="t" lIns="0" rIns="0" tIns="0" bIns="0">
+            <a:spAutoFit/>
+          </a:bodyPr>
+          <a:lstStyle/>
+          <a:p>
+            <a:pPr rtl="1" algn="r">
+              <a:spcBef>
+                <a:spcPts val="0"/>
+              </a:spcBef>
+              <a:spcAft>
+                <a:spcPts val="0"/>
+              </a:spcAft>
+            </a:pPr>
+            <a:r>
+              <a:rPr sz="2400" b="1" i="0">
+                <a:solidFill>
+                  <a:srgbClr val="FBEEF4"/>
+                </a:solidFill>
+                <a:latin typeface="Arial"/>
+                <a:cs typeface="Arial"/>
+              </a:rPr>
+              <a:t>سر ترنسفورمر روی محور زمان</a:t>
+            </a:r>
+          </a:p>
+        </p:txBody>
+      </p:sp>
+      <p:sp>
+        <p:nvSpPr>
           <p:cNvPr id="5" name="TextBox 4"/>
+          <p:cNvSpPr txBox="1"/>
+          <p:nvPr/>
+        </p:nvSpPr>
+        <p:spPr>
+          <a:xfrm>
+            <a:off x="5029200" y="950976"/>
+            <a:ext cx="6355080" cy="274320"/>
+          </a:xfrm>
+          <a:prstGeom prst="rect">
+            <a:avLst/>
+          </a:prstGeom>
+          <a:noFill/>
+        </p:spPr>
+        <p:txBody>
+          <a:bodyPr wrap="square" anchor="t" lIns="0" rIns="0" tIns="0" bIns="0">
+            <a:spAutoFit/>
+          </a:bodyPr>
+          <a:lstStyle/>
+          <a:p>
+            <a:pPr rtl="1" algn="r">
+              <a:spcBef>
+                <a:spcPts val="0"/>
+              </a:spcBef>
+              <a:spcAft>
+                <a:spcPts val="0"/>
+              </a:spcAft>
+            </a:pPr>
+            <a:r>
+              <a:rPr sz="1150" b="1" i="0">
+                <a:solidFill>
+                  <a:srgbClr val="FF6FA5"/>
+                </a:solidFill>
+                <a:latin typeface="Arial"/>
+                <a:cs typeface="Arial"/>
+              </a:rPr>
+              <a:t>مسیر دوم</a:t>
+            </a:r>
+          </a:p>
+        </p:txBody>
+      </p:sp>
+      <p:sp>
+        <p:nvSpPr>
+          <p:cNvPr id="6" name="Rectangle 5"/>
+          <p:cNvSpPr/>
+          <p:nvPr/>
+        </p:nvSpPr>
+        <p:spPr>
+          <a:xfrm>
+            <a:off x="548640" y="1645920"/>
+            <a:ext cx="5394960" cy="2103120"/>
+          </a:xfrm>
+          <a:prstGeom prst="rect">
+            <a:avLst/>
+          </a:prstGeom>
+          <a:solidFill>
+            <a:srgbClr val="3D1730"/>
+          </a:solidFill>
+          <a:ln>
+            <a:noFill/>
+          </a:ln>
+          <a:effectLst/>
+        </p:spPr>
+        <p:style>
+          <a:lnRef idx="1">
+            <a:schemeClr val="accent1"/>
+          </a:lnRef>
+          <a:fillRef idx="3">
+            <a:schemeClr val="accent1"/>
+          </a:fillRef>
+          <a:effectRef idx="2">
+            <a:schemeClr val="accent1"/>
+          </a:effectRef>
+          <a:fontRef idx="minor">
+            <a:schemeClr val="lt1"/>
+          </a:fontRef>
+        </p:style>
+        <p:txBody>
+          <a:bodyPr rtlCol="0" anchor="ctr"/>
+          <a:lstStyle/>
+          <a:p/>
+        </p:txBody>
+      </p:sp>
+      <p:sp>
+        <p:nvSpPr>
+          <p:cNvPr id="7" name="TextBox 6"/>
           <p:cNvSpPr txBox="1"/>
           <p:nvPr/>
         </p:nvSpPr>
@@ -16052,7 +16732,7 @@
       </p:sp>
       <p:sp>
         <p:nvSpPr>
-          <p:cNvPr id="6" name="TextBox 5"/>
+          <p:cNvPr id="8" name="TextBox 7"/>
           <p:cNvSpPr txBox="1"/>
           <p:nvPr/>
         </p:nvSpPr>
@@ -16098,7 +16778,7 @@
       </p:sp>
       <p:sp>
         <p:nvSpPr>
-          <p:cNvPr id="7" name="Rounded Rectangle 6"/>
+          <p:cNvPr id="9" name="Rectangle 8"/>
           <p:cNvSpPr/>
           <p:nvPr/>
         </p:nvSpPr>
@@ -16107,7 +16787,7 @@
             <a:off x="6217920" y="1645920"/>
             <a:ext cx="5394960" cy="2103120"/>
           </a:xfrm>
-          <a:prstGeom prst="roundRect">
+          <a:prstGeom prst="rect">
             <a:avLst/>
           </a:prstGeom>
           <a:solidFill>
@@ -16140,7 +16820,7 @@
       </p:sp>
       <p:sp>
         <p:nvSpPr>
-          <p:cNvPr id="8" name="TextBox 7"/>
+          <p:cNvPr id="10" name="TextBox 9"/>
           <p:cNvSpPr txBox="1"/>
           <p:nvPr/>
         </p:nvSpPr>
@@ -16183,7 +16863,7 @@
       </p:sp>
       <p:sp>
         <p:nvSpPr>
-          <p:cNvPr id="9" name="TextBox 8"/>
+          <p:cNvPr id="11" name="TextBox 10"/>
           <p:cNvSpPr txBox="1"/>
           <p:nvPr/>
         </p:nvSpPr>
@@ -16229,7 +16909,7 @@
       </p:sp>
       <p:sp>
         <p:nvSpPr>
-          <p:cNvPr id="10" name="TextBox 9"/>
+          <p:cNvPr id="12" name="TextBox 11"/>
           <p:cNvSpPr txBox="1"/>
           <p:nvPr/>
         </p:nvSpPr>
@@ -16272,7 +16952,7 @@
       </p:sp>
       <p:graphicFrame>
         <p:nvGraphicFramePr>
-          <p:cNvPr id="11" name="Table 10"/>
+          <p:cNvPr id="13" name="Table 12"/>
           <p:cNvGraphicFramePr>
             <a:graphicFrameLocks noGrp="1"/>
           </p:cNvGraphicFramePr>
@@ -16874,7 +17554,7 @@
       </p:graphicFrame>
       <p:sp>
         <p:nvSpPr>
-          <p:cNvPr id="12" name="TextBox 11"/>
+          <p:cNvPr id="14" name="TextBox 13"/>
           <p:cNvSpPr txBox="1"/>
           <p:nvPr/>
         </p:nvSpPr>
@@ -16917,7 +17597,7 @@
       </p:sp>
       <p:graphicFrame>
         <p:nvGraphicFramePr>
-          <p:cNvPr id="13" name="Table 12"/>
+          <p:cNvPr id="15" name="Table 14"/>
           <p:cNvGraphicFramePr>
             <a:graphicFrameLocks noGrp="1"/>
           </p:cNvGraphicFramePr>
@@ -17231,7 +17911,7 @@
       </p:graphicFrame>
       <p:sp>
         <p:nvSpPr>
-          <p:cNvPr id="14" name="TextBox 13"/>
+          <p:cNvPr id="16" name="TextBox 15"/>
           <p:cNvSpPr txBox="1"/>
           <p:nvPr/>
         </p:nvSpPr>
@@ -17309,8 +17989,8 @@
         </p:nvSpPr>
         <p:spPr>
           <a:xfrm>
-            <a:off x="548640" y="411480"/>
-            <a:ext cx="11064240" cy="731520"/>
+            <a:off x="502920" y="182880"/>
+            <a:ext cx="2011680" cy="1188720"/>
           </a:xfrm>
           <a:prstGeom prst="rect">
             <a:avLst/>
@@ -17323,7 +18003,7 @@
           </a:bodyPr>
           <a:lstStyle/>
           <a:p>
-            <a:pPr rtl="1" algn="r">
+            <a:pPr rtl="0" algn="l">
               <a:spcBef>
                 <a:spcPts val="0"/>
               </a:spcBef>
@@ -17332,7 +18012,92 @@
               </a:spcAft>
             </a:pPr>
             <a:r>
-              <a:rPr sz="2900" b="1" i="0">
+              <a:rPr sz="5800" b="1" i="0">
+                <a:solidFill>
+                  <a:srgbClr val="3B1729"/>
+                </a:solidFill>
+                <a:latin typeface="Arial"/>
+                <a:cs typeface="Arial"/>
+              </a:rPr>
+              <a:t>16</a:t>
+            </a:r>
+          </a:p>
+        </p:txBody>
+      </p:sp>
+      <p:sp>
+        <p:nvSpPr>
+          <p:cNvPr id="3" name="Rectangle 2"/>
+          <p:cNvSpPr/>
+          <p:nvPr/>
+        </p:nvSpPr>
+        <p:spPr>
+          <a:xfrm>
+            <a:off x="4754880" y="292608"/>
+            <a:ext cx="6903720" cy="1042415"/>
+          </a:xfrm>
+          <a:prstGeom prst="rect">
+            <a:avLst/>
+          </a:prstGeom>
+          <a:solidFill>
+            <a:srgbClr val="3D1730"/>
+          </a:solidFill>
+          <a:ln>
+            <a:noFill/>
+          </a:ln>
+          <a:effectLst/>
+        </p:spPr>
+        <p:style>
+          <a:lnRef idx="1">
+            <a:schemeClr val="accent1"/>
+          </a:lnRef>
+          <a:fillRef idx="3">
+            <a:schemeClr val="accent1"/>
+          </a:fillRef>
+          <a:effectRef idx="2">
+            <a:schemeClr val="accent1"/>
+          </a:effectRef>
+          <a:fontRef idx="minor">
+            <a:schemeClr val="lt1"/>
+          </a:fontRef>
+        </p:style>
+        <p:txBody>
+          <a:bodyPr rtlCol="0" anchor="ctr"/>
+          <a:lstStyle/>
+          <a:p/>
+        </p:txBody>
+      </p:sp>
+      <p:sp>
+        <p:nvSpPr>
+          <p:cNvPr id="4" name="TextBox 3"/>
+          <p:cNvSpPr txBox="1"/>
+          <p:nvPr/>
+        </p:nvSpPr>
+        <p:spPr>
+          <a:xfrm>
+            <a:off x="5029200" y="411480"/>
+            <a:ext cx="6355080" cy="502920"/>
+          </a:xfrm>
+          <a:prstGeom prst="rect">
+            <a:avLst/>
+          </a:prstGeom>
+          <a:noFill/>
+        </p:spPr>
+        <p:txBody>
+          <a:bodyPr wrap="square" anchor="t" lIns="0" rIns="0" tIns="0" bIns="0">
+            <a:spAutoFit/>
+          </a:bodyPr>
+          <a:lstStyle/>
+          <a:p>
+            <a:pPr rtl="1" algn="r">
+              <a:spcBef>
+                <a:spcPts val="0"/>
+              </a:spcBef>
+              <a:spcAft>
+                <a:spcPts val="0"/>
+              </a:spcAft>
+            </a:pPr>
+            <a:r>
+              <a:rPr sz="2400" b="1" i="0">
                 <a:solidFill>
                   <a:srgbClr val="FBEEF4"/>
                 </a:solidFill>
@@ -17346,14 +18111,14 @@
       </p:sp>
       <p:sp>
         <p:nvSpPr>
-          <p:cNvPr id="3" name="TextBox 2"/>
+          <p:cNvPr id="5" name="TextBox 4"/>
           <p:cNvSpPr txBox="1"/>
           <p:nvPr/>
         </p:nvSpPr>
         <p:spPr>
           <a:xfrm>
-            <a:off x="548640" y="1133856"/>
-            <a:ext cx="11064240" cy="292608"/>
+            <a:off x="5029200" y="950976"/>
+            <a:ext cx="6355080" cy="274320"/>
           </a:xfrm>
           <a:prstGeom prst="rect">
             <a:avLst/>
@@ -17375,7 +18140,7 @@
               </a:spcAft>
             </a:pPr>
             <a:r>
-              <a:rPr sz="1250" b="1" i="0">
+              <a:rPr sz="1150" b="1" i="0">
                 <a:solidFill>
                   <a:srgbClr val="FF6FA5"/>
                 </a:solidFill>
@@ -17389,7 +18154,7 @@
       </p:sp>
       <p:graphicFrame>
         <p:nvGraphicFramePr>
-          <p:cNvPr id="4" name="Table 3"/>
+          <p:cNvPr id="6" name="Table 5"/>
           <p:cNvGraphicFramePr>
             <a:graphicFrameLocks noGrp="1"/>
           </p:cNvGraphicFramePr>
@@ -18417,7 +19182,7 @@
       </p:graphicFrame>
       <p:sp>
         <p:nvSpPr>
-          <p:cNvPr id="5" name="Rounded Rectangle 4"/>
+          <p:cNvPr id="7" name="Rectangle 6"/>
           <p:cNvSpPr/>
           <p:nvPr/>
         </p:nvSpPr>
@@ -18426,7 +19191,7 @@
             <a:off x="7406640" y="1691640"/>
             <a:ext cx="4206240" cy="2148840"/>
           </a:xfrm>
-          <a:prstGeom prst="roundRect">
+          <a:prstGeom prst="rect">
             <a:avLst/>
           </a:prstGeom>
           <a:solidFill>
@@ -18459,7 +19224,7 @@
       </p:sp>
       <p:sp>
         <p:nvSpPr>
-          <p:cNvPr id="6" name="TextBox 5"/>
+          <p:cNvPr id="8" name="TextBox 7"/>
           <p:cNvSpPr txBox="1"/>
           <p:nvPr/>
         </p:nvSpPr>
@@ -18502,7 +19267,7 @@
       </p:sp>
       <p:sp>
         <p:nvSpPr>
-          <p:cNvPr id="7" name="TextBox 6"/>
+          <p:cNvPr id="9" name="TextBox 8"/>
           <p:cNvSpPr txBox="1"/>
           <p:nvPr/>
         </p:nvSpPr>
@@ -18548,7 +19313,7 @@
       </p:sp>
       <p:sp>
         <p:nvSpPr>
-          <p:cNvPr id="8" name="TextBox 7"/>
+          <p:cNvPr id="10" name="TextBox 9"/>
           <p:cNvSpPr txBox="1"/>
           <p:nvPr/>
         </p:nvSpPr>
@@ -18591,7 +19356,7 @@
       </p:sp>
       <p:sp>
         <p:nvSpPr>
-          <p:cNvPr id="9" name="Rounded Rectangle 8"/>
+          <p:cNvPr id="11" name="Rectangle 10"/>
           <p:cNvSpPr/>
           <p:nvPr/>
         </p:nvSpPr>
@@ -18600,7 +19365,7 @@
             <a:off x="548640" y="4663440"/>
             <a:ext cx="3566160" cy="1371600"/>
           </a:xfrm>
-          <a:prstGeom prst="roundRect">
+          <a:prstGeom prst="rect">
             <a:avLst/>
           </a:prstGeom>
           <a:solidFill>
@@ -18633,7 +19398,7 @@
       </p:sp>
       <p:sp>
         <p:nvSpPr>
-          <p:cNvPr id="10" name="TextBox 9"/>
+          <p:cNvPr id="12" name="TextBox 11"/>
           <p:cNvSpPr txBox="1"/>
           <p:nvPr/>
         </p:nvSpPr>
@@ -18676,7 +19441,7 @@
       </p:sp>
       <p:sp>
         <p:nvSpPr>
-          <p:cNvPr id="11" name="TextBox 10"/>
+          <p:cNvPr id="13" name="TextBox 12"/>
           <p:cNvSpPr txBox="1"/>
           <p:nvPr/>
         </p:nvSpPr>
@@ -18719,7 +19484,7 @@
       </p:sp>
       <p:sp>
         <p:nvSpPr>
-          <p:cNvPr id="12" name="Rounded Rectangle 11"/>
+          <p:cNvPr id="14" name="Rectangle 13"/>
           <p:cNvSpPr/>
           <p:nvPr/>
         </p:nvSpPr>
@@ -18728,7 +19493,7 @@
             <a:off x="4297680" y="4663440"/>
             <a:ext cx="3566160" cy="1371600"/>
           </a:xfrm>
-          <a:prstGeom prst="roundRect">
+          <a:prstGeom prst="rect">
             <a:avLst/>
           </a:prstGeom>
           <a:solidFill>
@@ -18761,7 +19526,7 @@
       </p:sp>
       <p:sp>
         <p:nvSpPr>
-          <p:cNvPr id="13" name="TextBox 12"/>
+          <p:cNvPr id="15" name="TextBox 14"/>
           <p:cNvSpPr txBox="1"/>
           <p:nvPr/>
         </p:nvSpPr>
@@ -18804,7 +19569,7 @@
       </p:sp>
       <p:sp>
         <p:nvSpPr>
-          <p:cNvPr id="14" name="TextBox 13"/>
+          <p:cNvPr id="16" name="TextBox 15"/>
           <p:cNvSpPr txBox="1"/>
           <p:nvPr/>
         </p:nvSpPr>
@@ -18847,7 +19612,7 @@
       </p:sp>
       <p:sp>
         <p:nvSpPr>
-          <p:cNvPr id="15" name="Rounded Rectangle 14"/>
+          <p:cNvPr id="17" name="Rectangle 16"/>
           <p:cNvSpPr/>
           <p:nvPr/>
         </p:nvSpPr>
@@ -18856,7 +19621,7 @@
             <a:off x="8046720" y="4663440"/>
             <a:ext cx="3566160" cy="1371600"/>
           </a:xfrm>
-          <a:prstGeom prst="roundRect">
+          <a:prstGeom prst="rect">
             <a:avLst/>
           </a:prstGeom>
           <a:solidFill>
@@ -18889,7 +19654,7 @@
       </p:sp>
       <p:sp>
         <p:nvSpPr>
-          <p:cNvPr id="16" name="TextBox 15"/>
+          <p:cNvPr id="18" name="TextBox 17"/>
           <p:cNvSpPr txBox="1"/>
           <p:nvPr/>
         </p:nvSpPr>
@@ -18932,7 +19697,7 @@
       </p:sp>
       <p:sp>
         <p:nvSpPr>
-          <p:cNvPr id="17" name="TextBox 16"/>
+          <p:cNvPr id="19" name="TextBox 18"/>
           <p:cNvSpPr txBox="1"/>
           <p:nvPr/>
         </p:nvSpPr>
@@ -19007,8 +19772,8 @@
         </p:nvSpPr>
         <p:spPr>
           <a:xfrm>
-            <a:off x="548640" y="411480"/>
-            <a:ext cx="11064240" cy="731520"/>
+            <a:off x="502920" y="182880"/>
+            <a:ext cx="2011680" cy="1188720"/>
           </a:xfrm>
           <a:prstGeom prst="rect">
             <a:avLst/>
@@ -19021,7 +19786,7 @@
           </a:bodyPr>
           <a:lstStyle/>
           <a:p>
-            <a:pPr rtl="1" algn="r">
+            <a:pPr rtl="0" algn="l">
               <a:spcBef>
                 <a:spcPts val="0"/>
               </a:spcBef>
@@ -19030,73 +19795,30 @@
               </a:spcAft>
             </a:pPr>
             <a:r>
-              <a:rPr sz="2900" b="1" i="0">
+              <a:rPr sz="5800" b="1" i="0">
                 <a:solidFill>
-                  <a:srgbClr val="FBEEF4"/>
+                  <a:srgbClr val="3B1729"/>
                 </a:solidFill>
                 <a:latin typeface="Arial"/>
                 <a:cs typeface="Arial"/>
               </a:rPr>
-              <a:t>صورت مسئله</a:t>
+              <a:t>01</a:t>
             </a:r>
           </a:p>
         </p:txBody>
       </p:sp>
       <p:sp>
         <p:nvSpPr>
-          <p:cNvPr id="3" name="TextBox 2"/>
-          <p:cNvSpPr txBox="1"/>
+          <p:cNvPr id="3" name="Rectangle 2"/>
+          <p:cNvSpPr/>
           <p:nvPr/>
         </p:nvSpPr>
         <p:spPr>
           <a:xfrm>
-            <a:off x="548640" y="1133856"/>
-            <a:ext cx="11064240" cy="292608"/>
+            <a:off x="4754880" y="292608"/>
+            <a:ext cx="6903720" cy="1042415"/>
           </a:xfrm>
           <a:prstGeom prst="rect">
-            <a:avLst/>
-          </a:prstGeom>
-          <a:noFill/>
-        </p:spPr>
-        <p:txBody>
-          <a:bodyPr wrap="square" anchor="t" lIns="0" rIns="0" tIns="0" bIns="0">
-            <a:spAutoFit/>
-          </a:bodyPr>
-          <a:lstStyle/>
-          <a:p>
-            <a:pPr rtl="1" algn="r">
-              <a:spcBef>
-                <a:spcPts val="0"/>
-              </a:spcBef>
-              <a:spcAft>
-                <a:spcPts val="0"/>
-              </a:spcAft>
-            </a:pPr>
-            <a:r>
-              <a:rPr sz="1250" b="1" i="0">
-                <a:solidFill>
-                  <a:srgbClr val="FF6FA5"/>
-                </a:solidFill>
-                <a:latin typeface="Arial"/>
-                <a:cs typeface="Arial"/>
-              </a:rPr>
-              <a:t>فصل اول</a:t>
-            </a:r>
-          </a:p>
-        </p:txBody>
-      </p:sp>
-      <p:sp>
-        <p:nvSpPr>
-          <p:cNvPr id="4" name="Rounded Rectangle 3"/>
-          <p:cNvSpPr/>
-          <p:nvPr/>
-        </p:nvSpPr>
-        <p:spPr>
-          <a:xfrm>
-            <a:off x="548640" y="1600200"/>
-            <a:ext cx="5394960" cy="1920240"/>
-          </a:xfrm>
-          <a:prstGeom prst="roundRect">
             <a:avLst/>
           </a:prstGeom>
           <a:solidFill>
@@ -19129,7 +19851,135 @@
       </p:sp>
       <p:sp>
         <p:nvSpPr>
+          <p:cNvPr id="4" name="TextBox 3"/>
+          <p:cNvSpPr txBox="1"/>
+          <p:nvPr/>
+        </p:nvSpPr>
+        <p:spPr>
+          <a:xfrm>
+            <a:off x="5029200" y="411480"/>
+            <a:ext cx="6355080" cy="502920"/>
+          </a:xfrm>
+          <a:prstGeom prst="rect">
+            <a:avLst/>
+          </a:prstGeom>
+          <a:noFill/>
+        </p:spPr>
+        <p:txBody>
+          <a:bodyPr wrap="square" anchor="t" lIns="0" rIns="0" tIns="0" bIns="0">
+            <a:spAutoFit/>
+          </a:bodyPr>
+          <a:lstStyle/>
+          <a:p>
+            <a:pPr rtl="1" algn="r">
+              <a:spcBef>
+                <a:spcPts val="0"/>
+              </a:spcBef>
+              <a:spcAft>
+                <a:spcPts val="0"/>
+              </a:spcAft>
+            </a:pPr>
+            <a:r>
+              <a:rPr sz="2400" b="1" i="0">
+                <a:solidFill>
+                  <a:srgbClr val="FBEEF4"/>
+                </a:solidFill>
+                <a:latin typeface="Arial"/>
+                <a:cs typeface="Arial"/>
+              </a:rPr>
+              <a:t>صورت مسئله</a:t>
+            </a:r>
+          </a:p>
+        </p:txBody>
+      </p:sp>
+      <p:sp>
+        <p:nvSpPr>
           <p:cNvPr id="5" name="TextBox 4"/>
+          <p:cNvSpPr txBox="1"/>
+          <p:nvPr/>
+        </p:nvSpPr>
+        <p:spPr>
+          <a:xfrm>
+            <a:off x="5029200" y="950976"/>
+            <a:ext cx="6355080" cy="274320"/>
+          </a:xfrm>
+          <a:prstGeom prst="rect">
+            <a:avLst/>
+          </a:prstGeom>
+          <a:noFill/>
+        </p:spPr>
+        <p:txBody>
+          <a:bodyPr wrap="square" anchor="t" lIns="0" rIns="0" tIns="0" bIns="0">
+            <a:spAutoFit/>
+          </a:bodyPr>
+          <a:lstStyle/>
+          <a:p>
+            <a:pPr rtl="1" algn="r">
+              <a:spcBef>
+                <a:spcPts val="0"/>
+              </a:spcBef>
+              <a:spcAft>
+                <a:spcPts val="0"/>
+              </a:spcAft>
+            </a:pPr>
+            <a:r>
+              <a:rPr sz="1150" b="1" i="0">
+                <a:solidFill>
+                  <a:srgbClr val="FF6FA5"/>
+                </a:solidFill>
+                <a:latin typeface="Arial"/>
+                <a:cs typeface="Arial"/>
+              </a:rPr>
+              <a:t>فصل اول</a:t>
+            </a:r>
+          </a:p>
+        </p:txBody>
+      </p:sp>
+      <p:sp>
+        <p:nvSpPr>
+          <p:cNvPr id="6" name="Rectangle 5"/>
+          <p:cNvSpPr/>
+          <p:nvPr/>
+        </p:nvSpPr>
+        <p:spPr>
+          <a:xfrm>
+            <a:off x="548640" y="1600200"/>
+            <a:ext cx="5394960" cy="1920240"/>
+          </a:xfrm>
+          <a:prstGeom prst="rect">
+            <a:avLst/>
+          </a:prstGeom>
+          <a:solidFill>
+            <a:srgbClr val="3D1730"/>
+          </a:solidFill>
+          <a:ln>
+            <a:noFill/>
+          </a:ln>
+          <a:effectLst/>
+        </p:spPr>
+        <p:style>
+          <a:lnRef idx="1">
+            <a:schemeClr val="accent1"/>
+          </a:lnRef>
+          <a:fillRef idx="3">
+            <a:schemeClr val="accent1"/>
+          </a:fillRef>
+          <a:effectRef idx="2">
+            <a:schemeClr val="accent1"/>
+          </a:effectRef>
+          <a:fontRef idx="minor">
+            <a:schemeClr val="lt1"/>
+          </a:fontRef>
+        </p:style>
+        <p:txBody>
+          <a:bodyPr rtlCol="0" anchor="ctr"/>
+          <a:lstStyle/>
+          <a:p/>
+        </p:txBody>
+      </p:sp>
+      <p:sp>
+        <p:nvSpPr>
+          <p:cNvPr id="7" name="TextBox 6"/>
           <p:cNvSpPr txBox="1"/>
           <p:nvPr/>
         </p:nvSpPr>
@@ -19172,7 +20022,7 @@
       </p:sp>
       <p:sp>
         <p:nvSpPr>
-          <p:cNvPr id="6" name="TextBox 5"/>
+          <p:cNvPr id="8" name="TextBox 7"/>
           <p:cNvSpPr txBox="1"/>
           <p:nvPr/>
         </p:nvSpPr>
@@ -19241,7 +20091,7 @@
       </p:sp>
       <p:sp>
         <p:nvSpPr>
-          <p:cNvPr id="7" name="Rounded Rectangle 6"/>
+          <p:cNvPr id="9" name="Rectangle 8"/>
           <p:cNvSpPr/>
           <p:nvPr/>
         </p:nvSpPr>
@@ -19250,7 +20100,7 @@
             <a:off x="6217920" y="1600200"/>
             <a:ext cx="5394960" cy="1920240"/>
           </a:xfrm>
-          <a:prstGeom prst="roundRect">
+          <a:prstGeom prst="rect">
             <a:avLst/>
           </a:prstGeom>
           <a:solidFill>
@@ -19283,7 +20133,7 @@
       </p:sp>
       <p:sp>
         <p:nvSpPr>
-          <p:cNvPr id="8" name="TextBox 7"/>
+          <p:cNvPr id="10" name="TextBox 9"/>
           <p:cNvSpPr txBox="1"/>
           <p:nvPr/>
         </p:nvSpPr>
@@ -19326,7 +20176,7 @@
       </p:sp>
       <p:sp>
         <p:nvSpPr>
-          <p:cNvPr id="9" name="TextBox 8"/>
+          <p:cNvPr id="11" name="TextBox 10"/>
           <p:cNvSpPr txBox="1"/>
           <p:nvPr/>
         </p:nvSpPr>
@@ -19395,7 +20245,7 @@
       </p:sp>
       <p:sp>
         <p:nvSpPr>
-          <p:cNvPr id="10" name="TextBox 9"/>
+          <p:cNvPr id="12" name="TextBox 11"/>
           <p:cNvSpPr txBox="1"/>
           <p:nvPr/>
         </p:nvSpPr>
@@ -19438,7 +20288,7 @@
       </p:sp>
       <p:sp>
         <p:nvSpPr>
-          <p:cNvPr id="11" name="TextBox 10"/>
+          <p:cNvPr id="13" name="TextBox 12"/>
           <p:cNvSpPr txBox="1"/>
           <p:nvPr/>
         </p:nvSpPr>
@@ -19562,8 +20412,8 @@
         </p:nvSpPr>
         <p:spPr>
           <a:xfrm>
-            <a:off x="548640" y="411480"/>
-            <a:ext cx="11064240" cy="731520"/>
+            <a:off x="502920" y="182880"/>
+            <a:ext cx="2011680" cy="1188720"/>
           </a:xfrm>
           <a:prstGeom prst="rect">
             <a:avLst/>
@@ -19576,7 +20426,7 @@
           </a:bodyPr>
           <a:lstStyle/>
           <a:p>
-            <a:pPr rtl="1" algn="r">
+            <a:pPr rtl="0" algn="l">
               <a:spcBef>
                 <a:spcPts val="0"/>
               </a:spcBef>
@@ -19585,73 +20435,30 @@
               </a:spcAft>
             </a:pPr>
             <a:r>
-              <a:rPr sz="2900" b="1" i="0">
+              <a:rPr sz="5800" b="1" i="0">
                 <a:solidFill>
-                  <a:srgbClr val="FBEEF4"/>
+                  <a:srgbClr val="3B1729"/>
                 </a:solidFill>
                 <a:latin typeface="Arial"/>
                 <a:cs typeface="Arial"/>
               </a:rPr>
-              <a:t>آمیزش و تنظیم لاجیت</a:t>
+              <a:t>17</a:t>
             </a:r>
           </a:p>
         </p:txBody>
       </p:sp>
       <p:sp>
         <p:nvSpPr>
-          <p:cNvPr id="3" name="TextBox 2"/>
-          <p:cNvSpPr txBox="1"/>
+          <p:cNvPr id="3" name="Rectangle 2"/>
+          <p:cNvSpPr/>
           <p:nvPr/>
         </p:nvSpPr>
         <p:spPr>
           <a:xfrm>
-            <a:off x="548640" y="1133856"/>
-            <a:ext cx="11064240" cy="292608"/>
+            <a:off x="4754880" y="292608"/>
+            <a:ext cx="6903720" cy="1042415"/>
           </a:xfrm>
           <a:prstGeom prst="rect">
-            <a:avLst/>
-          </a:prstGeom>
-          <a:noFill/>
-        </p:spPr>
-        <p:txBody>
-          <a:bodyPr wrap="square" anchor="t" lIns="0" rIns="0" tIns="0" bIns="0">
-            <a:spAutoFit/>
-          </a:bodyPr>
-          <a:lstStyle/>
-          <a:p>
-            <a:pPr rtl="1" algn="r">
-              <a:spcBef>
-                <a:spcPts val="0"/>
-              </a:spcBef>
-              <a:spcAft>
-                <a:spcPts val="0"/>
-              </a:spcAft>
-            </a:pPr>
-            <a:r>
-              <a:rPr sz="1250" b="1" i="0">
-                <a:solidFill>
-                  <a:srgbClr val="FF6FA5"/>
-                </a:solidFill>
-                <a:latin typeface="Arial"/>
-                <a:cs typeface="Arial"/>
-              </a:rPr>
-              <a:t>مسیر دوم</a:t>
-            </a:r>
-          </a:p>
-        </p:txBody>
-      </p:sp>
-      <p:sp>
-        <p:nvSpPr>
-          <p:cNvPr id="4" name="Rounded Rectangle 3"/>
-          <p:cNvSpPr/>
-          <p:nvPr/>
-        </p:nvSpPr>
-        <p:spPr>
-          <a:xfrm>
-            <a:off x="548640" y="1645920"/>
-            <a:ext cx="5394960" cy="1965960"/>
-          </a:xfrm>
-          <a:prstGeom prst="roundRect">
             <a:avLst/>
           </a:prstGeom>
           <a:solidFill>
@@ -19684,7 +20491,135 @@
       </p:sp>
       <p:sp>
         <p:nvSpPr>
+          <p:cNvPr id="4" name="TextBox 3"/>
+          <p:cNvSpPr txBox="1"/>
+          <p:nvPr/>
+        </p:nvSpPr>
+        <p:spPr>
+          <a:xfrm>
+            <a:off x="5029200" y="411480"/>
+            <a:ext cx="6355080" cy="502920"/>
+          </a:xfrm>
+          <a:prstGeom prst="rect">
+            <a:avLst/>
+          </a:prstGeom>
+          <a:noFill/>
+        </p:spPr>
+        <p:txBody>
+          <a:bodyPr wrap="square" anchor="t" lIns="0" rIns="0" tIns="0" bIns="0">
+            <a:spAutoFit/>
+          </a:bodyPr>
+          <a:lstStyle/>
+          <a:p>
+            <a:pPr rtl="1" algn="r">
+              <a:spcBef>
+                <a:spcPts val="0"/>
+              </a:spcBef>
+              <a:spcAft>
+                <a:spcPts val="0"/>
+              </a:spcAft>
+            </a:pPr>
+            <a:r>
+              <a:rPr sz="2400" b="1" i="0">
+                <a:solidFill>
+                  <a:srgbClr val="FBEEF4"/>
+                </a:solidFill>
+                <a:latin typeface="Arial"/>
+                <a:cs typeface="Arial"/>
+              </a:rPr>
+              <a:t>آمیزش و تنظیم لاجیت</a:t>
+            </a:r>
+          </a:p>
+        </p:txBody>
+      </p:sp>
+      <p:sp>
+        <p:nvSpPr>
           <p:cNvPr id="5" name="TextBox 4"/>
+          <p:cNvSpPr txBox="1"/>
+          <p:nvPr/>
+        </p:nvSpPr>
+        <p:spPr>
+          <a:xfrm>
+            <a:off x="5029200" y="950976"/>
+            <a:ext cx="6355080" cy="274320"/>
+          </a:xfrm>
+          <a:prstGeom prst="rect">
+            <a:avLst/>
+          </a:prstGeom>
+          <a:noFill/>
+        </p:spPr>
+        <p:txBody>
+          <a:bodyPr wrap="square" anchor="t" lIns="0" rIns="0" tIns="0" bIns="0">
+            <a:spAutoFit/>
+          </a:bodyPr>
+          <a:lstStyle/>
+          <a:p>
+            <a:pPr rtl="1" algn="r">
+              <a:spcBef>
+                <a:spcPts val="0"/>
+              </a:spcBef>
+              <a:spcAft>
+                <a:spcPts val="0"/>
+              </a:spcAft>
+            </a:pPr>
+            <a:r>
+              <a:rPr sz="1150" b="1" i="0">
+                <a:solidFill>
+                  <a:srgbClr val="FF6FA5"/>
+                </a:solidFill>
+                <a:latin typeface="Arial"/>
+                <a:cs typeface="Arial"/>
+              </a:rPr>
+              <a:t>مسیر دوم</a:t>
+            </a:r>
+          </a:p>
+        </p:txBody>
+      </p:sp>
+      <p:sp>
+        <p:nvSpPr>
+          <p:cNvPr id="6" name="Rectangle 5"/>
+          <p:cNvSpPr/>
+          <p:nvPr/>
+        </p:nvSpPr>
+        <p:spPr>
+          <a:xfrm>
+            <a:off x="548640" y="1645920"/>
+            <a:ext cx="5394960" cy="1965960"/>
+          </a:xfrm>
+          <a:prstGeom prst="rect">
+            <a:avLst/>
+          </a:prstGeom>
+          <a:solidFill>
+            <a:srgbClr val="3D1730"/>
+          </a:solidFill>
+          <a:ln>
+            <a:noFill/>
+          </a:ln>
+          <a:effectLst/>
+        </p:spPr>
+        <p:style>
+          <a:lnRef idx="1">
+            <a:schemeClr val="accent1"/>
+          </a:lnRef>
+          <a:fillRef idx="3">
+            <a:schemeClr val="accent1"/>
+          </a:fillRef>
+          <a:effectRef idx="2">
+            <a:schemeClr val="accent1"/>
+          </a:effectRef>
+          <a:fontRef idx="minor">
+            <a:schemeClr val="lt1"/>
+          </a:fontRef>
+        </p:style>
+        <p:txBody>
+          <a:bodyPr rtlCol="0" anchor="ctr"/>
+          <a:lstStyle/>
+          <a:p/>
+        </p:txBody>
+      </p:sp>
+      <p:sp>
+        <p:nvSpPr>
+          <p:cNvPr id="7" name="TextBox 6"/>
           <p:cNvSpPr txBox="1"/>
           <p:nvPr/>
         </p:nvSpPr>
@@ -19727,7 +20662,7 @@
       </p:sp>
       <p:sp>
         <p:nvSpPr>
-          <p:cNvPr id="6" name="TextBox 5"/>
+          <p:cNvPr id="8" name="TextBox 7"/>
           <p:cNvSpPr txBox="1"/>
           <p:nvPr/>
         </p:nvSpPr>
@@ -19773,7 +20708,7 @@
       </p:sp>
       <p:sp>
         <p:nvSpPr>
-          <p:cNvPr id="7" name="Rounded Rectangle 6"/>
+          <p:cNvPr id="9" name="Rectangle 8"/>
           <p:cNvSpPr/>
           <p:nvPr/>
         </p:nvSpPr>
@@ -19782,7 +20717,7 @@
             <a:off x="6217920" y="1645920"/>
             <a:ext cx="5394960" cy="1965960"/>
           </a:xfrm>
-          <a:prstGeom prst="roundRect">
+          <a:prstGeom prst="rect">
             <a:avLst/>
           </a:prstGeom>
           <a:solidFill>
@@ -19815,7 +20750,7 @@
       </p:sp>
       <p:sp>
         <p:nvSpPr>
-          <p:cNvPr id="8" name="TextBox 7"/>
+          <p:cNvPr id="10" name="TextBox 9"/>
           <p:cNvSpPr txBox="1"/>
           <p:nvPr/>
         </p:nvSpPr>
@@ -19858,7 +20793,7 @@
       </p:sp>
       <p:sp>
         <p:nvSpPr>
-          <p:cNvPr id="9" name="TextBox 8"/>
+          <p:cNvPr id="11" name="TextBox 10"/>
           <p:cNvSpPr txBox="1"/>
           <p:nvPr/>
         </p:nvSpPr>
@@ -19904,7 +20839,7 @@
       </p:sp>
       <p:sp>
         <p:nvSpPr>
-          <p:cNvPr id="10" name="Rounded Rectangle 9"/>
+          <p:cNvPr id="12" name="Rectangle 11"/>
           <p:cNvSpPr/>
           <p:nvPr/>
         </p:nvSpPr>
@@ -19913,7 +20848,7 @@
             <a:off x="548640" y="3794760"/>
             <a:ext cx="11064240" cy="1051560"/>
           </a:xfrm>
-          <a:prstGeom prst="roundRect">
+          <a:prstGeom prst="rect">
             <a:avLst/>
           </a:prstGeom>
           <a:solidFill>
@@ -19946,7 +20881,7 @@
       </p:sp>
       <p:sp>
         <p:nvSpPr>
-          <p:cNvPr id="11" name="TextBox 10"/>
+          <p:cNvPr id="13" name="TextBox 12"/>
           <p:cNvSpPr txBox="1"/>
           <p:nvPr/>
         </p:nvSpPr>
@@ -19989,7 +20924,7 @@
       </p:sp>
       <p:sp>
         <p:nvSpPr>
-          <p:cNvPr id="12" name="TextBox 11"/>
+          <p:cNvPr id="14" name="TextBox 13"/>
           <p:cNvSpPr txBox="1"/>
           <p:nvPr/>
         </p:nvSpPr>
@@ -20035,7 +20970,7 @@
       </p:sp>
       <p:graphicFrame>
         <p:nvGraphicFramePr>
-          <p:cNvPr id="13" name="Table 12"/>
+          <p:cNvPr id="15" name="Table 14"/>
           <p:cNvGraphicFramePr>
             <a:graphicFrameLocks noGrp="1"/>
           </p:cNvGraphicFramePr>
@@ -21281,8 +22216,8 @@
         </p:nvSpPr>
         <p:spPr>
           <a:xfrm>
-            <a:off x="548640" y="411480"/>
-            <a:ext cx="11064240" cy="731520"/>
+            <a:off x="502920" y="182880"/>
+            <a:ext cx="2011680" cy="1188720"/>
           </a:xfrm>
           <a:prstGeom prst="rect">
             <a:avLst/>
@@ -21295,7 +22230,7 @@
           </a:bodyPr>
           <a:lstStyle/>
           <a:p>
-            <a:pPr rtl="1" algn="r">
+            <a:pPr rtl="0" algn="l">
               <a:spcBef>
                 <a:spcPts val="0"/>
               </a:spcBef>
@@ -21304,7 +22239,92 @@
               </a:spcAft>
             </a:pPr>
             <a:r>
-              <a:rPr sz="2900" b="1" i="0">
+              <a:rPr sz="5800" b="1" i="0">
+                <a:solidFill>
+                  <a:srgbClr val="3B1729"/>
+                </a:solidFill>
+                <a:latin typeface="Arial"/>
+                <a:cs typeface="Arial"/>
+              </a:rPr>
+              <a:t>18</a:t>
+            </a:r>
+          </a:p>
+        </p:txBody>
+      </p:sp>
+      <p:sp>
+        <p:nvSpPr>
+          <p:cNvPr id="3" name="Rectangle 2"/>
+          <p:cNvSpPr/>
+          <p:nvPr/>
+        </p:nvSpPr>
+        <p:spPr>
+          <a:xfrm>
+            <a:off x="4754880" y="292608"/>
+            <a:ext cx="6903720" cy="1042415"/>
+          </a:xfrm>
+          <a:prstGeom prst="rect">
+            <a:avLst/>
+          </a:prstGeom>
+          <a:solidFill>
+            <a:srgbClr val="3D1730"/>
+          </a:solidFill>
+          <a:ln>
+            <a:noFill/>
+          </a:ln>
+          <a:effectLst/>
+        </p:spPr>
+        <p:style>
+          <a:lnRef idx="1">
+            <a:schemeClr val="accent1"/>
+          </a:lnRef>
+          <a:fillRef idx="3">
+            <a:schemeClr val="accent1"/>
+          </a:fillRef>
+          <a:effectRef idx="2">
+            <a:schemeClr val="accent1"/>
+          </a:effectRef>
+          <a:fontRef idx="minor">
+            <a:schemeClr val="lt1"/>
+          </a:fontRef>
+        </p:style>
+        <p:txBody>
+          <a:bodyPr rtlCol="0" anchor="ctr"/>
+          <a:lstStyle/>
+          <a:p/>
+        </p:txBody>
+      </p:sp>
+      <p:sp>
+        <p:nvSpPr>
+          <p:cNvPr id="4" name="TextBox 3"/>
+          <p:cNvSpPr txBox="1"/>
+          <p:nvPr/>
+        </p:nvSpPr>
+        <p:spPr>
+          <a:xfrm>
+            <a:off x="5029200" y="411480"/>
+            <a:ext cx="6355080" cy="502920"/>
+          </a:xfrm>
+          <a:prstGeom prst="rect">
+            <a:avLst/>
+          </a:prstGeom>
+          <a:noFill/>
+        </p:spPr>
+        <p:txBody>
+          <a:bodyPr wrap="square" anchor="t" lIns="0" rIns="0" tIns="0" bIns="0">
+            <a:spAutoFit/>
+          </a:bodyPr>
+          <a:lstStyle/>
+          <a:p>
+            <a:pPr rtl="1" algn="r">
+              <a:spcBef>
+                <a:spcPts val="0"/>
+              </a:spcBef>
+              <a:spcAft>
+                <a:spcPts val="0"/>
+              </a:spcAft>
+            </a:pPr>
+            <a:r>
+              <a:rPr sz="2400" b="1" i="0">
                 <a:solidFill>
                   <a:srgbClr val="FBEEF4"/>
                 </a:solidFill>
@@ -21318,14 +22338,14 @@
       </p:sp>
       <p:sp>
         <p:nvSpPr>
-          <p:cNvPr id="3" name="TextBox 2"/>
+          <p:cNvPr id="5" name="TextBox 4"/>
           <p:cNvSpPr txBox="1"/>
           <p:nvPr/>
         </p:nvSpPr>
         <p:spPr>
           <a:xfrm>
-            <a:off x="548640" y="1133856"/>
-            <a:ext cx="11064240" cy="292608"/>
+            <a:off x="5029200" y="950976"/>
+            <a:ext cx="6355080" cy="274320"/>
           </a:xfrm>
           <a:prstGeom prst="rect">
             <a:avLst/>
@@ -21347,7 +22367,7 @@
               </a:spcAft>
             </a:pPr>
             <a:r>
-              <a:rPr sz="1250" b="1" i="0">
+              <a:rPr sz="1150" b="1" i="0">
                 <a:solidFill>
                   <a:srgbClr val="FF6FA5"/>
                 </a:solidFill>
@@ -21361,7 +22381,7 @@
       </p:sp>
       <p:sp>
         <p:nvSpPr>
-          <p:cNvPr id="4" name="Rectangle 3"/>
+          <p:cNvPr id="6" name="Rectangle 5"/>
           <p:cNvSpPr/>
           <p:nvPr/>
         </p:nvSpPr>
@@ -21403,7 +22423,7 @@
       </p:sp>
       <p:sp>
         <p:nvSpPr>
-          <p:cNvPr id="5" name="TextBox 4"/>
+          <p:cNvPr id="7" name="TextBox 6"/>
           <p:cNvSpPr txBox="1"/>
           <p:nvPr/>
         </p:nvSpPr>
@@ -21446,7 +22466,7 @@
       </p:sp>
       <p:sp>
         <p:nvSpPr>
-          <p:cNvPr id="6" name="Rectangle 5"/>
+          <p:cNvPr id="8" name="Rectangle 7"/>
           <p:cNvSpPr/>
           <p:nvPr/>
         </p:nvSpPr>
@@ -21488,7 +22508,7 @@
       </p:sp>
       <p:sp>
         <p:nvSpPr>
-          <p:cNvPr id="7" name="TextBox 6"/>
+          <p:cNvPr id="9" name="TextBox 8"/>
           <p:cNvSpPr txBox="1"/>
           <p:nvPr/>
         </p:nvSpPr>
@@ -21531,7 +22551,7 @@
       </p:sp>
       <p:sp>
         <p:nvSpPr>
-          <p:cNvPr id="8" name="Rectangle 7"/>
+          <p:cNvPr id="10" name="Rectangle 9"/>
           <p:cNvSpPr/>
           <p:nvPr/>
         </p:nvSpPr>
@@ -21573,7 +22593,7 @@
       </p:sp>
       <p:sp>
         <p:nvSpPr>
-          <p:cNvPr id="9" name="TextBox 8"/>
+          <p:cNvPr id="11" name="TextBox 10"/>
           <p:cNvSpPr txBox="1"/>
           <p:nvPr/>
         </p:nvSpPr>
@@ -21616,7 +22636,7 @@
       </p:sp>
       <p:sp>
         <p:nvSpPr>
-          <p:cNvPr id="10" name="Rectangle 9"/>
+          <p:cNvPr id="12" name="Rectangle 11"/>
           <p:cNvSpPr/>
           <p:nvPr/>
         </p:nvSpPr>
@@ -21658,7 +22678,7 @@
       </p:sp>
       <p:sp>
         <p:nvSpPr>
-          <p:cNvPr id="11" name="TextBox 10"/>
+          <p:cNvPr id="13" name="TextBox 12"/>
           <p:cNvSpPr txBox="1"/>
           <p:nvPr/>
         </p:nvSpPr>
@@ -21701,7 +22721,7 @@
       </p:sp>
       <p:sp>
         <p:nvSpPr>
-          <p:cNvPr id="12" name="Rectangle 11"/>
+          <p:cNvPr id="14" name="Rectangle 13"/>
           <p:cNvSpPr/>
           <p:nvPr/>
         </p:nvSpPr>
@@ -21743,7 +22763,7 @@
       </p:sp>
       <p:sp>
         <p:nvSpPr>
-          <p:cNvPr id="13" name="Rectangle 12"/>
+          <p:cNvPr id="15" name="Rectangle 14"/>
           <p:cNvSpPr/>
           <p:nvPr/>
         </p:nvSpPr>
@@ -21785,7 +22805,7 @@
       </p:sp>
       <p:sp>
         <p:nvSpPr>
-          <p:cNvPr id="14" name="TextBox 13"/>
+          <p:cNvPr id="16" name="TextBox 15"/>
           <p:cNvSpPr txBox="1"/>
           <p:nvPr/>
         </p:nvSpPr>
@@ -21828,7 +22848,7 @@
       </p:sp>
       <p:sp>
         <p:nvSpPr>
-          <p:cNvPr id="15" name="TextBox 14"/>
+          <p:cNvPr id="17" name="TextBox 16"/>
           <p:cNvSpPr txBox="1"/>
           <p:nvPr/>
         </p:nvSpPr>
@@ -21871,7 +22891,7 @@
       </p:sp>
       <p:sp>
         <p:nvSpPr>
-          <p:cNvPr id="16" name="Rectangle 15"/>
+          <p:cNvPr id="18" name="Rectangle 17"/>
           <p:cNvSpPr/>
           <p:nvPr/>
         </p:nvSpPr>
@@ -21913,7 +22933,7 @@
       </p:sp>
       <p:sp>
         <p:nvSpPr>
-          <p:cNvPr id="17" name="TextBox 16"/>
+          <p:cNvPr id="19" name="TextBox 18"/>
           <p:cNvSpPr txBox="1"/>
           <p:nvPr/>
         </p:nvSpPr>
@@ -21956,7 +22976,7 @@
       </p:sp>
       <p:sp>
         <p:nvSpPr>
-          <p:cNvPr id="18" name="TextBox 17"/>
+          <p:cNvPr id="20" name="TextBox 19"/>
           <p:cNvSpPr txBox="1"/>
           <p:nvPr/>
         </p:nvSpPr>
@@ -21999,7 +23019,7 @@
       </p:sp>
       <p:sp>
         <p:nvSpPr>
-          <p:cNvPr id="19" name="Rectangle 18"/>
+          <p:cNvPr id="21" name="Rectangle 20"/>
           <p:cNvSpPr/>
           <p:nvPr/>
         </p:nvSpPr>
@@ -22041,7 +23061,7 @@
       </p:sp>
       <p:sp>
         <p:nvSpPr>
-          <p:cNvPr id="20" name="TextBox 19"/>
+          <p:cNvPr id="22" name="TextBox 21"/>
           <p:cNvSpPr txBox="1"/>
           <p:nvPr/>
         </p:nvSpPr>
@@ -22084,7 +23104,7 @@
       </p:sp>
       <p:sp>
         <p:nvSpPr>
-          <p:cNvPr id="21" name="TextBox 20"/>
+          <p:cNvPr id="23" name="TextBox 22"/>
           <p:cNvSpPr txBox="1"/>
           <p:nvPr/>
         </p:nvSpPr>
@@ -22127,7 +23147,7 @@
       </p:sp>
       <p:sp>
         <p:nvSpPr>
-          <p:cNvPr id="22" name="Rectangle 21"/>
+          <p:cNvPr id="24" name="Rectangle 23"/>
           <p:cNvSpPr/>
           <p:nvPr/>
         </p:nvSpPr>
@@ -22169,7 +23189,7 @@
       </p:sp>
       <p:sp>
         <p:nvSpPr>
-          <p:cNvPr id="23" name="TextBox 22"/>
+          <p:cNvPr id="25" name="TextBox 24"/>
           <p:cNvSpPr txBox="1"/>
           <p:nvPr/>
         </p:nvSpPr>
@@ -22212,7 +23232,7 @@
       </p:sp>
       <p:sp>
         <p:nvSpPr>
-          <p:cNvPr id="24" name="TextBox 23"/>
+          <p:cNvPr id="26" name="TextBox 25"/>
           <p:cNvSpPr txBox="1"/>
           <p:nvPr/>
         </p:nvSpPr>
@@ -22255,7 +23275,7 @@
       </p:sp>
       <p:sp>
         <p:nvSpPr>
-          <p:cNvPr id="25" name="Rectangle 24"/>
+          <p:cNvPr id="27" name="Rectangle 26"/>
           <p:cNvSpPr/>
           <p:nvPr/>
         </p:nvSpPr>
@@ -22297,7 +23317,7 @@
       </p:sp>
       <p:sp>
         <p:nvSpPr>
-          <p:cNvPr id="26" name="TextBox 25"/>
+          <p:cNvPr id="28" name="TextBox 27"/>
           <p:cNvSpPr txBox="1"/>
           <p:nvPr/>
         </p:nvSpPr>
@@ -22340,7 +23360,7 @@
       </p:sp>
       <p:sp>
         <p:nvSpPr>
-          <p:cNvPr id="27" name="TextBox 26"/>
+          <p:cNvPr id="29" name="TextBox 28"/>
           <p:cNvSpPr txBox="1"/>
           <p:nvPr/>
         </p:nvSpPr>
@@ -22383,7 +23403,7 @@
       </p:sp>
       <p:sp>
         <p:nvSpPr>
-          <p:cNvPr id="28" name="Rectangle 27"/>
+          <p:cNvPr id="30" name="Rectangle 29"/>
           <p:cNvSpPr/>
           <p:nvPr/>
         </p:nvSpPr>
@@ -22425,7 +23445,7 @@
       </p:sp>
       <p:sp>
         <p:nvSpPr>
-          <p:cNvPr id="29" name="TextBox 28"/>
+          <p:cNvPr id="31" name="TextBox 30"/>
           <p:cNvSpPr txBox="1"/>
           <p:nvPr/>
         </p:nvSpPr>
@@ -22468,7 +23488,7 @@
       </p:sp>
       <p:sp>
         <p:nvSpPr>
-          <p:cNvPr id="30" name="TextBox 29"/>
+          <p:cNvPr id="32" name="TextBox 31"/>
           <p:cNvSpPr txBox="1"/>
           <p:nvPr/>
         </p:nvSpPr>
@@ -22511,7 +23531,7 @@
       </p:sp>
       <p:sp>
         <p:nvSpPr>
-          <p:cNvPr id="31" name="TextBox 30"/>
+          <p:cNvPr id="33" name="TextBox 32"/>
           <p:cNvSpPr txBox="1"/>
           <p:nvPr/>
         </p:nvSpPr>
@@ -22554,7 +23574,7 @@
       </p:sp>
       <p:sp>
         <p:nvSpPr>
-          <p:cNvPr id="32" name="TextBox 31"/>
+          <p:cNvPr id="34" name="TextBox 33"/>
           <p:cNvSpPr txBox="1"/>
           <p:nvPr/>
         </p:nvSpPr>
@@ -22597,7 +23617,7 @@
       </p:sp>
       <p:sp>
         <p:nvSpPr>
-          <p:cNvPr id="33" name="TextBox 32"/>
+          <p:cNvPr id="35" name="TextBox 34"/>
           <p:cNvSpPr txBox="1"/>
           <p:nvPr/>
         </p:nvSpPr>
@@ -22640,7 +23660,7 @@
       </p:sp>
       <p:sp>
         <p:nvSpPr>
-          <p:cNvPr id="34" name="TextBox 33"/>
+          <p:cNvPr id="36" name="TextBox 35"/>
           <p:cNvSpPr txBox="1"/>
           <p:nvPr/>
         </p:nvSpPr>
@@ -22683,7 +23703,7 @@
       </p:sp>
       <p:sp>
         <p:nvSpPr>
-          <p:cNvPr id="35" name="TextBox 34"/>
+          <p:cNvPr id="37" name="TextBox 36"/>
           <p:cNvSpPr txBox="1"/>
           <p:nvPr/>
         </p:nvSpPr>
@@ -22726,7 +23746,7 @@
       </p:sp>
       <p:sp>
         <p:nvSpPr>
-          <p:cNvPr id="36" name="TextBox 35"/>
+          <p:cNvPr id="38" name="TextBox 37"/>
           <p:cNvSpPr txBox="1"/>
           <p:nvPr/>
         </p:nvSpPr>
@@ -22801,8 +23821,8 @@
         </p:nvSpPr>
         <p:spPr>
           <a:xfrm>
-            <a:off x="548640" y="411480"/>
-            <a:ext cx="11064240" cy="731520"/>
+            <a:off x="502920" y="182880"/>
+            <a:ext cx="2011680" cy="1188720"/>
           </a:xfrm>
           <a:prstGeom prst="rect">
             <a:avLst/>
@@ -22815,7 +23835,7 @@
           </a:bodyPr>
           <a:lstStyle/>
           <a:p>
-            <a:pPr rtl="1" algn="r">
+            <a:pPr rtl="0" algn="l">
               <a:spcBef>
                 <a:spcPts val="0"/>
               </a:spcBef>
@@ -22824,7 +23844,92 @@
               </a:spcAft>
             </a:pPr>
             <a:r>
-              <a:rPr sz="2900" b="1" i="0">
+              <a:rPr sz="5800" b="1" i="0">
+                <a:solidFill>
+                  <a:srgbClr val="3B1729"/>
+                </a:solidFill>
+                <a:latin typeface="Arial"/>
+                <a:cs typeface="Arial"/>
+              </a:rPr>
+              <a:t>19</a:t>
+            </a:r>
+          </a:p>
+        </p:txBody>
+      </p:sp>
+      <p:sp>
+        <p:nvSpPr>
+          <p:cNvPr id="3" name="Rectangle 2"/>
+          <p:cNvSpPr/>
+          <p:nvPr/>
+        </p:nvSpPr>
+        <p:spPr>
+          <a:xfrm>
+            <a:off x="4754880" y="292608"/>
+            <a:ext cx="6903720" cy="1042415"/>
+          </a:xfrm>
+          <a:prstGeom prst="rect">
+            <a:avLst/>
+          </a:prstGeom>
+          <a:solidFill>
+            <a:srgbClr val="3D1730"/>
+          </a:solidFill>
+          <a:ln>
+            <a:noFill/>
+          </a:ln>
+          <a:effectLst/>
+        </p:spPr>
+        <p:style>
+          <a:lnRef idx="1">
+            <a:schemeClr val="accent1"/>
+          </a:lnRef>
+          <a:fillRef idx="3">
+            <a:schemeClr val="accent1"/>
+          </a:fillRef>
+          <a:effectRef idx="2">
+            <a:schemeClr val="accent1"/>
+          </a:effectRef>
+          <a:fontRef idx="minor">
+            <a:schemeClr val="lt1"/>
+          </a:fontRef>
+        </p:style>
+        <p:txBody>
+          <a:bodyPr rtlCol="0" anchor="ctr"/>
+          <a:lstStyle/>
+          <a:p/>
+        </p:txBody>
+      </p:sp>
+      <p:sp>
+        <p:nvSpPr>
+          <p:cNvPr id="4" name="TextBox 3"/>
+          <p:cNvSpPr txBox="1"/>
+          <p:nvPr/>
+        </p:nvSpPr>
+        <p:spPr>
+          <a:xfrm>
+            <a:off x="5029200" y="411480"/>
+            <a:ext cx="6355080" cy="502920"/>
+          </a:xfrm>
+          <a:prstGeom prst="rect">
+            <a:avLst/>
+          </a:prstGeom>
+          <a:noFill/>
+        </p:spPr>
+        <p:txBody>
+          <a:bodyPr wrap="square" anchor="t" lIns="0" rIns="0" tIns="0" bIns="0">
+            <a:spAutoFit/>
+          </a:bodyPr>
+          <a:lstStyle/>
+          <a:p>
+            <a:pPr rtl="1" algn="r">
+              <a:spcBef>
+                <a:spcPts val="0"/>
+              </a:spcBef>
+              <a:spcAft>
+                <a:spcPts val="0"/>
+              </a:spcAft>
+            </a:pPr>
+            <a:r>
+              <a:rPr sz="2400" b="1" i="0">
                 <a:solidFill>
                   <a:srgbClr val="FBEEF4"/>
                 </a:solidFill>
@@ -22838,14 +23943,14 @@
       </p:sp>
       <p:sp>
         <p:nvSpPr>
-          <p:cNvPr id="3" name="TextBox 2"/>
+          <p:cNvPr id="5" name="TextBox 4"/>
           <p:cNvSpPr txBox="1"/>
           <p:nvPr/>
         </p:nvSpPr>
         <p:spPr>
           <a:xfrm>
-            <a:off x="548640" y="1133856"/>
-            <a:ext cx="11064240" cy="292608"/>
+            <a:off x="5029200" y="950976"/>
+            <a:ext cx="6355080" cy="274320"/>
           </a:xfrm>
           <a:prstGeom prst="rect">
             <a:avLst/>
@@ -22867,7 +23972,7 @@
               </a:spcAft>
             </a:pPr>
             <a:r>
-              <a:rPr sz="1250" b="1" i="0">
+              <a:rPr sz="1150" b="1" i="0">
                 <a:solidFill>
                   <a:srgbClr val="FF6FA5"/>
                 </a:solidFill>
@@ -22881,7 +23986,7 @@
       </p:sp>
       <p:graphicFrame>
         <p:nvGraphicFramePr>
-          <p:cNvPr id="4" name="Table 3"/>
+          <p:cNvPr id="6" name="Table 5"/>
           <p:cNvGraphicFramePr>
             <a:graphicFrameLocks noGrp="1"/>
           </p:cNvGraphicFramePr>
@@ -24429,7 +25534,7 @@
       </p:graphicFrame>
       <p:sp>
         <p:nvSpPr>
-          <p:cNvPr id="5" name="Rounded Rectangle 4"/>
+          <p:cNvPr id="7" name="Rectangle 6"/>
           <p:cNvSpPr/>
           <p:nvPr/>
         </p:nvSpPr>
@@ -24438,7 +25543,7 @@
             <a:off x="548640" y="4343400"/>
             <a:ext cx="11064240" cy="1783080"/>
           </a:xfrm>
-          <a:prstGeom prst="roundRect">
+          <a:prstGeom prst="rect">
             <a:avLst/>
           </a:prstGeom>
           <a:solidFill>
@@ -24471,7 +25576,7 @@
       </p:sp>
       <p:sp>
         <p:nvSpPr>
-          <p:cNvPr id="6" name="TextBox 5"/>
+          <p:cNvPr id="8" name="TextBox 7"/>
           <p:cNvSpPr txBox="1"/>
           <p:nvPr/>
         </p:nvSpPr>
@@ -24514,7 +25619,7 @@
       </p:sp>
       <p:sp>
         <p:nvSpPr>
-          <p:cNvPr id="7" name="TextBox 6"/>
+          <p:cNvPr id="9" name="TextBox 8"/>
           <p:cNvSpPr txBox="1"/>
           <p:nvPr/>
         </p:nvSpPr>
@@ -24615,8 +25720,8 @@
         </p:nvSpPr>
         <p:spPr>
           <a:xfrm>
-            <a:off x="548640" y="411480"/>
-            <a:ext cx="11064240" cy="731520"/>
+            <a:off x="502920" y="182880"/>
+            <a:ext cx="2011680" cy="1188720"/>
           </a:xfrm>
           <a:prstGeom prst="rect">
             <a:avLst/>
@@ -24629,7 +25734,7 @@
           </a:bodyPr>
           <a:lstStyle/>
           <a:p>
-            <a:pPr rtl="1" algn="r">
+            <a:pPr rtl="0" algn="l">
               <a:spcBef>
                 <a:spcPts val="0"/>
               </a:spcBef>
@@ -24638,7 +25743,92 @@
               </a:spcAft>
             </a:pPr>
             <a:r>
-              <a:rPr sz="2900" b="1" i="0">
+              <a:rPr sz="5800" b="1" i="0">
+                <a:solidFill>
+                  <a:srgbClr val="3B1729"/>
+                </a:solidFill>
+                <a:latin typeface="Arial"/>
+                <a:cs typeface="Arial"/>
+              </a:rPr>
+              <a:t>20</a:t>
+            </a:r>
+          </a:p>
+        </p:txBody>
+      </p:sp>
+      <p:sp>
+        <p:nvSpPr>
+          <p:cNvPr id="3" name="Rectangle 2"/>
+          <p:cNvSpPr/>
+          <p:nvPr/>
+        </p:nvSpPr>
+        <p:spPr>
+          <a:xfrm>
+            <a:off x="4754880" y="292608"/>
+            <a:ext cx="6903720" cy="1042415"/>
+          </a:xfrm>
+          <a:prstGeom prst="rect">
+            <a:avLst/>
+          </a:prstGeom>
+          <a:solidFill>
+            <a:srgbClr val="3D1730"/>
+          </a:solidFill>
+          <a:ln>
+            <a:noFill/>
+          </a:ln>
+          <a:effectLst/>
+        </p:spPr>
+        <p:style>
+          <a:lnRef idx="1">
+            <a:schemeClr val="accent1"/>
+          </a:lnRef>
+          <a:fillRef idx="3">
+            <a:schemeClr val="accent1"/>
+          </a:fillRef>
+          <a:effectRef idx="2">
+            <a:schemeClr val="accent1"/>
+          </a:effectRef>
+          <a:fontRef idx="minor">
+            <a:schemeClr val="lt1"/>
+          </a:fontRef>
+        </p:style>
+        <p:txBody>
+          <a:bodyPr rtlCol="0" anchor="ctr"/>
+          <a:lstStyle/>
+          <a:p/>
+        </p:txBody>
+      </p:sp>
+      <p:sp>
+        <p:nvSpPr>
+          <p:cNvPr id="4" name="TextBox 3"/>
+          <p:cNvSpPr txBox="1"/>
+          <p:nvPr/>
+        </p:nvSpPr>
+        <p:spPr>
+          <a:xfrm>
+            <a:off x="5029200" y="411480"/>
+            <a:ext cx="6355080" cy="502920"/>
+          </a:xfrm>
+          <a:prstGeom prst="rect">
+            <a:avLst/>
+          </a:prstGeom>
+          <a:noFill/>
+        </p:spPr>
+        <p:txBody>
+          <a:bodyPr wrap="square" anchor="t" lIns="0" rIns="0" tIns="0" bIns="0">
+            <a:spAutoFit/>
+          </a:bodyPr>
+          <a:lstStyle/>
+          <a:p>
+            <a:pPr rtl="1" algn="r">
+              <a:spcBef>
+                <a:spcPts val="0"/>
+              </a:spcBef>
+              <a:spcAft>
+                <a:spcPts val="0"/>
+              </a:spcAft>
+            </a:pPr>
+            <a:r>
+              <a:rPr sz="2400" b="1" i="0">
                 <a:solidFill>
                   <a:srgbClr val="FBEEF4"/>
                 </a:solidFill>
@@ -24652,14 +25842,14 @@
       </p:sp>
       <p:sp>
         <p:nvSpPr>
-          <p:cNvPr id="3" name="TextBox 2"/>
+          <p:cNvPr id="5" name="TextBox 4"/>
           <p:cNvSpPr txBox="1"/>
           <p:nvPr/>
         </p:nvSpPr>
         <p:spPr>
           <a:xfrm>
-            <a:off x="548640" y="1133856"/>
-            <a:ext cx="11064240" cy="292608"/>
+            <a:off x="5029200" y="950976"/>
+            <a:ext cx="6355080" cy="274320"/>
           </a:xfrm>
           <a:prstGeom prst="rect">
             <a:avLst/>
@@ -24681,7 +25871,7 @@
               </a:spcAft>
             </a:pPr>
             <a:r>
-              <a:rPr sz="1250" b="1" i="0">
+              <a:rPr sz="1150" b="1" i="0">
                 <a:solidFill>
                   <a:srgbClr val="FF6FA5"/>
                 </a:solidFill>
@@ -24695,7 +25885,7 @@
       </p:sp>
       <p:sp>
         <p:nvSpPr>
-          <p:cNvPr id="4" name="TextBox 3"/>
+          <p:cNvPr id="6" name="TextBox 5"/>
           <p:cNvSpPr txBox="1"/>
           <p:nvPr/>
         </p:nvSpPr>
@@ -24738,7 +25928,7 @@
       </p:sp>
       <p:graphicFrame>
         <p:nvGraphicFramePr>
-          <p:cNvPr id="5" name="Table 4"/>
+          <p:cNvPr id="7" name="Table 6"/>
           <p:cNvGraphicFramePr>
             <a:graphicFrameLocks noGrp="1"/>
           </p:cNvGraphicFramePr>
@@ -25716,7 +26906,7 @@
       </p:graphicFrame>
       <p:sp>
         <p:nvSpPr>
-          <p:cNvPr id="6" name="Rounded Rectangle 5"/>
+          <p:cNvPr id="8" name="Rectangle 7"/>
           <p:cNvSpPr/>
           <p:nvPr/>
         </p:nvSpPr>
@@ -25725,7 +26915,7 @@
             <a:off x="7498079" y="2148840"/>
             <a:ext cx="4114800" cy="1965960"/>
           </a:xfrm>
-          <a:prstGeom prst="roundRect">
+          <a:prstGeom prst="rect">
             <a:avLst/>
           </a:prstGeom>
           <a:solidFill>
@@ -25758,7 +26948,7 @@
       </p:sp>
       <p:sp>
         <p:nvSpPr>
-          <p:cNvPr id="7" name="TextBox 6"/>
+          <p:cNvPr id="9" name="TextBox 8"/>
           <p:cNvSpPr txBox="1"/>
           <p:nvPr/>
         </p:nvSpPr>
@@ -25801,7 +26991,7 @@
       </p:sp>
       <p:sp>
         <p:nvSpPr>
-          <p:cNvPr id="8" name="TextBox 7"/>
+          <p:cNvPr id="10" name="TextBox 9"/>
           <p:cNvSpPr txBox="1"/>
           <p:nvPr/>
         </p:nvSpPr>
@@ -25844,7 +27034,7 @@
       </p:sp>
       <p:sp>
         <p:nvSpPr>
-          <p:cNvPr id="9" name="TextBox 8"/>
+          <p:cNvPr id="11" name="TextBox 10"/>
           <p:cNvSpPr txBox="1"/>
           <p:nvPr/>
         </p:nvSpPr>
@@ -25890,7 +27080,7 @@
       </p:sp>
       <p:sp>
         <p:nvSpPr>
-          <p:cNvPr id="10" name="TextBox 9"/>
+          <p:cNvPr id="12" name="TextBox 11"/>
           <p:cNvSpPr txBox="1"/>
           <p:nvPr/>
         </p:nvSpPr>
@@ -25933,7 +27123,7 @@
       </p:sp>
       <p:graphicFrame>
         <p:nvGraphicFramePr>
-          <p:cNvPr id="11" name="Table 10"/>
+          <p:cNvPr id="13" name="Table 12"/>
           <p:cNvGraphicFramePr>
             <a:graphicFrameLocks noGrp="1"/>
           </p:cNvGraphicFramePr>
@@ -26343,7 +27533,7 @@
       </p:graphicFrame>
       <p:sp>
         <p:nvSpPr>
-          <p:cNvPr id="12" name="Rounded Rectangle 11"/>
+          <p:cNvPr id="14" name="Rectangle 13"/>
           <p:cNvSpPr/>
           <p:nvPr/>
         </p:nvSpPr>
@@ -26352,7 +27542,7 @@
             <a:off x="5120640" y="4754880"/>
             <a:ext cx="6492240" cy="1325880"/>
           </a:xfrm>
-          <a:prstGeom prst="roundRect">
+          <a:prstGeom prst="rect">
             <a:avLst/>
           </a:prstGeom>
           <a:solidFill>
@@ -26385,7 +27575,7 @@
       </p:sp>
       <p:sp>
         <p:nvSpPr>
-          <p:cNvPr id="13" name="TextBox 12"/>
+          <p:cNvPr id="15" name="TextBox 14"/>
           <p:cNvSpPr txBox="1"/>
           <p:nvPr/>
         </p:nvSpPr>
@@ -26463,8 +27653,8 @@
         </p:nvSpPr>
         <p:spPr>
           <a:xfrm>
-            <a:off x="548640" y="411480"/>
-            <a:ext cx="11064240" cy="731520"/>
+            <a:off x="502920" y="182880"/>
+            <a:ext cx="2011680" cy="1188720"/>
           </a:xfrm>
           <a:prstGeom prst="rect">
             <a:avLst/>
@@ -26477,7 +27667,7 @@
           </a:bodyPr>
           <a:lstStyle/>
           <a:p>
-            <a:pPr rtl="1" algn="r">
+            <a:pPr rtl="0" algn="l">
               <a:spcBef>
                 <a:spcPts val="0"/>
               </a:spcBef>
@@ -26486,7 +27676,92 @@
               </a:spcAft>
             </a:pPr>
             <a:r>
-              <a:rPr sz="2900" b="1" i="0">
+              <a:rPr sz="5800" b="1" i="0">
+                <a:solidFill>
+                  <a:srgbClr val="3B1729"/>
+                </a:solidFill>
+                <a:latin typeface="Arial"/>
+                <a:cs typeface="Arial"/>
+              </a:rPr>
+              <a:t>21</a:t>
+            </a:r>
+          </a:p>
+        </p:txBody>
+      </p:sp>
+      <p:sp>
+        <p:nvSpPr>
+          <p:cNvPr id="3" name="Rectangle 2"/>
+          <p:cNvSpPr/>
+          <p:nvPr/>
+        </p:nvSpPr>
+        <p:spPr>
+          <a:xfrm>
+            <a:off x="4754880" y="292608"/>
+            <a:ext cx="6903720" cy="1042415"/>
+          </a:xfrm>
+          <a:prstGeom prst="rect">
+            <a:avLst/>
+          </a:prstGeom>
+          <a:solidFill>
+            <a:srgbClr val="3D1730"/>
+          </a:solidFill>
+          <a:ln>
+            <a:noFill/>
+          </a:ln>
+          <a:effectLst/>
+        </p:spPr>
+        <p:style>
+          <a:lnRef idx="1">
+            <a:schemeClr val="accent1"/>
+          </a:lnRef>
+          <a:fillRef idx="3">
+            <a:schemeClr val="accent1"/>
+          </a:fillRef>
+          <a:effectRef idx="2">
+            <a:schemeClr val="accent1"/>
+          </a:effectRef>
+          <a:fontRef idx="minor">
+            <a:schemeClr val="lt1"/>
+          </a:fontRef>
+        </p:style>
+        <p:txBody>
+          <a:bodyPr rtlCol="0" anchor="ctr"/>
+          <a:lstStyle/>
+          <a:p/>
+        </p:txBody>
+      </p:sp>
+      <p:sp>
+        <p:nvSpPr>
+          <p:cNvPr id="4" name="TextBox 3"/>
+          <p:cNvSpPr txBox="1"/>
+          <p:nvPr/>
+        </p:nvSpPr>
+        <p:spPr>
+          <a:xfrm>
+            <a:off x="5029200" y="411480"/>
+            <a:ext cx="6355080" cy="502920"/>
+          </a:xfrm>
+          <a:prstGeom prst="rect">
+            <a:avLst/>
+          </a:prstGeom>
+          <a:noFill/>
+        </p:spPr>
+        <p:txBody>
+          <a:bodyPr wrap="square" anchor="t" lIns="0" rIns="0" tIns="0" bIns="0">
+            <a:spAutoFit/>
+          </a:bodyPr>
+          <a:lstStyle/>
+          <a:p>
+            <a:pPr rtl="1" algn="r">
+              <a:spcBef>
+                <a:spcPts val="0"/>
+              </a:spcBef>
+              <a:spcAft>
+                <a:spcPts val="0"/>
+              </a:spcAft>
+            </a:pPr>
+            <a:r>
+              <a:rPr sz="2400" b="1" i="0">
                 <a:solidFill>
                   <a:srgbClr val="FBEEF4"/>
                 </a:solidFill>
@@ -26500,14 +27775,14 @@
       </p:sp>
       <p:sp>
         <p:nvSpPr>
-          <p:cNvPr id="3" name="TextBox 2"/>
+          <p:cNvPr id="5" name="TextBox 4"/>
           <p:cNvSpPr txBox="1"/>
           <p:nvPr/>
         </p:nvSpPr>
         <p:spPr>
           <a:xfrm>
-            <a:off x="548640" y="1133856"/>
-            <a:ext cx="11064240" cy="292608"/>
+            <a:off x="5029200" y="950976"/>
+            <a:ext cx="6355080" cy="274320"/>
           </a:xfrm>
           <a:prstGeom prst="rect">
             <a:avLst/>
@@ -26529,7 +27804,7 @@
               </a:spcAft>
             </a:pPr>
             <a:r>
-              <a:rPr sz="1250" b="1" i="0">
+              <a:rPr sz="1150" b="1" i="0">
                 <a:solidFill>
                   <a:srgbClr val="FF6FA5"/>
                 </a:solidFill>
@@ -26543,7 +27818,7 @@
       </p:sp>
       <p:graphicFrame>
         <p:nvGraphicFramePr>
-          <p:cNvPr id="4" name="Table 3"/>
+          <p:cNvPr id="6" name="Table 5"/>
           <p:cNvGraphicFramePr>
             <a:graphicFrameLocks noGrp="1"/>
           </p:cNvGraphicFramePr>
@@ -29413,7 +30688,7 @@
       </p:graphicFrame>
       <p:sp>
         <p:nvSpPr>
-          <p:cNvPr id="5" name="TextBox 4"/>
+          <p:cNvPr id="7" name="TextBox 6"/>
           <p:cNvSpPr txBox="1"/>
           <p:nvPr/>
         </p:nvSpPr>
@@ -29459,7 +30734,7 @@
       </p:sp>
       <p:sp>
         <p:nvSpPr>
-          <p:cNvPr id="6" name="TextBox 5"/>
+          <p:cNvPr id="8" name="TextBox 7"/>
           <p:cNvSpPr txBox="1"/>
           <p:nvPr/>
         </p:nvSpPr>
@@ -29502,7 +30777,7 @@
       </p:sp>
       <p:sp>
         <p:nvSpPr>
-          <p:cNvPr id="7" name="TextBox 6"/>
+          <p:cNvPr id="9" name="TextBox 8"/>
           <p:cNvSpPr txBox="1"/>
           <p:nvPr/>
         </p:nvSpPr>
@@ -29545,7 +30820,7 @@
       </p:sp>
       <p:sp>
         <p:nvSpPr>
-          <p:cNvPr id="8" name="TextBox 7"/>
+          <p:cNvPr id="10" name="TextBox 9"/>
           <p:cNvSpPr txBox="1"/>
           <p:nvPr/>
         </p:nvSpPr>
@@ -29588,7 +30863,7 @@
       </p:sp>
       <p:sp>
         <p:nvSpPr>
-          <p:cNvPr id="9" name="TextBox 8"/>
+          <p:cNvPr id="11" name="TextBox 10"/>
           <p:cNvSpPr txBox="1"/>
           <p:nvPr/>
         </p:nvSpPr>
@@ -29631,7 +30906,7 @@
       </p:sp>
       <p:sp>
         <p:nvSpPr>
-          <p:cNvPr id="10" name="TextBox 9"/>
+          <p:cNvPr id="12" name="TextBox 11"/>
           <p:cNvSpPr txBox="1"/>
           <p:nvPr/>
         </p:nvSpPr>
@@ -29674,7 +30949,7 @@
       </p:sp>
       <p:sp>
         <p:nvSpPr>
-          <p:cNvPr id="11" name="TextBox 10"/>
+          <p:cNvPr id="13" name="TextBox 12"/>
           <p:cNvSpPr txBox="1"/>
           <p:nvPr/>
         </p:nvSpPr>
@@ -30341,8 +31616,8 @@
         </p:nvSpPr>
         <p:spPr>
           <a:xfrm>
-            <a:off x="548640" y="411480"/>
-            <a:ext cx="11064240" cy="731520"/>
+            <a:off x="502920" y="182880"/>
+            <a:ext cx="2011680" cy="1188720"/>
           </a:xfrm>
           <a:prstGeom prst="rect">
             <a:avLst/>
@@ -30355,7 +31630,7 @@
           </a:bodyPr>
           <a:lstStyle/>
           <a:p>
-            <a:pPr rtl="1" algn="r">
+            <a:pPr rtl="0" algn="l">
               <a:spcBef>
                 <a:spcPts val="0"/>
               </a:spcBef>
@@ -30364,417 +31639,30 @@
               </a:spcAft>
             </a:pPr>
             <a:r>
-              <a:rPr sz="2900" b="1" i="0">
+              <a:rPr sz="5800" b="1" i="0">
                 <a:solidFill>
-                  <a:srgbClr val="FBEEF4"/>
+                  <a:srgbClr val="3B1729"/>
                 </a:solidFill>
                 <a:latin typeface="Arial"/>
                 <a:cs typeface="Arial"/>
               </a:rPr>
-              <a:t>مجموعه داده UCF-Crime</a:t>
+              <a:t>02</a:t>
             </a:r>
           </a:p>
         </p:txBody>
       </p:sp>
       <p:sp>
         <p:nvSpPr>
-          <p:cNvPr id="3" name="TextBox 2"/>
-          <p:cNvSpPr txBox="1"/>
+          <p:cNvPr id="3" name="Rectangle 2"/>
+          <p:cNvSpPr/>
           <p:nvPr/>
         </p:nvSpPr>
         <p:spPr>
           <a:xfrm>
-            <a:off x="548640" y="1133856"/>
-            <a:ext cx="11064240" cy="292608"/>
+            <a:off x="4754880" y="292608"/>
+            <a:ext cx="6903720" cy="1042415"/>
           </a:xfrm>
           <a:prstGeom prst="rect">
-            <a:avLst/>
-          </a:prstGeom>
-          <a:noFill/>
-        </p:spPr>
-        <p:txBody>
-          <a:bodyPr wrap="square" anchor="t" lIns="0" rIns="0" tIns="0" bIns="0">
-            <a:spAutoFit/>
-          </a:bodyPr>
-          <a:lstStyle/>
-          <a:p>
-            <a:pPr rtl="1" algn="r">
-              <a:spcBef>
-                <a:spcPts val="0"/>
-              </a:spcBef>
-              <a:spcAft>
-                <a:spcPts val="0"/>
-              </a:spcAft>
-            </a:pPr>
-            <a:r>
-              <a:rPr sz="1250" b="1" i="0">
-                <a:solidFill>
-                  <a:srgbClr val="FF6FA5"/>
-                </a:solidFill>
-                <a:latin typeface="Arial"/>
-                <a:cs typeface="Arial"/>
-              </a:rPr>
-              <a:t>داده</a:t>
-            </a:r>
-          </a:p>
-        </p:txBody>
-      </p:sp>
-      <p:sp>
-        <p:nvSpPr>
-          <p:cNvPr id="4" name="TextBox 3"/>
-          <p:cNvSpPr txBox="1"/>
-          <p:nvPr/>
-        </p:nvSpPr>
-        <p:spPr>
-          <a:xfrm>
-            <a:off x="548640" y="1645920"/>
-            <a:ext cx="2651760" cy="731520"/>
-          </a:xfrm>
-          <a:prstGeom prst="rect">
-            <a:avLst/>
-          </a:prstGeom>
-          <a:noFill/>
-        </p:spPr>
-        <p:txBody>
-          <a:bodyPr wrap="square" anchor="t" lIns="0" rIns="0" tIns="0" bIns="0">
-            <a:spAutoFit/>
-          </a:bodyPr>
-          <a:lstStyle/>
-          <a:p>
-            <a:pPr rtl="0" algn="ctr">
-              <a:spcBef>
-                <a:spcPts val="0"/>
-              </a:spcBef>
-              <a:spcAft>
-                <a:spcPts val="0"/>
-              </a:spcAft>
-            </a:pPr>
-            <a:r>
-              <a:rPr sz="3800" b="1" i="0">
-                <a:solidFill>
-                  <a:srgbClr val="FBEEF4"/>
-                </a:solidFill>
-                <a:latin typeface="Arial"/>
-                <a:cs typeface="Arial"/>
-              </a:rPr>
-              <a:t>1900</a:t>
-            </a:r>
-          </a:p>
-        </p:txBody>
-      </p:sp>
-      <p:sp>
-        <p:nvSpPr>
-          <p:cNvPr id="5" name="TextBox 4"/>
-          <p:cNvSpPr txBox="1"/>
-          <p:nvPr/>
-        </p:nvSpPr>
-        <p:spPr>
-          <a:xfrm>
-            <a:off x="548640" y="2359152"/>
-            <a:ext cx="2651760" cy="457200"/>
-          </a:xfrm>
-          <a:prstGeom prst="rect">
-            <a:avLst/>
-          </a:prstGeom>
-          <a:noFill/>
-        </p:spPr>
-        <p:txBody>
-          <a:bodyPr wrap="square" anchor="t" lIns="0" rIns="0" tIns="0" bIns="0">
-            <a:spAutoFit/>
-          </a:bodyPr>
-          <a:lstStyle/>
-          <a:p>
-            <a:pPr rtl="1" algn="ctr">
-              <a:spcBef>
-                <a:spcPts val="0"/>
-              </a:spcBef>
-              <a:spcAft>
-                <a:spcPts val="0"/>
-              </a:spcAft>
-            </a:pPr>
-            <a:r>
-              <a:rPr sz="1200" b="0" i="0">
-                <a:solidFill>
-                  <a:srgbClr val="B58FA2"/>
-                </a:solidFill>
-                <a:latin typeface="Arial"/>
-                <a:cs typeface="Arial"/>
-              </a:rPr>
-              <a:t>کل ویدیوها</a:t>
-            </a:r>
-          </a:p>
-        </p:txBody>
-      </p:sp>
-      <p:sp>
-        <p:nvSpPr>
-          <p:cNvPr id="6" name="TextBox 5"/>
-          <p:cNvSpPr txBox="1"/>
-          <p:nvPr/>
-        </p:nvSpPr>
-        <p:spPr>
-          <a:xfrm>
-            <a:off x="3383280" y="1645920"/>
-            <a:ext cx="2651760" cy="731520"/>
-          </a:xfrm>
-          <a:prstGeom prst="rect">
-            <a:avLst/>
-          </a:prstGeom>
-          <a:noFill/>
-        </p:spPr>
-        <p:txBody>
-          <a:bodyPr wrap="square" anchor="t" lIns="0" rIns="0" tIns="0" bIns="0">
-            <a:spAutoFit/>
-          </a:bodyPr>
-          <a:lstStyle/>
-          <a:p>
-            <a:pPr rtl="0" algn="ctr">
-              <a:spcBef>
-                <a:spcPts val="0"/>
-              </a:spcBef>
-              <a:spcAft>
-                <a:spcPts val="0"/>
-              </a:spcAft>
-            </a:pPr>
-            <a:r>
-              <a:rPr sz="3800" b="1" i="0">
-                <a:solidFill>
-                  <a:srgbClr val="FBEEF4"/>
-                </a:solidFill>
-                <a:latin typeface="Arial"/>
-                <a:cs typeface="Arial"/>
-              </a:rPr>
-              <a:t>14</a:t>
-            </a:r>
-          </a:p>
-        </p:txBody>
-      </p:sp>
-      <p:sp>
-        <p:nvSpPr>
-          <p:cNvPr id="7" name="TextBox 6"/>
-          <p:cNvSpPr txBox="1"/>
-          <p:nvPr/>
-        </p:nvSpPr>
-        <p:spPr>
-          <a:xfrm>
-            <a:off x="3383280" y="2359152"/>
-            <a:ext cx="2651760" cy="457200"/>
-          </a:xfrm>
-          <a:prstGeom prst="rect">
-            <a:avLst/>
-          </a:prstGeom>
-          <a:noFill/>
-        </p:spPr>
-        <p:txBody>
-          <a:bodyPr wrap="square" anchor="t" lIns="0" rIns="0" tIns="0" bIns="0">
-            <a:spAutoFit/>
-          </a:bodyPr>
-          <a:lstStyle/>
-          <a:p>
-            <a:pPr rtl="1" algn="ctr">
-              <a:spcBef>
-                <a:spcPts val="0"/>
-              </a:spcBef>
-              <a:spcAft>
-                <a:spcPts val="0"/>
-              </a:spcAft>
-            </a:pPr>
-            <a:r>
-              <a:rPr sz="1200" b="0" i="0">
-                <a:solidFill>
-                  <a:srgbClr val="B58FA2"/>
-                </a:solidFill>
-                <a:latin typeface="Arial"/>
-                <a:cs typeface="Arial"/>
-              </a:rPr>
-              <a:t>کلاس</a:t>
-            </a:r>
-          </a:p>
-        </p:txBody>
-      </p:sp>
-      <p:sp>
-        <p:nvSpPr>
-          <p:cNvPr id="8" name="TextBox 7"/>
-          <p:cNvSpPr txBox="1"/>
-          <p:nvPr/>
-        </p:nvSpPr>
-        <p:spPr>
-          <a:xfrm>
-            <a:off x="6217920" y="1645920"/>
-            <a:ext cx="2651760" cy="731520"/>
-          </a:xfrm>
-          <a:prstGeom prst="rect">
-            <a:avLst/>
-          </a:prstGeom>
-          <a:noFill/>
-        </p:spPr>
-        <p:txBody>
-          <a:bodyPr wrap="square" anchor="t" lIns="0" rIns="0" tIns="0" bIns="0">
-            <a:spAutoFit/>
-          </a:bodyPr>
-          <a:lstStyle/>
-          <a:p>
-            <a:pPr rtl="0" algn="ctr">
-              <a:spcBef>
-                <a:spcPts val="0"/>
-              </a:spcBef>
-              <a:spcAft>
-                <a:spcPts val="0"/>
-              </a:spcAft>
-            </a:pPr>
-            <a:r>
-              <a:rPr sz="3800" b="1" i="0">
-                <a:solidFill>
-                  <a:srgbClr val="7FD8C0"/>
-                </a:solidFill>
-                <a:latin typeface="Arial"/>
-                <a:cs typeface="Arial"/>
-              </a:rPr>
-              <a:t>1895</a:t>
-            </a:r>
-          </a:p>
-        </p:txBody>
-      </p:sp>
-      <p:sp>
-        <p:nvSpPr>
-          <p:cNvPr id="9" name="TextBox 8"/>
-          <p:cNvSpPr txBox="1"/>
-          <p:nvPr/>
-        </p:nvSpPr>
-        <p:spPr>
-          <a:xfrm>
-            <a:off x="6217920" y="2359152"/>
-            <a:ext cx="2651760" cy="457200"/>
-          </a:xfrm>
-          <a:prstGeom prst="rect">
-            <a:avLst/>
-          </a:prstGeom>
-          <a:noFill/>
-        </p:spPr>
-        <p:txBody>
-          <a:bodyPr wrap="square" anchor="t" lIns="0" rIns="0" tIns="0" bIns="0">
-            <a:spAutoFit/>
-          </a:bodyPr>
-          <a:lstStyle/>
-          <a:p>
-            <a:pPr rtl="1" algn="ctr">
-              <a:spcBef>
-                <a:spcPts val="0"/>
-              </a:spcBef>
-              <a:spcAft>
-                <a:spcPts val="0"/>
-              </a:spcAft>
-            </a:pPr>
-            <a:r>
-              <a:rPr sz="1200" b="0" i="0">
-                <a:solidFill>
-                  <a:srgbClr val="B58FA2"/>
-                </a:solidFill>
-                <a:latin typeface="Arial"/>
-                <a:cs typeface="Arial"/>
-              </a:rPr>
-              <a:t>رمزگشایی موفق</a:t>
-            </a:r>
-          </a:p>
-        </p:txBody>
-      </p:sp>
-      <p:sp>
-        <p:nvSpPr>
-          <p:cNvPr id="10" name="TextBox 9"/>
-          <p:cNvSpPr txBox="1"/>
-          <p:nvPr/>
-        </p:nvSpPr>
-        <p:spPr>
-          <a:xfrm>
-            <a:off x="9052560" y="1645920"/>
-            <a:ext cx="2651760" cy="731520"/>
-          </a:xfrm>
-          <a:prstGeom prst="rect">
-            <a:avLst/>
-          </a:prstGeom>
-          <a:noFill/>
-        </p:spPr>
-        <p:txBody>
-          <a:bodyPr wrap="square" anchor="t" lIns="0" rIns="0" tIns="0" bIns="0">
-            <a:spAutoFit/>
-          </a:bodyPr>
-          <a:lstStyle/>
-          <a:p>
-            <a:pPr rtl="0" algn="ctr">
-              <a:spcBef>
-                <a:spcPts val="0"/>
-              </a:spcBef>
-              <a:spcAft>
-                <a:spcPts val="0"/>
-              </a:spcAft>
-            </a:pPr>
-            <a:r>
-              <a:rPr sz="3800" b="1" i="0">
-                <a:solidFill>
-                  <a:srgbClr val="FF8A80"/>
-                </a:solidFill>
-                <a:latin typeface="Arial"/>
-                <a:cs typeface="Arial"/>
-              </a:rPr>
-              <a:t>5</a:t>
-            </a:r>
-          </a:p>
-        </p:txBody>
-      </p:sp>
-      <p:sp>
-        <p:nvSpPr>
-          <p:cNvPr id="11" name="TextBox 10"/>
-          <p:cNvSpPr txBox="1"/>
-          <p:nvPr/>
-        </p:nvSpPr>
-        <p:spPr>
-          <a:xfrm>
-            <a:off x="9052560" y="2359152"/>
-            <a:ext cx="2651760" cy="457200"/>
-          </a:xfrm>
-          <a:prstGeom prst="rect">
-            <a:avLst/>
-          </a:prstGeom>
-          <a:noFill/>
-        </p:spPr>
-        <p:txBody>
-          <a:bodyPr wrap="square" anchor="t" lIns="0" rIns="0" tIns="0" bIns="0">
-            <a:spAutoFit/>
-          </a:bodyPr>
-          <a:lstStyle/>
-          <a:p>
-            <a:pPr rtl="1" algn="ctr">
-              <a:spcBef>
-                <a:spcPts val="0"/>
-              </a:spcBef>
-              <a:spcAft>
-                <a:spcPts val="0"/>
-              </a:spcAft>
-            </a:pPr>
-            <a:r>
-              <a:rPr sz="1200" b="0" i="0">
-                <a:solidFill>
-                  <a:srgbClr val="B58FA2"/>
-                </a:solidFill>
-                <a:latin typeface="Arial"/>
-                <a:cs typeface="Arial"/>
-              </a:rPr>
-              <a:t>فایل خراب</a:t>
-            </a:r>
-          </a:p>
-        </p:txBody>
-      </p:sp>
-      <p:sp>
-        <p:nvSpPr>
-          <p:cNvPr id="12" name="Rounded Rectangle 11"/>
-          <p:cNvSpPr/>
-          <p:nvPr/>
-        </p:nvSpPr>
-        <p:spPr>
-          <a:xfrm>
-            <a:off x="548640" y="3200400"/>
-            <a:ext cx="5394960" cy="2834640"/>
-          </a:xfrm>
-          <a:prstGeom prst="roundRect">
             <a:avLst/>
           </a:prstGeom>
           <a:solidFill>
@@ -30807,7 +31695,479 @@
       </p:sp>
       <p:sp>
         <p:nvSpPr>
+          <p:cNvPr id="4" name="TextBox 3"/>
+          <p:cNvSpPr txBox="1"/>
+          <p:nvPr/>
+        </p:nvSpPr>
+        <p:spPr>
+          <a:xfrm>
+            <a:off x="5029200" y="411480"/>
+            <a:ext cx="6355080" cy="502920"/>
+          </a:xfrm>
+          <a:prstGeom prst="rect">
+            <a:avLst/>
+          </a:prstGeom>
+          <a:noFill/>
+        </p:spPr>
+        <p:txBody>
+          <a:bodyPr wrap="square" anchor="t" lIns="0" rIns="0" tIns="0" bIns="0">
+            <a:spAutoFit/>
+          </a:bodyPr>
+          <a:lstStyle/>
+          <a:p>
+            <a:pPr rtl="1" algn="r">
+              <a:spcBef>
+                <a:spcPts val="0"/>
+              </a:spcBef>
+              <a:spcAft>
+                <a:spcPts val="0"/>
+              </a:spcAft>
+            </a:pPr>
+            <a:r>
+              <a:rPr sz="2400" b="1" i="0">
+                <a:solidFill>
+                  <a:srgbClr val="FBEEF4"/>
+                </a:solidFill>
+                <a:latin typeface="Arial"/>
+                <a:cs typeface="Arial"/>
+              </a:rPr>
+              <a:t>مجموعه داده UCF-Crime</a:t>
+            </a:r>
+          </a:p>
+        </p:txBody>
+      </p:sp>
+      <p:sp>
+        <p:nvSpPr>
+          <p:cNvPr id="5" name="TextBox 4"/>
+          <p:cNvSpPr txBox="1"/>
+          <p:nvPr/>
+        </p:nvSpPr>
+        <p:spPr>
+          <a:xfrm>
+            <a:off x="5029200" y="950976"/>
+            <a:ext cx="6355080" cy="274320"/>
+          </a:xfrm>
+          <a:prstGeom prst="rect">
+            <a:avLst/>
+          </a:prstGeom>
+          <a:noFill/>
+        </p:spPr>
+        <p:txBody>
+          <a:bodyPr wrap="square" anchor="t" lIns="0" rIns="0" tIns="0" bIns="0">
+            <a:spAutoFit/>
+          </a:bodyPr>
+          <a:lstStyle/>
+          <a:p>
+            <a:pPr rtl="1" algn="r">
+              <a:spcBef>
+                <a:spcPts val="0"/>
+              </a:spcBef>
+              <a:spcAft>
+                <a:spcPts val="0"/>
+              </a:spcAft>
+            </a:pPr>
+            <a:r>
+              <a:rPr sz="1150" b="1" i="0">
+                <a:solidFill>
+                  <a:srgbClr val="FF6FA5"/>
+                </a:solidFill>
+                <a:latin typeface="Arial"/>
+                <a:cs typeface="Arial"/>
+              </a:rPr>
+              <a:t>داده</a:t>
+            </a:r>
+          </a:p>
+        </p:txBody>
+      </p:sp>
+      <p:sp>
+        <p:nvSpPr>
+          <p:cNvPr id="6" name="TextBox 5"/>
+          <p:cNvSpPr txBox="1"/>
+          <p:nvPr/>
+        </p:nvSpPr>
+        <p:spPr>
+          <a:xfrm>
+            <a:off x="548640" y="1645920"/>
+            <a:ext cx="2651760" cy="731520"/>
+          </a:xfrm>
+          <a:prstGeom prst="rect">
+            <a:avLst/>
+          </a:prstGeom>
+          <a:noFill/>
+        </p:spPr>
+        <p:txBody>
+          <a:bodyPr wrap="square" anchor="t" lIns="0" rIns="0" tIns="0" bIns="0">
+            <a:spAutoFit/>
+          </a:bodyPr>
+          <a:lstStyle/>
+          <a:p>
+            <a:pPr rtl="0" algn="ctr">
+              <a:spcBef>
+                <a:spcPts val="0"/>
+              </a:spcBef>
+              <a:spcAft>
+                <a:spcPts val="0"/>
+              </a:spcAft>
+            </a:pPr>
+            <a:r>
+              <a:rPr sz="3800" b="1" i="0">
+                <a:solidFill>
+                  <a:srgbClr val="FBEEF4"/>
+                </a:solidFill>
+                <a:latin typeface="Arial"/>
+                <a:cs typeface="Arial"/>
+              </a:rPr>
+              <a:t>1900</a:t>
+            </a:r>
+          </a:p>
+        </p:txBody>
+      </p:sp>
+      <p:sp>
+        <p:nvSpPr>
+          <p:cNvPr id="7" name="TextBox 6"/>
+          <p:cNvSpPr txBox="1"/>
+          <p:nvPr/>
+        </p:nvSpPr>
+        <p:spPr>
+          <a:xfrm>
+            <a:off x="548640" y="2359152"/>
+            <a:ext cx="2651760" cy="457200"/>
+          </a:xfrm>
+          <a:prstGeom prst="rect">
+            <a:avLst/>
+          </a:prstGeom>
+          <a:noFill/>
+        </p:spPr>
+        <p:txBody>
+          <a:bodyPr wrap="square" anchor="t" lIns="0" rIns="0" tIns="0" bIns="0">
+            <a:spAutoFit/>
+          </a:bodyPr>
+          <a:lstStyle/>
+          <a:p>
+            <a:pPr rtl="1" algn="ctr">
+              <a:spcBef>
+                <a:spcPts val="0"/>
+              </a:spcBef>
+              <a:spcAft>
+                <a:spcPts val="0"/>
+              </a:spcAft>
+            </a:pPr>
+            <a:r>
+              <a:rPr sz="1200" b="0" i="0">
+                <a:solidFill>
+                  <a:srgbClr val="B58FA2"/>
+                </a:solidFill>
+                <a:latin typeface="Arial"/>
+                <a:cs typeface="Arial"/>
+              </a:rPr>
+              <a:t>کل ویدیوها</a:t>
+            </a:r>
+          </a:p>
+        </p:txBody>
+      </p:sp>
+      <p:sp>
+        <p:nvSpPr>
+          <p:cNvPr id="8" name="TextBox 7"/>
+          <p:cNvSpPr txBox="1"/>
+          <p:nvPr/>
+        </p:nvSpPr>
+        <p:spPr>
+          <a:xfrm>
+            <a:off x="3383280" y="1645920"/>
+            <a:ext cx="2651760" cy="731520"/>
+          </a:xfrm>
+          <a:prstGeom prst="rect">
+            <a:avLst/>
+          </a:prstGeom>
+          <a:noFill/>
+        </p:spPr>
+        <p:txBody>
+          <a:bodyPr wrap="square" anchor="t" lIns="0" rIns="0" tIns="0" bIns="0">
+            <a:spAutoFit/>
+          </a:bodyPr>
+          <a:lstStyle/>
+          <a:p>
+            <a:pPr rtl="0" algn="ctr">
+              <a:spcBef>
+                <a:spcPts val="0"/>
+              </a:spcBef>
+              <a:spcAft>
+                <a:spcPts val="0"/>
+              </a:spcAft>
+            </a:pPr>
+            <a:r>
+              <a:rPr sz="3800" b="1" i="0">
+                <a:solidFill>
+                  <a:srgbClr val="FBEEF4"/>
+                </a:solidFill>
+                <a:latin typeface="Arial"/>
+                <a:cs typeface="Arial"/>
+              </a:rPr>
+              <a:t>14</a:t>
+            </a:r>
+          </a:p>
+        </p:txBody>
+      </p:sp>
+      <p:sp>
+        <p:nvSpPr>
+          <p:cNvPr id="9" name="TextBox 8"/>
+          <p:cNvSpPr txBox="1"/>
+          <p:nvPr/>
+        </p:nvSpPr>
+        <p:spPr>
+          <a:xfrm>
+            <a:off x="3383280" y="2359152"/>
+            <a:ext cx="2651760" cy="457200"/>
+          </a:xfrm>
+          <a:prstGeom prst="rect">
+            <a:avLst/>
+          </a:prstGeom>
+          <a:noFill/>
+        </p:spPr>
+        <p:txBody>
+          <a:bodyPr wrap="square" anchor="t" lIns="0" rIns="0" tIns="0" bIns="0">
+            <a:spAutoFit/>
+          </a:bodyPr>
+          <a:lstStyle/>
+          <a:p>
+            <a:pPr rtl="1" algn="ctr">
+              <a:spcBef>
+                <a:spcPts val="0"/>
+              </a:spcBef>
+              <a:spcAft>
+                <a:spcPts val="0"/>
+              </a:spcAft>
+            </a:pPr>
+            <a:r>
+              <a:rPr sz="1200" b="0" i="0">
+                <a:solidFill>
+                  <a:srgbClr val="B58FA2"/>
+                </a:solidFill>
+                <a:latin typeface="Arial"/>
+                <a:cs typeface="Arial"/>
+              </a:rPr>
+              <a:t>کلاس</a:t>
+            </a:r>
+          </a:p>
+        </p:txBody>
+      </p:sp>
+      <p:sp>
+        <p:nvSpPr>
+          <p:cNvPr id="10" name="TextBox 9"/>
+          <p:cNvSpPr txBox="1"/>
+          <p:nvPr/>
+        </p:nvSpPr>
+        <p:spPr>
+          <a:xfrm>
+            <a:off x="6217920" y="1645920"/>
+            <a:ext cx="2651760" cy="731520"/>
+          </a:xfrm>
+          <a:prstGeom prst="rect">
+            <a:avLst/>
+          </a:prstGeom>
+          <a:noFill/>
+        </p:spPr>
+        <p:txBody>
+          <a:bodyPr wrap="square" anchor="t" lIns="0" rIns="0" tIns="0" bIns="0">
+            <a:spAutoFit/>
+          </a:bodyPr>
+          <a:lstStyle/>
+          <a:p>
+            <a:pPr rtl="0" algn="ctr">
+              <a:spcBef>
+                <a:spcPts val="0"/>
+              </a:spcBef>
+              <a:spcAft>
+                <a:spcPts val="0"/>
+              </a:spcAft>
+            </a:pPr>
+            <a:r>
+              <a:rPr sz="3800" b="1" i="0">
+                <a:solidFill>
+                  <a:srgbClr val="7FD8C0"/>
+                </a:solidFill>
+                <a:latin typeface="Arial"/>
+                <a:cs typeface="Arial"/>
+              </a:rPr>
+              <a:t>1895</a:t>
+            </a:r>
+          </a:p>
+        </p:txBody>
+      </p:sp>
+      <p:sp>
+        <p:nvSpPr>
+          <p:cNvPr id="11" name="TextBox 10"/>
+          <p:cNvSpPr txBox="1"/>
+          <p:nvPr/>
+        </p:nvSpPr>
+        <p:spPr>
+          <a:xfrm>
+            <a:off x="6217920" y="2359152"/>
+            <a:ext cx="2651760" cy="457200"/>
+          </a:xfrm>
+          <a:prstGeom prst="rect">
+            <a:avLst/>
+          </a:prstGeom>
+          <a:noFill/>
+        </p:spPr>
+        <p:txBody>
+          <a:bodyPr wrap="square" anchor="t" lIns="0" rIns="0" tIns="0" bIns="0">
+            <a:spAutoFit/>
+          </a:bodyPr>
+          <a:lstStyle/>
+          <a:p>
+            <a:pPr rtl="1" algn="ctr">
+              <a:spcBef>
+                <a:spcPts val="0"/>
+              </a:spcBef>
+              <a:spcAft>
+                <a:spcPts val="0"/>
+              </a:spcAft>
+            </a:pPr>
+            <a:r>
+              <a:rPr sz="1200" b="0" i="0">
+                <a:solidFill>
+                  <a:srgbClr val="B58FA2"/>
+                </a:solidFill>
+                <a:latin typeface="Arial"/>
+                <a:cs typeface="Arial"/>
+              </a:rPr>
+              <a:t>رمزگشایی موفق</a:t>
+            </a:r>
+          </a:p>
+        </p:txBody>
+      </p:sp>
+      <p:sp>
+        <p:nvSpPr>
+          <p:cNvPr id="12" name="TextBox 11"/>
+          <p:cNvSpPr txBox="1"/>
+          <p:nvPr/>
+        </p:nvSpPr>
+        <p:spPr>
+          <a:xfrm>
+            <a:off x="9052560" y="1645920"/>
+            <a:ext cx="2651760" cy="731520"/>
+          </a:xfrm>
+          <a:prstGeom prst="rect">
+            <a:avLst/>
+          </a:prstGeom>
+          <a:noFill/>
+        </p:spPr>
+        <p:txBody>
+          <a:bodyPr wrap="square" anchor="t" lIns="0" rIns="0" tIns="0" bIns="0">
+            <a:spAutoFit/>
+          </a:bodyPr>
+          <a:lstStyle/>
+          <a:p>
+            <a:pPr rtl="0" algn="ctr">
+              <a:spcBef>
+                <a:spcPts val="0"/>
+              </a:spcBef>
+              <a:spcAft>
+                <a:spcPts val="0"/>
+              </a:spcAft>
+            </a:pPr>
+            <a:r>
+              <a:rPr sz="3800" b="1" i="0">
+                <a:solidFill>
+                  <a:srgbClr val="FF8A80"/>
+                </a:solidFill>
+                <a:latin typeface="Arial"/>
+                <a:cs typeface="Arial"/>
+              </a:rPr>
+              <a:t>5</a:t>
+            </a:r>
+          </a:p>
+        </p:txBody>
+      </p:sp>
+      <p:sp>
+        <p:nvSpPr>
           <p:cNvPr id="13" name="TextBox 12"/>
+          <p:cNvSpPr txBox="1"/>
+          <p:nvPr/>
+        </p:nvSpPr>
+        <p:spPr>
+          <a:xfrm>
+            <a:off x="9052560" y="2359152"/>
+            <a:ext cx="2651760" cy="457200"/>
+          </a:xfrm>
+          <a:prstGeom prst="rect">
+            <a:avLst/>
+          </a:prstGeom>
+          <a:noFill/>
+        </p:spPr>
+        <p:txBody>
+          <a:bodyPr wrap="square" anchor="t" lIns="0" rIns="0" tIns="0" bIns="0">
+            <a:spAutoFit/>
+          </a:bodyPr>
+          <a:lstStyle/>
+          <a:p>
+            <a:pPr rtl="1" algn="ctr">
+              <a:spcBef>
+                <a:spcPts val="0"/>
+              </a:spcBef>
+              <a:spcAft>
+                <a:spcPts val="0"/>
+              </a:spcAft>
+            </a:pPr>
+            <a:r>
+              <a:rPr sz="1200" b="0" i="0">
+                <a:solidFill>
+                  <a:srgbClr val="B58FA2"/>
+                </a:solidFill>
+                <a:latin typeface="Arial"/>
+                <a:cs typeface="Arial"/>
+              </a:rPr>
+              <a:t>فایل خراب</a:t>
+            </a:r>
+          </a:p>
+        </p:txBody>
+      </p:sp>
+      <p:sp>
+        <p:nvSpPr>
+          <p:cNvPr id="14" name="Rectangle 13"/>
+          <p:cNvSpPr/>
+          <p:nvPr/>
+        </p:nvSpPr>
+        <p:spPr>
+          <a:xfrm>
+            <a:off x="548640" y="3200400"/>
+            <a:ext cx="5394960" cy="2834640"/>
+          </a:xfrm>
+          <a:prstGeom prst="rect">
+            <a:avLst/>
+          </a:prstGeom>
+          <a:solidFill>
+            <a:srgbClr val="3D1730"/>
+          </a:solidFill>
+          <a:ln>
+            <a:noFill/>
+          </a:ln>
+          <a:effectLst/>
+        </p:spPr>
+        <p:style>
+          <a:lnRef idx="1">
+            <a:schemeClr val="accent1"/>
+          </a:lnRef>
+          <a:fillRef idx="3">
+            <a:schemeClr val="accent1"/>
+          </a:fillRef>
+          <a:effectRef idx="2">
+            <a:schemeClr val="accent1"/>
+          </a:effectRef>
+          <a:fontRef idx="minor">
+            <a:schemeClr val="lt1"/>
+          </a:fontRef>
+        </p:style>
+        <p:txBody>
+          <a:bodyPr rtlCol="0" anchor="ctr"/>
+          <a:lstStyle/>
+          <a:p/>
+        </p:txBody>
+      </p:sp>
+      <p:sp>
+        <p:nvSpPr>
+          <p:cNvPr id="15" name="TextBox 14"/>
           <p:cNvSpPr txBox="1"/>
           <p:nvPr/>
         </p:nvSpPr>
@@ -30850,7 +32210,7 @@
       </p:sp>
       <p:sp>
         <p:nvSpPr>
-          <p:cNvPr id="14" name="TextBox 13"/>
+          <p:cNvPr id="16" name="TextBox 15"/>
           <p:cNvSpPr txBox="1"/>
           <p:nvPr/>
         </p:nvSpPr>
@@ -30965,7 +32325,7 @@
       </p:sp>
       <p:sp>
         <p:nvSpPr>
-          <p:cNvPr id="15" name="Rounded Rectangle 14"/>
+          <p:cNvPr id="17" name="Rectangle 16"/>
           <p:cNvSpPr/>
           <p:nvPr/>
         </p:nvSpPr>
@@ -30974,7 +32334,7 @@
             <a:off x="6217920" y="3200400"/>
             <a:ext cx="5394960" cy="2834640"/>
           </a:xfrm>
-          <a:prstGeom prst="roundRect">
+          <a:prstGeom prst="rect">
             <a:avLst/>
           </a:prstGeom>
           <a:solidFill>
@@ -31007,7 +32367,7 @@
       </p:sp>
       <p:sp>
         <p:nvSpPr>
-          <p:cNvPr id="16" name="TextBox 15"/>
+          <p:cNvPr id="18" name="TextBox 17"/>
           <p:cNvSpPr txBox="1"/>
           <p:nvPr/>
         </p:nvSpPr>
@@ -31050,7 +32410,7 @@
       </p:sp>
       <p:sp>
         <p:nvSpPr>
-          <p:cNvPr id="17" name="TextBox 16"/>
+          <p:cNvPr id="19" name="TextBox 18"/>
           <p:cNvSpPr txBox="1"/>
           <p:nvPr/>
         </p:nvSpPr>
@@ -31197,8 +32557,8 @@
         </p:nvSpPr>
         <p:spPr>
           <a:xfrm>
-            <a:off x="548640" y="411480"/>
-            <a:ext cx="11064240" cy="731520"/>
+            <a:off x="502920" y="182880"/>
+            <a:ext cx="2011680" cy="1188720"/>
           </a:xfrm>
           <a:prstGeom prst="rect">
             <a:avLst/>
@@ -31211,7 +32571,7 @@
           </a:bodyPr>
           <a:lstStyle/>
           <a:p>
-            <a:pPr rtl="1" algn="r">
+            <a:pPr rtl="0" algn="l">
               <a:spcBef>
                 <a:spcPts val="0"/>
               </a:spcBef>
@@ -31220,7 +32580,92 @@
               </a:spcAft>
             </a:pPr>
             <a:r>
-              <a:rPr sz="2900" b="1" i="0">
+              <a:rPr sz="5800" b="1" i="0">
+                <a:solidFill>
+                  <a:srgbClr val="3B1729"/>
+                </a:solidFill>
+                <a:latin typeface="Arial"/>
+                <a:cs typeface="Arial"/>
+              </a:rPr>
+              <a:t>03</a:t>
+            </a:r>
+          </a:p>
+        </p:txBody>
+      </p:sp>
+      <p:sp>
+        <p:nvSpPr>
+          <p:cNvPr id="3" name="Rectangle 2"/>
+          <p:cNvSpPr/>
+          <p:nvPr/>
+        </p:nvSpPr>
+        <p:spPr>
+          <a:xfrm>
+            <a:off x="4754880" y="292608"/>
+            <a:ext cx="6903720" cy="1042415"/>
+          </a:xfrm>
+          <a:prstGeom prst="rect">
+            <a:avLst/>
+          </a:prstGeom>
+          <a:solidFill>
+            <a:srgbClr val="3D1730"/>
+          </a:solidFill>
+          <a:ln>
+            <a:noFill/>
+          </a:ln>
+          <a:effectLst/>
+        </p:spPr>
+        <p:style>
+          <a:lnRef idx="1">
+            <a:schemeClr val="accent1"/>
+          </a:lnRef>
+          <a:fillRef idx="3">
+            <a:schemeClr val="accent1"/>
+          </a:fillRef>
+          <a:effectRef idx="2">
+            <a:schemeClr val="accent1"/>
+          </a:effectRef>
+          <a:fontRef idx="minor">
+            <a:schemeClr val="lt1"/>
+          </a:fontRef>
+        </p:style>
+        <p:txBody>
+          <a:bodyPr rtlCol="0" anchor="ctr"/>
+          <a:lstStyle/>
+          <a:p/>
+        </p:txBody>
+      </p:sp>
+      <p:sp>
+        <p:nvSpPr>
+          <p:cNvPr id="4" name="TextBox 3"/>
+          <p:cNvSpPr txBox="1"/>
+          <p:nvPr/>
+        </p:nvSpPr>
+        <p:spPr>
+          <a:xfrm>
+            <a:off x="5029200" y="411480"/>
+            <a:ext cx="6355080" cy="502920"/>
+          </a:xfrm>
+          <a:prstGeom prst="rect">
+            <a:avLst/>
+          </a:prstGeom>
+          <a:noFill/>
+        </p:spPr>
+        <p:txBody>
+          <a:bodyPr wrap="square" anchor="t" lIns="0" rIns="0" tIns="0" bIns="0">
+            <a:spAutoFit/>
+          </a:bodyPr>
+          <a:lstStyle/>
+          <a:p>
+            <a:pPr rtl="1" algn="r">
+              <a:spcBef>
+                <a:spcPts val="0"/>
+              </a:spcBef>
+              <a:spcAft>
+                <a:spcPts val="0"/>
+              </a:spcAft>
+            </a:pPr>
+            <a:r>
+              <a:rPr sz="2400" b="1" i="0">
                 <a:solidFill>
                   <a:srgbClr val="FBEEF4"/>
                 </a:solidFill>
@@ -31234,14 +32679,14 @@
       </p:sp>
       <p:sp>
         <p:nvSpPr>
-          <p:cNvPr id="3" name="TextBox 2"/>
+          <p:cNvPr id="5" name="TextBox 4"/>
           <p:cNvSpPr txBox="1"/>
           <p:nvPr/>
         </p:nvSpPr>
         <p:spPr>
           <a:xfrm>
-            <a:off x="548640" y="1133856"/>
-            <a:ext cx="11064240" cy="292608"/>
+            <a:off x="5029200" y="950976"/>
+            <a:ext cx="6355080" cy="274320"/>
           </a:xfrm>
           <a:prstGeom prst="rect">
             <a:avLst/>
@@ -31263,7 +32708,7 @@
               </a:spcAft>
             </a:pPr>
             <a:r>
-              <a:rPr sz="1250" b="1" i="0">
+              <a:rPr sz="1150" b="1" i="0">
                 <a:solidFill>
                   <a:srgbClr val="FF6FA5"/>
                 </a:solidFill>
@@ -31277,7 +32722,7 @@
       </p:sp>
       <p:graphicFrame>
         <p:nvGraphicFramePr>
-          <p:cNvPr id="4" name="Table 3"/>
+          <p:cNvPr id="6" name="Table 5"/>
           <p:cNvGraphicFramePr>
             <a:graphicFrameLocks noGrp="1"/>
           </p:cNvGraphicFramePr>
@@ -32071,7 +33516,7 @@
       </p:graphicFrame>
       <p:graphicFrame>
         <p:nvGraphicFramePr>
-          <p:cNvPr id="5" name="Table 4"/>
+          <p:cNvPr id="7" name="Table 6"/>
           <p:cNvGraphicFramePr>
             <a:graphicFrameLocks noGrp="1"/>
           </p:cNvGraphicFramePr>
@@ -32865,7 +34310,7 @@
       </p:graphicFrame>
       <p:sp>
         <p:nvSpPr>
-          <p:cNvPr id="6" name="Rounded Rectangle 5"/>
+          <p:cNvPr id="8" name="Rectangle 7"/>
           <p:cNvSpPr/>
           <p:nvPr/>
         </p:nvSpPr>
@@ -32874,7 +34319,7 @@
             <a:off x="548640" y="4709160"/>
             <a:ext cx="11064240" cy="1371600"/>
           </a:xfrm>
-          <a:prstGeom prst="roundRect">
+          <a:prstGeom prst="rect">
             <a:avLst/>
           </a:prstGeom>
           <a:solidFill>
@@ -32907,7 +34352,7 @@
       </p:sp>
       <p:sp>
         <p:nvSpPr>
-          <p:cNvPr id="7" name="TextBox 6"/>
+          <p:cNvPr id="9" name="TextBox 8"/>
           <p:cNvSpPr txBox="1"/>
           <p:nvPr/>
         </p:nvSpPr>
@@ -32950,7 +34395,7 @@
       </p:sp>
       <p:sp>
         <p:nvSpPr>
-          <p:cNvPr id="8" name="TextBox 7"/>
+          <p:cNvPr id="10" name="TextBox 9"/>
           <p:cNvSpPr txBox="1"/>
           <p:nvPr/>
         </p:nvSpPr>
@@ -33028,8 +34473,8 @@
         </p:nvSpPr>
         <p:spPr>
           <a:xfrm>
-            <a:off x="548640" y="411480"/>
-            <a:ext cx="11064240" cy="731520"/>
+            <a:off x="502920" y="182880"/>
+            <a:ext cx="2011680" cy="1188720"/>
           </a:xfrm>
           <a:prstGeom prst="rect">
             <a:avLst/>
@@ -33042,7 +34487,7 @@
           </a:bodyPr>
           <a:lstStyle/>
           <a:p>
-            <a:pPr rtl="1" algn="r">
+            <a:pPr rtl="0" algn="l">
               <a:spcBef>
                 <a:spcPts val="0"/>
               </a:spcBef>
@@ -33051,7 +34496,92 @@
               </a:spcAft>
             </a:pPr>
             <a:r>
-              <a:rPr sz="2900" b="1" i="0">
+              <a:rPr sz="5800" b="1" i="0">
+                <a:solidFill>
+                  <a:srgbClr val="3B1729"/>
+                </a:solidFill>
+                <a:latin typeface="Arial"/>
+                <a:cs typeface="Arial"/>
+              </a:rPr>
+              <a:t>04</a:t>
+            </a:r>
+          </a:p>
+        </p:txBody>
+      </p:sp>
+      <p:sp>
+        <p:nvSpPr>
+          <p:cNvPr id="3" name="Rectangle 2"/>
+          <p:cNvSpPr/>
+          <p:nvPr/>
+        </p:nvSpPr>
+        <p:spPr>
+          <a:xfrm>
+            <a:off x="4754880" y="292608"/>
+            <a:ext cx="6903720" cy="1042415"/>
+          </a:xfrm>
+          <a:prstGeom prst="rect">
+            <a:avLst/>
+          </a:prstGeom>
+          <a:solidFill>
+            <a:srgbClr val="3D1730"/>
+          </a:solidFill>
+          <a:ln>
+            <a:noFill/>
+          </a:ln>
+          <a:effectLst/>
+        </p:spPr>
+        <p:style>
+          <a:lnRef idx="1">
+            <a:schemeClr val="accent1"/>
+          </a:lnRef>
+          <a:fillRef idx="3">
+            <a:schemeClr val="accent1"/>
+          </a:fillRef>
+          <a:effectRef idx="2">
+            <a:schemeClr val="accent1"/>
+          </a:effectRef>
+          <a:fontRef idx="minor">
+            <a:schemeClr val="lt1"/>
+          </a:fontRef>
+        </p:style>
+        <p:txBody>
+          <a:bodyPr rtlCol="0" anchor="ctr"/>
+          <a:lstStyle/>
+          <a:p/>
+        </p:txBody>
+      </p:sp>
+      <p:sp>
+        <p:nvSpPr>
+          <p:cNvPr id="4" name="TextBox 3"/>
+          <p:cNvSpPr txBox="1"/>
+          <p:nvPr/>
+        </p:nvSpPr>
+        <p:spPr>
+          <a:xfrm>
+            <a:off x="5029200" y="411480"/>
+            <a:ext cx="6355080" cy="502920"/>
+          </a:xfrm>
+          <a:prstGeom prst="rect">
+            <a:avLst/>
+          </a:prstGeom>
+          <a:noFill/>
+        </p:spPr>
+        <p:txBody>
+          <a:bodyPr wrap="square" anchor="t" lIns="0" rIns="0" tIns="0" bIns="0">
+            <a:spAutoFit/>
+          </a:bodyPr>
+          <a:lstStyle/>
+          <a:p>
+            <a:pPr rtl="1" algn="r">
+              <a:spcBef>
+                <a:spcPts val="0"/>
+              </a:spcBef>
+              <a:spcAft>
+                <a:spcPts val="0"/>
+              </a:spcAft>
+            </a:pPr>
+            <a:r>
+              <a:rPr sz="2400" b="1" i="0">
                 <a:solidFill>
                   <a:srgbClr val="FBEEF4"/>
                 </a:solidFill>
@@ -33065,14 +34595,14 @@
       </p:sp>
       <p:sp>
         <p:nvSpPr>
-          <p:cNvPr id="3" name="TextBox 2"/>
+          <p:cNvPr id="5" name="TextBox 4"/>
           <p:cNvSpPr txBox="1"/>
           <p:nvPr/>
         </p:nvSpPr>
         <p:spPr>
           <a:xfrm>
-            <a:off x="548640" y="1133856"/>
-            <a:ext cx="11064240" cy="292608"/>
+            <a:off x="5029200" y="950976"/>
+            <a:ext cx="6355080" cy="274320"/>
           </a:xfrm>
           <a:prstGeom prst="rect">
             <a:avLst/>
@@ -33094,7 +34624,7 @@
               </a:spcAft>
             </a:pPr>
             <a:r>
-              <a:rPr sz="1250" b="1" i="0">
+              <a:rPr sz="1150" b="1" i="0">
                 <a:solidFill>
                   <a:srgbClr val="FF6FA5"/>
                 </a:solidFill>
@@ -33108,7 +34638,7 @@
       </p:sp>
       <p:graphicFrame>
         <p:nvGraphicFramePr>
-          <p:cNvPr id="4" name="Table 3"/>
+          <p:cNvPr id="6" name="Table 5"/>
           <p:cNvGraphicFramePr>
             <a:graphicFrameLocks noGrp="1"/>
           </p:cNvGraphicFramePr>
@@ -35280,7 +36810,7 @@
       </p:graphicFrame>
       <p:sp>
         <p:nvSpPr>
-          <p:cNvPr id="5" name="TextBox 4"/>
+          <p:cNvPr id="7" name="TextBox 6"/>
           <p:cNvSpPr txBox="1"/>
           <p:nvPr/>
         </p:nvSpPr>
@@ -35326,7 +36856,7 @@
       </p:sp>
       <p:sp>
         <p:nvSpPr>
-          <p:cNvPr id="6" name="Rounded Rectangle 5"/>
+          <p:cNvPr id="8" name="Rectangle 7"/>
           <p:cNvSpPr/>
           <p:nvPr/>
         </p:nvSpPr>
@@ -35335,7 +36865,7 @@
             <a:off x="7589520" y="1572768"/>
             <a:ext cx="4023360" cy="1783080"/>
           </a:xfrm>
-          <a:prstGeom prst="roundRect">
+          <a:prstGeom prst="rect">
             <a:avLst/>
           </a:prstGeom>
           <a:solidFill>
@@ -35368,7 +36898,7 @@
       </p:sp>
       <p:sp>
         <p:nvSpPr>
-          <p:cNvPr id="7" name="TextBox 6"/>
+          <p:cNvPr id="9" name="TextBox 8"/>
           <p:cNvSpPr txBox="1"/>
           <p:nvPr/>
         </p:nvSpPr>
@@ -35411,7 +36941,7 @@
       </p:sp>
       <p:sp>
         <p:nvSpPr>
-          <p:cNvPr id="8" name="TextBox 7"/>
+          <p:cNvPr id="10" name="TextBox 9"/>
           <p:cNvSpPr txBox="1"/>
           <p:nvPr/>
         </p:nvSpPr>
@@ -35457,7 +36987,7 @@
       </p:sp>
       <p:sp>
         <p:nvSpPr>
-          <p:cNvPr id="9" name="Rounded Rectangle 8"/>
+          <p:cNvPr id="11" name="Rectangle 10"/>
           <p:cNvSpPr/>
           <p:nvPr/>
         </p:nvSpPr>
@@ -35466,7 +36996,7 @@
             <a:off x="7589520" y="3520440"/>
             <a:ext cx="4023360" cy="1691640"/>
           </a:xfrm>
-          <a:prstGeom prst="roundRect">
+          <a:prstGeom prst="rect">
             <a:avLst/>
           </a:prstGeom>
           <a:solidFill>
@@ -35499,7 +37029,7 @@
       </p:sp>
       <p:sp>
         <p:nvSpPr>
-          <p:cNvPr id="10" name="TextBox 9"/>
+          <p:cNvPr id="12" name="TextBox 11"/>
           <p:cNvSpPr txBox="1"/>
           <p:nvPr/>
         </p:nvSpPr>
@@ -35542,7 +37072,7 @@
       </p:sp>
       <p:sp>
         <p:nvSpPr>
-          <p:cNvPr id="11" name="TextBox 10"/>
+          <p:cNvPr id="13" name="TextBox 12"/>
           <p:cNvSpPr txBox="1"/>
           <p:nvPr/>
         </p:nvSpPr>
@@ -35588,7 +37118,7 @@
       </p:sp>
       <p:sp>
         <p:nvSpPr>
-          <p:cNvPr id="12" name="Rounded Rectangle 11"/>
+          <p:cNvPr id="14" name="Rectangle 13"/>
           <p:cNvSpPr/>
           <p:nvPr/>
         </p:nvSpPr>
@@ -35597,7 +37127,7 @@
             <a:off x="7589520" y="5394960"/>
             <a:ext cx="4023360" cy="960120"/>
           </a:xfrm>
-          <a:prstGeom prst="roundRect">
+          <a:prstGeom prst="rect">
             <a:avLst/>
           </a:prstGeom>
           <a:solidFill>
@@ -35630,7 +37160,7 @@
       </p:sp>
       <p:sp>
         <p:nvSpPr>
-          <p:cNvPr id="13" name="TextBox 12"/>
+          <p:cNvPr id="15" name="TextBox 14"/>
           <p:cNvSpPr txBox="1"/>
           <p:nvPr/>
         </p:nvSpPr>
@@ -35676,7 +37206,7 @@
       </p:sp>
       <p:sp>
         <p:nvSpPr>
-          <p:cNvPr id="14" name="TextBox 13"/>
+          <p:cNvPr id="16" name="TextBox 15"/>
           <p:cNvSpPr txBox="1"/>
           <p:nvPr/>
         </p:nvSpPr>
@@ -35719,7 +37249,7 @@
       </p:sp>
       <p:sp>
         <p:nvSpPr>
-          <p:cNvPr id="15" name="TextBox 14"/>
+          <p:cNvPr id="17" name="TextBox 16"/>
           <p:cNvSpPr txBox="1"/>
           <p:nvPr/>
         </p:nvSpPr>
@@ -35762,7 +37292,7 @@
       </p:sp>
       <p:sp>
         <p:nvSpPr>
-          <p:cNvPr id="16" name="TextBox 15"/>
+          <p:cNvPr id="18" name="TextBox 17"/>
           <p:cNvSpPr txBox="1"/>
           <p:nvPr/>
         </p:nvSpPr>
@@ -35805,7 +37335,7 @@
       </p:sp>
       <p:sp>
         <p:nvSpPr>
-          <p:cNvPr id="17" name="TextBox 16"/>
+          <p:cNvPr id="19" name="TextBox 18"/>
           <p:cNvSpPr txBox="1"/>
           <p:nvPr/>
         </p:nvSpPr>
@@ -35848,7 +37378,7 @@
       </p:sp>
       <p:sp>
         <p:nvSpPr>
-          <p:cNvPr id="18" name="TextBox 17"/>
+          <p:cNvPr id="20" name="TextBox 19"/>
           <p:cNvSpPr txBox="1"/>
           <p:nvPr/>
         </p:nvSpPr>
@@ -35891,7 +37421,7 @@
       </p:sp>
       <p:sp>
         <p:nvSpPr>
-          <p:cNvPr id="19" name="TextBox 18"/>
+          <p:cNvPr id="21" name="TextBox 20"/>
           <p:cNvSpPr txBox="1"/>
           <p:nvPr/>
         </p:nvSpPr>
@@ -35966,8 +37496,8 @@
         </p:nvSpPr>
         <p:spPr>
           <a:xfrm>
-            <a:off x="548640" y="411480"/>
-            <a:ext cx="11064240" cy="731520"/>
+            <a:off x="502920" y="182880"/>
+            <a:ext cx="2011680" cy="1188720"/>
           </a:xfrm>
           <a:prstGeom prst="rect">
             <a:avLst/>
@@ -35980,7 +37510,7 @@
           </a:bodyPr>
           <a:lstStyle/>
           <a:p>
-            <a:pPr rtl="1" algn="r">
+            <a:pPr rtl="0" algn="l">
               <a:spcBef>
                 <a:spcPts val="0"/>
               </a:spcBef>
@@ -35989,7 +37519,92 @@
               </a:spcAft>
             </a:pPr>
             <a:r>
-              <a:rPr sz="2900" b="1" i="0">
+              <a:rPr sz="5800" b="1" i="0">
+                <a:solidFill>
+                  <a:srgbClr val="3B1729"/>
+                </a:solidFill>
+                <a:latin typeface="Arial"/>
+                <a:cs typeface="Arial"/>
+              </a:rPr>
+              <a:t>05</a:t>
+            </a:r>
+          </a:p>
+        </p:txBody>
+      </p:sp>
+      <p:sp>
+        <p:nvSpPr>
+          <p:cNvPr id="3" name="Rectangle 2"/>
+          <p:cNvSpPr/>
+          <p:nvPr/>
+        </p:nvSpPr>
+        <p:spPr>
+          <a:xfrm>
+            <a:off x="4754880" y="292608"/>
+            <a:ext cx="6903720" cy="1042415"/>
+          </a:xfrm>
+          <a:prstGeom prst="rect">
+            <a:avLst/>
+          </a:prstGeom>
+          <a:solidFill>
+            <a:srgbClr val="3D1730"/>
+          </a:solidFill>
+          <a:ln>
+            <a:noFill/>
+          </a:ln>
+          <a:effectLst/>
+        </p:spPr>
+        <p:style>
+          <a:lnRef idx="1">
+            <a:schemeClr val="accent1"/>
+          </a:lnRef>
+          <a:fillRef idx="3">
+            <a:schemeClr val="accent1"/>
+          </a:fillRef>
+          <a:effectRef idx="2">
+            <a:schemeClr val="accent1"/>
+          </a:effectRef>
+          <a:fontRef idx="minor">
+            <a:schemeClr val="lt1"/>
+          </a:fontRef>
+        </p:style>
+        <p:txBody>
+          <a:bodyPr rtlCol="0" anchor="ctr"/>
+          <a:lstStyle/>
+          <a:p/>
+        </p:txBody>
+      </p:sp>
+      <p:sp>
+        <p:nvSpPr>
+          <p:cNvPr id="4" name="TextBox 3"/>
+          <p:cNvSpPr txBox="1"/>
+          <p:nvPr/>
+        </p:nvSpPr>
+        <p:spPr>
+          <a:xfrm>
+            <a:off x="5029200" y="411480"/>
+            <a:ext cx="6355080" cy="502920"/>
+          </a:xfrm>
+          <a:prstGeom prst="rect">
+            <a:avLst/>
+          </a:prstGeom>
+          <a:noFill/>
+        </p:spPr>
+        <p:txBody>
+          <a:bodyPr wrap="square" anchor="t" lIns="0" rIns="0" tIns="0" bIns="0">
+            <a:spAutoFit/>
+          </a:bodyPr>
+          <a:lstStyle/>
+          <a:p>
+            <a:pPr rtl="1" algn="r">
+              <a:spcBef>
+                <a:spcPts val="0"/>
+              </a:spcBef>
+              <a:spcAft>
+                <a:spcPts val="0"/>
+              </a:spcAft>
+            </a:pPr>
+            <a:r>
+              <a:rPr sz="2400" b="1" i="0">
                 <a:solidFill>
                   <a:srgbClr val="FBEEF4"/>
                 </a:solidFill>
@@ -36003,14 +37618,14 @@
       </p:sp>
       <p:sp>
         <p:nvSpPr>
-          <p:cNvPr id="3" name="TextBox 2"/>
+          <p:cNvPr id="5" name="TextBox 4"/>
           <p:cNvSpPr txBox="1"/>
           <p:nvPr/>
         </p:nvSpPr>
         <p:spPr>
           <a:xfrm>
-            <a:off x="548640" y="1133856"/>
-            <a:ext cx="11064240" cy="292608"/>
+            <a:off x="5029200" y="950976"/>
+            <a:ext cx="6355080" cy="274320"/>
           </a:xfrm>
           <a:prstGeom prst="rect">
             <a:avLst/>
@@ -36032,7 +37647,7 @@
               </a:spcAft>
             </a:pPr>
             <a:r>
-              <a:rPr sz="1250" b="1" i="0">
+              <a:rPr sz="1150" b="1" i="0">
                 <a:solidFill>
                   <a:srgbClr val="FF6FA5"/>
                 </a:solidFill>
@@ -36046,7 +37661,7 @@
       </p:sp>
       <p:graphicFrame>
         <p:nvGraphicFramePr>
-          <p:cNvPr id="4" name="Table 3"/>
+          <p:cNvPr id="6" name="Table 5"/>
           <p:cNvGraphicFramePr>
             <a:graphicFrameLocks noGrp="1"/>
           </p:cNvGraphicFramePr>
@@ -36645,7 +38260,7 @@
       </p:graphicFrame>
       <p:sp>
         <p:nvSpPr>
-          <p:cNvPr id="5" name="Rounded Rectangle 4"/>
+          <p:cNvPr id="7" name="Rectangle 6"/>
           <p:cNvSpPr/>
           <p:nvPr/>
         </p:nvSpPr>
@@ -36654,7 +38269,7 @@
             <a:off x="6492240" y="1645920"/>
             <a:ext cx="5120640" cy="1828800"/>
           </a:xfrm>
-          <a:prstGeom prst="roundRect">
+          <a:prstGeom prst="rect">
             <a:avLst/>
           </a:prstGeom>
           <a:solidFill>
@@ -36687,7 +38302,7 @@
       </p:sp>
       <p:sp>
         <p:nvSpPr>
-          <p:cNvPr id="6" name="TextBox 5"/>
+          <p:cNvPr id="8" name="TextBox 7"/>
           <p:cNvSpPr txBox="1"/>
           <p:nvPr/>
         </p:nvSpPr>
@@ -36730,7 +38345,7 @@
       </p:sp>
       <p:sp>
         <p:nvSpPr>
-          <p:cNvPr id="7" name="TextBox 6"/>
+          <p:cNvPr id="9" name="TextBox 8"/>
           <p:cNvSpPr txBox="1"/>
           <p:nvPr/>
         </p:nvSpPr>
@@ -36776,7 +38391,7 @@
       </p:sp>
       <p:sp>
         <p:nvSpPr>
-          <p:cNvPr id="8" name="TextBox 7"/>
+          <p:cNvPr id="10" name="TextBox 9"/>
           <p:cNvSpPr txBox="1"/>
           <p:nvPr/>
         </p:nvSpPr>
@@ -36819,7 +38434,7 @@
       </p:sp>
       <p:sp>
         <p:nvSpPr>
-          <p:cNvPr id="9" name="Rounded Rectangle 8"/>
+          <p:cNvPr id="11" name="Rectangle 10"/>
           <p:cNvSpPr/>
           <p:nvPr/>
         </p:nvSpPr>
@@ -36828,7 +38443,7 @@
             <a:off x="9052560" y="4343400"/>
             <a:ext cx="2606040" cy="1508760"/>
           </a:xfrm>
-          <a:prstGeom prst="roundRect">
+          <a:prstGeom prst="rect">
             <a:avLst/>
           </a:prstGeom>
           <a:solidFill>
@@ -36861,7 +38476,7 @@
       </p:sp>
       <p:sp>
         <p:nvSpPr>
-          <p:cNvPr id="10" name="TextBox 9"/>
+          <p:cNvPr id="12" name="TextBox 11"/>
           <p:cNvSpPr txBox="1"/>
           <p:nvPr/>
         </p:nvSpPr>
@@ -36904,7 +38519,7 @@
       </p:sp>
       <p:sp>
         <p:nvSpPr>
-          <p:cNvPr id="11" name="TextBox 10"/>
+          <p:cNvPr id="13" name="TextBox 12"/>
           <p:cNvSpPr txBox="1"/>
           <p:nvPr/>
         </p:nvSpPr>
@@ -36950,7 +38565,7 @@
       </p:sp>
       <p:sp>
         <p:nvSpPr>
-          <p:cNvPr id="12" name="Rounded Rectangle 11"/>
+          <p:cNvPr id="14" name="Rectangle 13"/>
           <p:cNvSpPr/>
           <p:nvPr/>
         </p:nvSpPr>
@@ -36959,7 +38574,7 @@
             <a:off x="6217920" y="4343400"/>
             <a:ext cx="2606040" cy="1508760"/>
           </a:xfrm>
-          <a:prstGeom prst="roundRect">
+          <a:prstGeom prst="rect">
             <a:avLst/>
           </a:prstGeom>
           <a:solidFill>
@@ -36992,7 +38607,7 @@
       </p:sp>
       <p:sp>
         <p:nvSpPr>
-          <p:cNvPr id="13" name="TextBox 12"/>
+          <p:cNvPr id="15" name="TextBox 14"/>
           <p:cNvSpPr txBox="1"/>
           <p:nvPr/>
         </p:nvSpPr>
@@ -37035,7 +38650,7 @@
       </p:sp>
       <p:sp>
         <p:nvSpPr>
-          <p:cNvPr id="14" name="TextBox 13"/>
+          <p:cNvPr id="16" name="TextBox 15"/>
           <p:cNvSpPr txBox="1"/>
           <p:nvPr/>
         </p:nvSpPr>
@@ -37081,7 +38696,7 @@
       </p:sp>
       <p:sp>
         <p:nvSpPr>
-          <p:cNvPr id="15" name="Rounded Rectangle 14"/>
+          <p:cNvPr id="17" name="Rectangle 16"/>
           <p:cNvSpPr/>
           <p:nvPr/>
         </p:nvSpPr>
@@ -37090,7 +38705,7 @@
             <a:off x="3383280" y="4343400"/>
             <a:ext cx="2606040" cy="1508760"/>
           </a:xfrm>
-          <a:prstGeom prst="roundRect">
+          <a:prstGeom prst="rect">
             <a:avLst/>
           </a:prstGeom>
           <a:solidFill>
@@ -37123,7 +38738,7 @@
       </p:sp>
       <p:sp>
         <p:nvSpPr>
-          <p:cNvPr id="16" name="TextBox 15"/>
+          <p:cNvPr id="18" name="TextBox 17"/>
           <p:cNvSpPr txBox="1"/>
           <p:nvPr/>
         </p:nvSpPr>
@@ -37166,7 +38781,7 @@
       </p:sp>
       <p:sp>
         <p:nvSpPr>
-          <p:cNvPr id="17" name="TextBox 16"/>
+          <p:cNvPr id="19" name="TextBox 18"/>
           <p:cNvSpPr txBox="1"/>
           <p:nvPr/>
         </p:nvSpPr>
@@ -37212,7 +38827,7 @@
       </p:sp>
       <p:sp>
         <p:nvSpPr>
-          <p:cNvPr id="18" name="Rounded Rectangle 17"/>
+          <p:cNvPr id="20" name="Rectangle 19"/>
           <p:cNvSpPr/>
           <p:nvPr/>
         </p:nvSpPr>
@@ -37221,7 +38836,7 @@
             <a:off x="548639" y="4343400"/>
             <a:ext cx="2606040" cy="1508760"/>
           </a:xfrm>
-          <a:prstGeom prst="roundRect">
+          <a:prstGeom prst="rect">
             <a:avLst/>
           </a:prstGeom>
           <a:solidFill>
@@ -37254,7 +38869,7 @@
       </p:sp>
       <p:sp>
         <p:nvSpPr>
-          <p:cNvPr id="19" name="TextBox 18"/>
+          <p:cNvPr id="21" name="TextBox 20"/>
           <p:cNvSpPr txBox="1"/>
           <p:nvPr/>
         </p:nvSpPr>
@@ -37297,7 +38912,7 @@
       </p:sp>
       <p:sp>
         <p:nvSpPr>
-          <p:cNvPr id="20" name="TextBox 19"/>
+          <p:cNvPr id="22" name="TextBox 21"/>
           <p:cNvSpPr txBox="1"/>
           <p:nvPr/>
         </p:nvSpPr>
@@ -37615,8 +39230,8 @@
         </p:nvSpPr>
         <p:spPr>
           <a:xfrm>
-            <a:off x="548640" y="411480"/>
-            <a:ext cx="11064240" cy="731520"/>
+            <a:off x="502920" y="182880"/>
+            <a:ext cx="2011680" cy="1188720"/>
           </a:xfrm>
           <a:prstGeom prst="rect">
             <a:avLst/>
@@ -37629,7 +39244,7 @@
           </a:bodyPr>
           <a:lstStyle/>
           <a:p>
-            <a:pPr rtl="1" algn="r">
+            <a:pPr rtl="0" algn="l">
               <a:spcBef>
                 <a:spcPts val="0"/>
               </a:spcBef>
@@ -37638,73 +39253,30 @@
               </a:spcAft>
             </a:pPr>
             <a:r>
-              <a:rPr sz="2900" b="1" i="0">
+              <a:rPr sz="5800" b="1" i="0">
                 <a:solidFill>
-                  <a:srgbClr val="FBEEF4"/>
+                  <a:srgbClr val="3B1729"/>
                 </a:solidFill>
                 <a:latin typeface="Arial"/>
                 <a:cs typeface="Arial"/>
               </a:rPr>
-              <a:t>X-CLIP چطور کار می‌کند</a:t>
+              <a:t>06</a:t>
             </a:r>
           </a:p>
         </p:txBody>
       </p:sp>
       <p:sp>
         <p:nvSpPr>
-          <p:cNvPr id="3" name="TextBox 2"/>
-          <p:cNvSpPr txBox="1"/>
+          <p:cNvPr id="3" name="Rectangle 2"/>
+          <p:cNvSpPr/>
           <p:nvPr/>
         </p:nvSpPr>
         <p:spPr>
           <a:xfrm>
-            <a:off x="548640" y="1133856"/>
-            <a:ext cx="11064240" cy="292608"/>
+            <a:off x="4754880" y="292608"/>
+            <a:ext cx="6903720" cy="1042415"/>
           </a:xfrm>
           <a:prstGeom prst="rect">
-            <a:avLst/>
-          </a:prstGeom>
-          <a:noFill/>
-        </p:spPr>
-        <p:txBody>
-          <a:bodyPr wrap="square" anchor="t" lIns="0" rIns="0" tIns="0" bIns="0">
-            <a:spAutoFit/>
-          </a:bodyPr>
-          <a:lstStyle/>
-          <a:p>
-            <a:pPr rtl="1" algn="r">
-              <a:spcBef>
-                <a:spcPts val="0"/>
-              </a:spcBef>
-              <a:spcAft>
-                <a:spcPts val="0"/>
-              </a:spcAft>
-            </a:pPr>
-            <a:r>
-              <a:rPr sz="1250" b="1" i="0">
-                <a:solidFill>
-                  <a:srgbClr val="FF6FA5"/>
-                </a:solidFill>
-                <a:latin typeface="Arial"/>
-                <a:cs typeface="Arial"/>
-              </a:rPr>
-              <a:t>مسیر اول</a:t>
-            </a:r>
-          </a:p>
-        </p:txBody>
-      </p:sp>
-      <p:sp>
-        <p:nvSpPr>
-          <p:cNvPr id="4" name="Rounded Rectangle 3"/>
-          <p:cNvSpPr/>
-          <p:nvPr/>
-        </p:nvSpPr>
-        <p:spPr>
-          <a:xfrm>
-            <a:off x="548640" y="1600200"/>
-            <a:ext cx="11064240" cy="960120"/>
-          </a:xfrm>
-          <a:prstGeom prst="roundRect">
             <a:avLst/>
           </a:prstGeom>
           <a:solidFill>
@@ -37737,14 +39309,14 @@
       </p:sp>
       <p:sp>
         <p:nvSpPr>
-          <p:cNvPr id="5" name="TextBox 4"/>
+          <p:cNvPr id="4" name="TextBox 3"/>
           <p:cNvSpPr txBox="1"/>
           <p:nvPr/>
         </p:nvSpPr>
         <p:spPr>
           <a:xfrm>
-            <a:off x="10698480" y="1755648"/>
-            <a:ext cx="822960" cy="566928"/>
+            <a:off x="5029200" y="411480"/>
+            <a:ext cx="6355080" cy="502920"/>
           </a:xfrm>
           <a:prstGeom prst="rect">
             <a:avLst/>
@@ -37757,7 +39329,7 @@
           </a:bodyPr>
           <a:lstStyle/>
           <a:p>
-            <a:pPr rtl="0" algn="ctr">
+            <a:pPr rtl="1" algn="r">
               <a:spcBef>
                 <a:spcPts val="0"/>
               </a:spcBef>
@@ -37766,28 +39338,28 @@
               </a:spcAft>
             </a:pPr>
             <a:r>
-              <a:rPr sz="2700" b="1" i="0">
+              <a:rPr sz="2400" b="1" i="0">
                 <a:solidFill>
-                  <a:srgbClr val="F6CFDE"/>
+                  <a:srgbClr val="FBEEF4"/>
                 </a:solidFill>
                 <a:latin typeface="Arial"/>
                 <a:cs typeface="Arial"/>
               </a:rPr>
-              <a:t>1</a:t>
+              <a:t>X-CLIP چطور کار می‌کند</a:t>
             </a:r>
           </a:p>
         </p:txBody>
       </p:sp>
       <p:sp>
         <p:nvSpPr>
-          <p:cNvPr id="6" name="TextBox 5"/>
+          <p:cNvPr id="5" name="TextBox 4"/>
           <p:cNvSpPr txBox="1"/>
           <p:nvPr/>
         </p:nvSpPr>
         <p:spPr>
           <a:xfrm>
-            <a:off x="914400" y="1728216"/>
-            <a:ext cx="9692640" cy="320040"/>
+            <a:off x="5029200" y="950976"/>
+            <a:ext cx="6355080" cy="274320"/>
           </a:xfrm>
           <a:prstGeom prst="rect">
             <a:avLst/>
@@ -37809,73 +39381,30 @@
               </a:spcAft>
             </a:pPr>
             <a:r>
-              <a:rPr sz="1550" b="1" i="0">
+              <a:rPr sz="1150" b="1" i="0">
                 <a:solidFill>
-                  <a:srgbClr val="FBEEF4"/>
+                  <a:srgbClr val="FF6FA5"/>
                 </a:solidFill>
                 <a:latin typeface="Arial"/>
                 <a:cs typeface="Arial"/>
               </a:rPr>
-              <a:t>CLIP روی جفت عکس و متن آموزش دیده</a:t>
+              <a:t>مسیر اول</a:t>
             </a:r>
           </a:p>
         </p:txBody>
       </p:sp>
       <p:sp>
         <p:nvSpPr>
-          <p:cNvPr id="7" name="TextBox 6"/>
-          <p:cNvSpPr txBox="1"/>
+          <p:cNvPr id="6" name="Rectangle 5"/>
+          <p:cNvSpPr/>
           <p:nvPr/>
         </p:nvSpPr>
         <p:spPr>
           <a:xfrm>
-            <a:off x="914400" y="2075688"/>
-            <a:ext cx="9692640" cy="320040"/>
+            <a:off x="548640" y="1600200"/>
+            <a:ext cx="11064240" cy="960120"/>
           </a:xfrm>
           <a:prstGeom prst="rect">
-            <a:avLst/>
-          </a:prstGeom>
-          <a:noFill/>
-        </p:spPr>
-        <p:txBody>
-          <a:bodyPr wrap="square" anchor="t" lIns="0" rIns="0" tIns="0" bIns="0">
-            <a:spAutoFit/>
-          </a:bodyPr>
-          <a:lstStyle/>
-          <a:p>
-            <a:pPr rtl="1" algn="r">
-              <a:spcBef>
-                <a:spcPts val="0"/>
-              </a:spcBef>
-              <a:spcAft>
-                <a:spcPts val="0"/>
-              </a:spcAft>
-            </a:pPr>
-            <a:r>
-              <a:rPr sz="1250" b="0" i="0">
-                <a:solidFill>
-                  <a:srgbClr val="B58FA2"/>
-                </a:solidFill>
-                <a:latin typeface="Arial"/>
-                <a:cs typeface="Arial"/>
-              </a:rPr>
-              <a:t>عکس و توضیحش در یک فضای مشترک نزدیک هم می‌افتند</a:t>
-            </a:r>
-          </a:p>
-        </p:txBody>
-      </p:sp>
-      <p:sp>
-        <p:nvSpPr>
-          <p:cNvPr id="8" name="Rounded Rectangle 7"/>
-          <p:cNvSpPr/>
-          <p:nvPr/>
-        </p:nvSpPr>
-        <p:spPr>
-          <a:xfrm>
-            <a:off x="548640" y="2715768"/>
-            <a:ext cx="11064240" cy="960120"/>
-          </a:xfrm>
-          <a:prstGeom prst="roundRect">
             <a:avLst/>
           </a:prstGeom>
           <a:solidFill>
@@ -37908,13 +39437,13 @@
       </p:sp>
       <p:sp>
         <p:nvSpPr>
-          <p:cNvPr id="9" name="TextBox 8"/>
+          <p:cNvPr id="7" name="TextBox 6"/>
           <p:cNvSpPr txBox="1"/>
           <p:nvPr/>
         </p:nvSpPr>
         <p:spPr>
           <a:xfrm>
-            <a:off x="10698480" y="2871215"/>
+            <a:off x="10698480" y="1755648"/>
             <a:ext cx="822960" cy="566928"/>
           </a:xfrm>
           <a:prstGeom prst="rect">
@@ -37944,20 +39473,20 @@
                 <a:latin typeface="Arial"/>
                 <a:cs typeface="Arial"/>
               </a:rPr>
-              <a:t>2</a:t>
+              <a:t>1</a:t>
             </a:r>
           </a:p>
         </p:txBody>
       </p:sp>
       <p:sp>
         <p:nvSpPr>
-          <p:cNvPr id="10" name="TextBox 9"/>
+          <p:cNvPr id="8" name="TextBox 7"/>
           <p:cNvSpPr txBox="1"/>
           <p:nvPr/>
         </p:nvSpPr>
         <p:spPr>
           <a:xfrm>
-            <a:off x="914400" y="2843784"/>
+            <a:off x="914400" y="1728216"/>
             <a:ext cx="9692640" cy="320040"/>
           </a:xfrm>
           <a:prstGeom prst="rect">
@@ -37987,20 +39516,20 @@
                 <a:latin typeface="Arial"/>
                 <a:cs typeface="Arial"/>
               </a:rPr>
-              <a:t>طبقه‌بندی بدون آموزش</a:t>
+              <a:t>CLIP روی جفت عکس و متن آموزش دیده</a:t>
             </a:r>
           </a:p>
         </p:txBody>
       </p:sp>
       <p:sp>
         <p:nvSpPr>
-          <p:cNvPr id="11" name="TextBox 10"/>
+          <p:cNvPr id="9" name="TextBox 8"/>
           <p:cNvSpPr txBox="1"/>
           <p:nvPr/>
         </p:nvSpPr>
         <p:spPr>
           <a:xfrm>
-            <a:off x="914400" y="3191256"/>
+            <a:off x="914400" y="2075688"/>
             <a:ext cx="9692640" cy="320040"/>
           </a:xfrm>
           <a:prstGeom prst="rect">
@@ -38030,23 +39559,23 @@
                 <a:latin typeface="Arial"/>
                 <a:cs typeface="Arial"/>
               </a:rPr>
-              <a:t>اسم هر کلاس به بردار تبدیل می‌شود و نزدیک‌ترین برنده است</a:t>
+              <a:t>عکس و توضیحش در یک فضای مشترک نزدیک هم می‌افتند</a:t>
             </a:r>
           </a:p>
         </p:txBody>
       </p:sp>
       <p:sp>
         <p:nvSpPr>
-          <p:cNvPr id="12" name="Rounded Rectangle 11"/>
+          <p:cNvPr id="10" name="Rectangle 9"/>
           <p:cNvSpPr/>
           <p:nvPr/>
         </p:nvSpPr>
         <p:spPr>
           <a:xfrm>
-            <a:off x="548640" y="3831335"/>
+            <a:off x="548640" y="2715768"/>
             <a:ext cx="11064240" cy="960120"/>
           </a:xfrm>
-          <a:prstGeom prst="roundRect">
+          <a:prstGeom prst="rect">
             <a:avLst/>
           </a:prstGeom>
           <a:solidFill>
@@ -38079,13 +39608,13 @@
       </p:sp>
       <p:sp>
         <p:nvSpPr>
-          <p:cNvPr id="13" name="TextBox 12"/>
+          <p:cNvPr id="11" name="TextBox 10"/>
           <p:cNvSpPr txBox="1"/>
           <p:nvPr/>
         </p:nvSpPr>
         <p:spPr>
           <a:xfrm>
-            <a:off x="10698480" y="3986783"/>
+            <a:off x="10698480" y="2871215"/>
             <a:ext cx="822960" cy="566928"/>
           </a:xfrm>
           <a:prstGeom prst="rect">
@@ -38115,20 +39644,20 @@
                 <a:latin typeface="Arial"/>
                 <a:cs typeface="Arial"/>
               </a:rPr>
-              <a:t>3</a:t>
+              <a:t>2</a:t>
             </a:r>
           </a:p>
         </p:txBody>
       </p:sp>
       <p:sp>
         <p:nvSpPr>
-          <p:cNvPr id="14" name="TextBox 13"/>
+          <p:cNvPr id="12" name="TextBox 11"/>
           <p:cNvSpPr txBox="1"/>
           <p:nvPr/>
         </p:nvSpPr>
         <p:spPr>
           <a:xfrm>
-            <a:off x="914400" y="3959351"/>
+            <a:off x="914400" y="2843784"/>
             <a:ext cx="9692640" cy="320040"/>
           </a:xfrm>
           <a:prstGeom prst="rect">
@@ -38158,20 +39687,20 @@
                 <a:latin typeface="Arial"/>
                 <a:cs typeface="Arial"/>
               </a:rPr>
-              <a:t>X-CLIP بخش زمانی اضافه می‌کند</a:t>
+              <a:t>طبقه‌بندی بدون آموزش</a:t>
             </a:r>
           </a:p>
         </p:txBody>
       </p:sp>
       <p:sp>
         <p:nvSpPr>
-          <p:cNvPr id="15" name="TextBox 14"/>
+          <p:cNvPr id="13" name="TextBox 12"/>
           <p:cNvSpPr txBox="1"/>
           <p:nvPr/>
         </p:nvSpPr>
         <p:spPr>
           <a:xfrm>
-            <a:off x="914400" y="4306823"/>
+            <a:off x="914400" y="3191256"/>
             <a:ext cx="9692640" cy="320040"/>
           </a:xfrm>
           <a:prstGeom prst="rect">
@@ -38201,23 +39730,23 @@
                 <a:latin typeface="Arial"/>
                 <a:cs typeface="Arial"/>
               </a:rPr>
-              <a:t>حالا ورودی ویدیو است، نه یک عکس تنها</a:t>
+              <a:t>اسم هر کلاس به بردار تبدیل می‌شود و نزدیک‌ترین برنده است</a:t>
             </a:r>
           </a:p>
         </p:txBody>
       </p:sp>
       <p:sp>
         <p:nvSpPr>
-          <p:cNvPr id="16" name="Rounded Rectangle 15"/>
+          <p:cNvPr id="14" name="Rectangle 13"/>
           <p:cNvSpPr/>
           <p:nvPr/>
         </p:nvSpPr>
         <p:spPr>
           <a:xfrm>
-            <a:off x="548640" y="4946904"/>
+            <a:off x="548640" y="3831335"/>
             <a:ext cx="11064240" cy="960120"/>
           </a:xfrm>
-          <a:prstGeom prst="roundRect">
+          <a:prstGeom prst="rect">
             <a:avLst/>
           </a:prstGeom>
           <a:solidFill>
@@ -38250,7 +39779,178 @@
       </p:sp>
       <p:sp>
         <p:nvSpPr>
+          <p:cNvPr id="15" name="TextBox 14"/>
+          <p:cNvSpPr txBox="1"/>
+          <p:nvPr/>
+        </p:nvSpPr>
+        <p:spPr>
+          <a:xfrm>
+            <a:off x="10698480" y="3986783"/>
+            <a:ext cx="822960" cy="566928"/>
+          </a:xfrm>
+          <a:prstGeom prst="rect">
+            <a:avLst/>
+          </a:prstGeom>
+          <a:noFill/>
+        </p:spPr>
+        <p:txBody>
+          <a:bodyPr wrap="square" anchor="t" lIns="0" rIns="0" tIns="0" bIns="0">
+            <a:spAutoFit/>
+          </a:bodyPr>
+          <a:lstStyle/>
+          <a:p>
+            <a:pPr rtl="0" algn="ctr">
+              <a:spcBef>
+                <a:spcPts val="0"/>
+              </a:spcBef>
+              <a:spcAft>
+                <a:spcPts val="0"/>
+              </a:spcAft>
+            </a:pPr>
+            <a:r>
+              <a:rPr sz="2700" b="1" i="0">
+                <a:solidFill>
+                  <a:srgbClr val="F6CFDE"/>
+                </a:solidFill>
+                <a:latin typeface="Arial"/>
+                <a:cs typeface="Arial"/>
+              </a:rPr>
+              <a:t>3</a:t>
+            </a:r>
+          </a:p>
+        </p:txBody>
+      </p:sp>
+      <p:sp>
+        <p:nvSpPr>
+          <p:cNvPr id="16" name="TextBox 15"/>
+          <p:cNvSpPr txBox="1"/>
+          <p:nvPr/>
+        </p:nvSpPr>
+        <p:spPr>
+          <a:xfrm>
+            <a:off x="914400" y="3959351"/>
+            <a:ext cx="9692640" cy="320040"/>
+          </a:xfrm>
+          <a:prstGeom prst="rect">
+            <a:avLst/>
+          </a:prstGeom>
+          <a:noFill/>
+        </p:spPr>
+        <p:txBody>
+          <a:bodyPr wrap="square" anchor="t" lIns="0" rIns="0" tIns="0" bIns="0">
+            <a:spAutoFit/>
+          </a:bodyPr>
+          <a:lstStyle/>
+          <a:p>
+            <a:pPr rtl="1" algn="r">
+              <a:spcBef>
+                <a:spcPts val="0"/>
+              </a:spcBef>
+              <a:spcAft>
+                <a:spcPts val="0"/>
+              </a:spcAft>
+            </a:pPr>
+            <a:r>
+              <a:rPr sz="1550" b="1" i="0">
+                <a:solidFill>
+                  <a:srgbClr val="FBEEF4"/>
+                </a:solidFill>
+                <a:latin typeface="Arial"/>
+                <a:cs typeface="Arial"/>
+              </a:rPr>
+              <a:t>X-CLIP بخش زمانی اضافه می‌کند</a:t>
+            </a:r>
+          </a:p>
+        </p:txBody>
+      </p:sp>
+      <p:sp>
+        <p:nvSpPr>
           <p:cNvPr id="17" name="TextBox 16"/>
+          <p:cNvSpPr txBox="1"/>
+          <p:nvPr/>
+        </p:nvSpPr>
+        <p:spPr>
+          <a:xfrm>
+            <a:off x="914400" y="4306823"/>
+            <a:ext cx="9692640" cy="320040"/>
+          </a:xfrm>
+          <a:prstGeom prst="rect">
+            <a:avLst/>
+          </a:prstGeom>
+          <a:noFill/>
+        </p:spPr>
+        <p:txBody>
+          <a:bodyPr wrap="square" anchor="t" lIns="0" rIns="0" tIns="0" bIns="0">
+            <a:spAutoFit/>
+          </a:bodyPr>
+          <a:lstStyle/>
+          <a:p>
+            <a:pPr rtl="1" algn="r">
+              <a:spcBef>
+                <a:spcPts val="0"/>
+              </a:spcBef>
+              <a:spcAft>
+                <a:spcPts val="0"/>
+              </a:spcAft>
+            </a:pPr>
+            <a:r>
+              <a:rPr sz="1250" b="0" i="0">
+                <a:solidFill>
+                  <a:srgbClr val="B58FA2"/>
+                </a:solidFill>
+                <a:latin typeface="Arial"/>
+                <a:cs typeface="Arial"/>
+              </a:rPr>
+              <a:t>حالا ورودی ویدیو است، نه یک عکس تنها</a:t>
+            </a:r>
+          </a:p>
+        </p:txBody>
+      </p:sp>
+      <p:sp>
+        <p:nvSpPr>
+          <p:cNvPr id="18" name="Rectangle 17"/>
+          <p:cNvSpPr/>
+          <p:nvPr/>
+        </p:nvSpPr>
+        <p:spPr>
+          <a:xfrm>
+            <a:off x="548640" y="4946904"/>
+            <a:ext cx="11064240" cy="960120"/>
+          </a:xfrm>
+          <a:prstGeom prst="rect">
+            <a:avLst/>
+          </a:prstGeom>
+          <a:solidFill>
+            <a:srgbClr val="3D1730"/>
+          </a:solidFill>
+          <a:ln>
+            <a:noFill/>
+          </a:ln>
+          <a:effectLst/>
+        </p:spPr>
+        <p:style>
+          <a:lnRef idx="1">
+            <a:schemeClr val="accent1"/>
+          </a:lnRef>
+          <a:fillRef idx="3">
+            <a:schemeClr val="accent1"/>
+          </a:fillRef>
+          <a:effectRef idx="2">
+            <a:schemeClr val="accent1"/>
+          </a:effectRef>
+          <a:fontRef idx="minor">
+            <a:schemeClr val="lt1"/>
+          </a:fontRef>
+        </p:style>
+        <p:txBody>
+          <a:bodyPr rtlCol="0" anchor="ctr"/>
+          <a:lstStyle/>
+          <a:p/>
+        </p:txBody>
+      </p:sp>
+      <p:sp>
+        <p:nvSpPr>
+          <p:cNvPr id="19" name="TextBox 18"/>
           <p:cNvSpPr txBox="1"/>
           <p:nvPr/>
         </p:nvSpPr>
@@ -38293,7 +39993,7 @@
       </p:sp>
       <p:sp>
         <p:nvSpPr>
-          <p:cNvPr id="18" name="TextBox 17"/>
+          <p:cNvPr id="20" name="TextBox 19"/>
           <p:cNvSpPr txBox="1"/>
           <p:nvPr/>
         </p:nvSpPr>
@@ -38336,7 +40036,7 @@
       </p:sp>
       <p:sp>
         <p:nvSpPr>
-          <p:cNvPr id="19" name="TextBox 18"/>
+          <p:cNvPr id="21" name="TextBox 20"/>
           <p:cNvSpPr txBox="1"/>
           <p:nvPr/>
         </p:nvSpPr>
@@ -38379,7 +40079,7 @@
       </p:sp>
       <p:sp>
         <p:nvSpPr>
-          <p:cNvPr id="20" name="TextBox 19"/>
+          <p:cNvPr id="22" name="TextBox 21"/>
           <p:cNvSpPr txBox="1"/>
           <p:nvPr/>
         </p:nvSpPr>
@@ -38454,8 +40154,8 @@
         </p:nvSpPr>
         <p:spPr>
           <a:xfrm>
-            <a:off x="548640" y="411480"/>
-            <a:ext cx="11064240" cy="731520"/>
+            <a:off x="502920" y="182880"/>
+            <a:ext cx="2011680" cy="1188720"/>
           </a:xfrm>
           <a:prstGeom prst="rect">
             <a:avLst/>
@@ -38468,7 +40168,7 @@
           </a:bodyPr>
           <a:lstStyle/>
           <a:p>
-            <a:pPr rtl="1" algn="r">
+            <a:pPr rtl="0" algn="l">
               <a:spcBef>
                 <a:spcPts val="0"/>
               </a:spcBef>
@@ -38477,73 +40177,30 @@
               </a:spcAft>
             </a:pPr>
             <a:r>
-              <a:rPr sz="2900" b="1" i="0">
+              <a:rPr sz="5800" b="1" i="0">
                 <a:solidFill>
-                  <a:srgbClr val="FBEEF4"/>
+                  <a:srgbClr val="3B1729"/>
                 </a:solidFill>
                 <a:latin typeface="Arial"/>
                 <a:cs typeface="Arial"/>
               </a:rPr>
-              <a:t>سه اشکال بنیادی که پیدا و اصلاح شد</a:t>
+              <a:t>07</a:t>
             </a:r>
           </a:p>
         </p:txBody>
       </p:sp>
       <p:sp>
         <p:nvSpPr>
-          <p:cNvPr id="3" name="TextBox 2"/>
-          <p:cNvSpPr txBox="1"/>
+          <p:cNvPr id="3" name="Rectangle 2"/>
+          <p:cNvSpPr/>
           <p:nvPr/>
         </p:nvSpPr>
         <p:spPr>
           <a:xfrm>
-            <a:off x="548640" y="1133856"/>
-            <a:ext cx="11064240" cy="292608"/>
+            <a:off x="4754880" y="292608"/>
+            <a:ext cx="6903720" cy="1042415"/>
           </a:xfrm>
           <a:prstGeom prst="rect">
-            <a:avLst/>
-          </a:prstGeom>
-          <a:noFill/>
-        </p:spPr>
-        <p:txBody>
-          <a:bodyPr wrap="square" anchor="t" lIns="0" rIns="0" tIns="0" bIns="0">
-            <a:spAutoFit/>
-          </a:bodyPr>
-          <a:lstStyle/>
-          <a:p>
-            <a:pPr rtl="1" algn="r">
-              <a:spcBef>
-                <a:spcPts val="0"/>
-              </a:spcBef>
-              <a:spcAft>
-                <a:spcPts val="0"/>
-              </a:spcAft>
-            </a:pPr>
-            <a:r>
-              <a:rPr sz="1250" b="1" i="0">
-                <a:solidFill>
-                  <a:srgbClr val="FF6FA5"/>
-                </a:solidFill>
-                <a:latin typeface="Arial"/>
-                <a:cs typeface="Arial"/>
-              </a:rPr>
-              <a:t>مسیر اول</a:t>
-            </a:r>
-          </a:p>
-        </p:txBody>
-      </p:sp>
-      <p:sp>
-        <p:nvSpPr>
-          <p:cNvPr id="4" name="Rounded Rectangle 3"/>
-          <p:cNvSpPr/>
-          <p:nvPr/>
-        </p:nvSpPr>
-        <p:spPr>
-          <a:xfrm>
-            <a:off x="8092440" y="1645920"/>
-            <a:ext cx="3520440" cy="4069080"/>
-          </a:xfrm>
-          <a:prstGeom prst="roundRect">
             <a:avLst/>
           </a:prstGeom>
           <a:solidFill>
@@ -38576,14 +40233,14 @@
       </p:sp>
       <p:sp>
         <p:nvSpPr>
-          <p:cNvPr id="5" name="TextBox 4"/>
+          <p:cNvPr id="4" name="TextBox 3"/>
           <p:cNvSpPr txBox="1"/>
           <p:nvPr/>
         </p:nvSpPr>
         <p:spPr>
           <a:xfrm>
-            <a:off x="10698480" y="1783079"/>
-            <a:ext cx="822960" cy="566928"/>
+            <a:off x="5029200" y="411480"/>
+            <a:ext cx="6355080" cy="502920"/>
           </a:xfrm>
           <a:prstGeom prst="rect">
             <a:avLst/>
@@ -38596,7 +40253,7 @@
           </a:bodyPr>
           <a:lstStyle/>
           <a:p>
-            <a:pPr rtl="0" algn="ctr">
+            <a:pPr rtl="1" algn="r">
               <a:spcBef>
                 <a:spcPts val="0"/>
               </a:spcBef>
@@ -38605,28 +40262,28 @@
               </a:spcAft>
             </a:pPr>
             <a:r>
-              <a:rPr sz="2700" b="1" i="0">
+              <a:rPr sz="2400" b="1" i="0">
                 <a:solidFill>
-                  <a:srgbClr val="FF8A80"/>
+                  <a:srgbClr val="FBEEF4"/>
                 </a:solidFill>
                 <a:latin typeface="Arial"/>
                 <a:cs typeface="Arial"/>
               </a:rPr>
-              <a:t>1</a:t>
+              <a:t>سه اشکال بنیادی که پیدا و اصلاح شد</a:t>
             </a:r>
           </a:p>
         </p:txBody>
       </p:sp>
       <p:sp>
         <p:nvSpPr>
-          <p:cNvPr id="6" name="TextBox 5"/>
+          <p:cNvPr id="5" name="TextBox 4"/>
           <p:cNvSpPr txBox="1"/>
           <p:nvPr/>
         </p:nvSpPr>
         <p:spPr>
           <a:xfrm>
-            <a:off x="8321040" y="2514600"/>
-            <a:ext cx="3063240" cy="685800"/>
+            <a:off x="5029200" y="950976"/>
+            <a:ext cx="6355080" cy="274320"/>
           </a:xfrm>
           <a:prstGeom prst="rect">
             <a:avLst/>
@@ -38640,9 +40297,6 @@
           <a:lstStyle/>
           <a:p>
             <a:pPr rtl="1" algn="r">
-              <a:lnSpc>
-                <a:spcPts val="2100"/>
-              </a:lnSpc>
               <a:spcBef>
                 <a:spcPts val="0"/>
               </a:spcBef>
@@ -38651,122 +40305,30 @@
               </a:spcAft>
             </a:pPr>
             <a:r>
-              <a:rPr sz="1500" b="1" i="0">
+              <a:rPr sz="1150" b="1" i="0">
                 <a:solidFill>
-                  <a:srgbClr val="FBEEF4"/>
+                  <a:srgbClr val="FF6FA5"/>
                 </a:solidFill>
                 <a:latin typeface="Arial"/>
                 <a:cs typeface="Arial"/>
               </a:rPr>
-              <a:t>میانگین‌گیری در ارزیابی</a:t>
+              <a:t>مسیر اول</a:t>
             </a:r>
           </a:p>
         </p:txBody>
       </p:sp>
       <p:sp>
         <p:nvSpPr>
-          <p:cNvPr id="7" name="TextBox 6"/>
-          <p:cNvSpPr txBox="1"/>
+          <p:cNvPr id="6" name="Rectangle 5"/>
+          <p:cNvSpPr/>
           <p:nvPr/>
         </p:nvSpPr>
         <p:spPr>
           <a:xfrm>
-            <a:off x="8321040" y="3200400"/>
-            <a:ext cx="3063240" cy="1645920"/>
+            <a:off x="8092440" y="1645920"/>
+            <a:ext cx="3520440" cy="4069080"/>
           </a:xfrm>
           <a:prstGeom prst="rect">
-            <a:avLst/>
-          </a:prstGeom>
-          <a:noFill/>
-        </p:spPr>
-        <p:txBody>
-          <a:bodyPr wrap="square" anchor="t" lIns="0" rIns="0" tIns="0" bIns="0">
-            <a:spAutoFit/>
-          </a:bodyPr>
-          <a:lstStyle/>
-          <a:p>
-            <a:pPr rtl="1" algn="r">
-              <a:lnSpc>
-                <a:spcPts val="1900"/>
-              </a:lnSpc>
-              <a:spcBef>
-                <a:spcPts val="0"/>
-              </a:spcBef>
-              <a:spcAft>
-                <a:spcPts val="0"/>
-              </a:spcAft>
-            </a:pPr>
-            <a:r>
-              <a:rPr sz="1200" b="0" i="0">
-                <a:solidFill>
-                  <a:srgbClr val="F0DCE6"/>
-                </a:solidFill>
-                <a:latin typeface="Arial"/>
-                <a:cs typeface="Arial"/>
-              </a:rPr>
-              <a:t>احتمال هر ۱۶ قطعه میانگین گرفته می‌شد. در ویدیوی ناهنجار، قطعه‌های عادی شواهد را خفه می‌کردند و تقریباً همه چیز عادی پیش‌بینی می‌شد.</a:t>
-            </a:r>
-          </a:p>
-        </p:txBody>
-      </p:sp>
-      <p:sp>
-        <p:nvSpPr>
-          <p:cNvPr id="8" name="TextBox 7"/>
-          <p:cNvSpPr txBox="1"/>
-          <p:nvPr/>
-        </p:nvSpPr>
-        <p:spPr>
-          <a:xfrm>
-            <a:off x="8321040" y="4937760"/>
-            <a:ext cx="3063240" cy="640080"/>
-          </a:xfrm>
-          <a:prstGeom prst="rect">
-            <a:avLst/>
-          </a:prstGeom>
-          <a:noFill/>
-        </p:spPr>
-        <p:txBody>
-          <a:bodyPr wrap="square" anchor="t" lIns="0" rIns="0" tIns="0" bIns="0">
-            <a:spAutoFit/>
-          </a:bodyPr>
-          <a:lstStyle/>
-          <a:p>
-            <a:pPr rtl="1" algn="r">
-              <a:lnSpc>
-                <a:spcPts val="1800"/>
-              </a:lnSpc>
-              <a:spcBef>
-                <a:spcPts val="0"/>
-              </a:spcBef>
-              <a:spcAft>
-                <a:spcPts val="0"/>
-              </a:spcAft>
-            </a:pPr>
-            <a:r>
-              <a:rPr sz="1200" b="1" i="0">
-                <a:solidFill>
-                  <a:srgbClr val="7FD8C0"/>
-                </a:solidFill>
-                <a:latin typeface="Arial"/>
-                <a:cs typeface="Arial"/>
-              </a:rPr>
-              <a:t>اصلاح: تصمیم دومرحله‌ای با بیشینه</a:t>
-            </a:r>
-          </a:p>
-        </p:txBody>
-      </p:sp>
-      <p:sp>
-        <p:nvSpPr>
-          <p:cNvPr id="9" name="Rounded Rectangle 8"/>
-          <p:cNvSpPr/>
-          <p:nvPr/>
-        </p:nvSpPr>
-        <p:spPr>
-          <a:xfrm>
-            <a:off x="4315968" y="1645920"/>
-            <a:ext cx="3520440" cy="4069080"/>
-          </a:xfrm>
-          <a:prstGeom prst="roundRect">
             <a:avLst/>
           </a:prstGeom>
           <a:solidFill>
@@ -38799,13 +40361,13 @@
       </p:sp>
       <p:sp>
         <p:nvSpPr>
-          <p:cNvPr id="10" name="TextBox 9"/>
+          <p:cNvPr id="7" name="TextBox 6"/>
           <p:cNvSpPr txBox="1"/>
           <p:nvPr/>
         </p:nvSpPr>
         <p:spPr>
           <a:xfrm>
-            <a:off x="6922007" y="1783079"/>
+            <a:off x="10698480" y="1783079"/>
             <a:ext cx="822960" cy="566928"/>
           </a:xfrm>
           <a:prstGeom prst="rect">
@@ -38835,20 +40397,20 @@
                 <a:latin typeface="Arial"/>
                 <a:cs typeface="Arial"/>
               </a:rPr>
-              <a:t>2</a:t>
+              <a:t>1</a:t>
             </a:r>
           </a:p>
         </p:txBody>
       </p:sp>
       <p:sp>
         <p:nvSpPr>
-          <p:cNvPr id="11" name="TextBox 10"/>
+          <p:cNvPr id="8" name="TextBox 7"/>
           <p:cNvSpPr txBox="1"/>
           <p:nvPr/>
         </p:nvSpPr>
         <p:spPr>
           <a:xfrm>
-            <a:off x="4544568" y="2514600"/>
+            <a:off x="8321040" y="2514600"/>
             <a:ext cx="3063240" cy="685800"/>
           </a:xfrm>
           <a:prstGeom prst="rect">
@@ -38881,20 +40443,20 @@
                 <a:latin typeface="Arial"/>
                 <a:cs typeface="Arial"/>
               </a:rPr>
-              <a:t>فایل نمرات کهنه</a:t>
+              <a:t>میانگین‌گیری در ارزیابی</a:t>
             </a:r>
           </a:p>
         </p:txBody>
       </p:sp>
       <p:sp>
         <p:nvSpPr>
-          <p:cNvPr id="12" name="TextBox 11"/>
+          <p:cNvPr id="9" name="TextBox 8"/>
           <p:cNvSpPr txBox="1"/>
           <p:nvPr/>
         </p:nvSpPr>
         <p:spPr>
           <a:xfrm>
-            <a:off x="4544568" y="3200400"/>
+            <a:off x="8321040" y="3200400"/>
             <a:ext cx="3063240" cy="1645920"/>
           </a:xfrm>
           <a:prstGeom prst="rect">
@@ -38927,20 +40489,20 @@
                 <a:latin typeface="Arial"/>
                 <a:cs typeface="Arial"/>
               </a:rPr>
-              <a:t>کد هر فایل نمرات موجود را بازاستفاده می‌کرد. در یک گزارش، ۲۸۸ ویدیو از ۲۹۸ کنار گذاشته شده و عدد روی ده ویدیو حساب شده بود.</a:t>
+              <a:t>احتمال هر ۱۶ قطعه میانگین گرفته می‌شد. در ویدیوی ناهنجار، قطعه‌های عادی شواهد را خفه می‌کردند و تقریباً همه چیز عادی پیش‌بینی می‌شد.</a:t>
             </a:r>
           </a:p>
         </p:txBody>
       </p:sp>
       <p:sp>
         <p:nvSpPr>
-          <p:cNvPr id="13" name="TextBox 12"/>
+          <p:cNvPr id="10" name="TextBox 9"/>
           <p:cNvSpPr txBox="1"/>
           <p:nvPr/>
         </p:nvSpPr>
         <p:spPr>
           <a:xfrm>
-            <a:off x="4544568" y="4937760"/>
+            <a:off x="8321040" y="4937760"/>
             <a:ext cx="3063240" cy="640080"/>
           </a:xfrm>
           <a:prstGeom prst="rect">
@@ -38973,23 +40535,23 @@
                 <a:latin typeface="Arial"/>
                 <a:cs typeface="Arial"/>
               </a:rPr>
-              <a:t>اصلاح: بازمحاسبه پیش‌فرض</a:t>
+              <a:t>اصلاح: تصمیم دومرحله‌ای با بیشینه</a:t>
             </a:r>
           </a:p>
         </p:txBody>
       </p:sp>
       <p:sp>
         <p:nvSpPr>
-          <p:cNvPr id="14" name="Rounded Rectangle 13"/>
+          <p:cNvPr id="11" name="Rectangle 10"/>
           <p:cNvSpPr/>
           <p:nvPr/>
         </p:nvSpPr>
         <p:spPr>
           <a:xfrm>
-            <a:off x="539495" y="1645920"/>
+            <a:off x="4315968" y="1645920"/>
             <a:ext cx="3520440" cy="4069080"/>
           </a:xfrm>
-          <a:prstGeom prst="roundRect">
+          <a:prstGeom prst="rect">
             <a:avLst/>
           </a:prstGeom>
           <a:solidFill>
@@ -39022,7 +40584,230 @@
       </p:sp>
       <p:sp>
         <p:nvSpPr>
+          <p:cNvPr id="12" name="TextBox 11"/>
+          <p:cNvSpPr txBox="1"/>
+          <p:nvPr/>
+        </p:nvSpPr>
+        <p:spPr>
+          <a:xfrm>
+            <a:off x="6922007" y="1783079"/>
+            <a:ext cx="822960" cy="566928"/>
+          </a:xfrm>
+          <a:prstGeom prst="rect">
+            <a:avLst/>
+          </a:prstGeom>
+          <a:noFill/>
+        </p:spPr>
+        <p:txBody>
+          <a:bodyPr wrap="square" anchor="t" lIns="0" rIns="0" tIns="0" bIns="0">
+            <a:spAutoFit/>
+          </a:bodyPr>
+          <a:lstStyle/>
+          <a:p>
+            <a:pPr rtl="0" algn="ctr">
+              <a:spcBef>
+                <a:spcPts val="0"/>
+              </a:spcBef>
+              <a:spcAft>
+                <a:spcPts val="0"/>
+              </a:spcAft>
+            </a:pPr>
+            <a:r>
+              <a:rPr sz="2700" b="1" i="0">
+                <a:solidFill>
+                  <a:srgbClr val="FF8A80"/>
+                </a:solidFill>
+                <a:latin typeface="Arial"/>
+                <a:cs typeface="Arial"/>
+              </a:rPr>
+              <a:t>2</a:t>
+            </a:r>
+          </a:p>
+        </p:txBody>
+      </p:sp>
+      <p:sp>
+        <p:nvSpPr>
+          <p:cNvPr id="13" name="TextBox 12"/>
+          <p:cNvSpPr txBox="1"/>
+          <p:nvPr/>
+        </p:nvSpPr>
+        <p:spPr>
+          <a:xfrm>
+            <a:off x="4544568" y="2514600"/>
+            <a:ext cx="3063240" cy="685800"/>
+          </a:xfrm>
+          <a:prstGeom prst="rect">
+            <a:avLst/>
+          </a:prstGeom>
+          <a:noFill/>
+        </p:spPr>
+        <p:txBody>
+          <a:bodyPr wrap="square" anchor="t" lIns="0" rIns="0" tIns="0" bIns="0">
+            <a:spAutoFit/>
+          </a:bodyPr>
+          <a:lstStyle/>
+          <a:p>
+            <a:pPr rtl="1" algn="r">
+              <a:lnSpc>
+                <a:spcPts val="2100"/>
+              </a:lnSpc>
+              <a:spcBef>
+                <a:spcPts val="0"/>
+              </a:spcBef>
+              <a:spcAft>
+                <a:spcPts val="0"/>
+              </a:spcAft>
+            </a:pPr>
+            <a:r>
+              <a:rPr sz="1500" b="1" i="0">
+                <a:solidFill>
+                  <a:srgbClr val="FBEEF4"/>
+                </a:solidFill>
+                <a:latin typeface="Arial"/>
+                <a:cs typeface="Arial"/>
+              </a:rPr>
+              <a:t>فایل نمرات کهنه</a:t>
+            </a:r>
+          </a:p>
+        </p:txBody>
+      </p:sp>
+      <p:sp>
+        <p:nvSpPr>
+          <p:cNvPr id="14" name="TextBox 13"/>
+          <p:cNvSpPr txBox="1"/>
+          <p:nvPr/>
+        </p:nvSpPr>
+        <p:spPr>
+          <a:xfrm>
+            <a:off x="4544568" y="3200400"/>
+            <a:ext cx="3063240" cy="1645920"/>
+          </a:xfrm>
+          <a:prstGeom prst="rect">
+            <a:avLst/>
+          </a:prstGeom>
+          <a:noFill/>
+        </p:spPr>
+        <p:txBody>
+          <a:bodyPr wrap="square" anchor="t" lIns="0" rIns="0" tIns="0" bIns="0">
+            <a:spAutoFit/>
+          </a:bodyPr>
+          <a:lstStyle/>
+          <a:p>
+            <a:pPr rtl="1" algn="r">
+              <a:lnSpc>
+                <a:spcPts val="1900"/>
+              </a:lnSpc>
+              <a:spcBef>
+                <a:spcPts val="0"/>
+              </a:spcBef>
+              <a:spcAft>
+                <a:spcPts val="0"/>
+              </a:spcAft>
+            </a:pPr>
+            <a:r>
+              <a:rPr sz="1200" b="0" i="0">
+                <a:solidFill>
+                  <a:srgbClr val="F0DCE6"/>
+                </a:solidFill>
+                <a:latin typeface="Arial"/>
+                <a:cs typeface="Arial"/>
+              </a:rPr>
+              <a:t>کد هر فایل نمرات موجود را بازاستفاده می‌کرد. در یک گزارش، ۲۸۸ ویدیو از ۲۹۸ کنار گذاشته شده و عدد روی ده ویدیو حساب شده بود.</a:t>
+            </a:r>
+          </a:p>
+        </p:txBody>
+      </p:sp>
+      <p:sp>
+        <p:nvSpPr>
           <p:cNvPr id="15" name="TextBox 14"/>
+          <p:cNvSpPr txBox="1"/>
+          <p:nvPr/>
+        </p:nvSpPr>
+        <p:spPr>
+          <a:xfrm>
+            <a:off x="4544568" y="4937760"/>
+            <a:ext cx="3063240" cy="640080"/>
+          </a:xfrm>
+          <a:prstGeom prst="rect">
+            <a:avLst/>
+          </a:prstGeom>
+          <a:noFill/>
+        </p:spPr>
+        <p:txBody>
+          <a:bodyPr wrap="square" anchor="t" lIns="0" rIns="0" tIns="0" bIns="0">
+            <a:spAutoFit/>
+          </a:bodyPr>
+          <a:lstStyle/>
+          <a:p>
+            <a:pPr rtl="1" algn="r">
+              <a:lnSpc>
+                <a:spcPts val="1800"/>
+              </a:lnSpc>
+              <a:spcBef>
+                <a:spcPts val="0"/>
+              </a:spcBef>
+              <a:spcAft>
+                <a:spcPts val="0"/>
+              </a:spcAft>
+            </a:pPr>
+            <a:r>
+              <a:rPr sz="1200" b="1" i="0">
+                <a:solidFill>
+                  <a:srgbClr val="7FD8C0"/>
+                </a:solidFill>
+                <a:latin typeface="Arial"/>
+                <a:cs typeface="Arial"/>
+              </a:rPr>
+              <a:t>اصلاح: بازمحاسبه پیش‌فرض</a:t>
+            </a:r>
+          </a:p>
+        </p:txBody>
+      </p:sp>
+      <p:sp>
+        <p:nvSpPr>
+          <p:cNvPr id="16" name="Rectangle 15"/>
+          <p:cNvSpPr/>
+          <p:nvPr/>
+        </p:nvSpPr>
+        <p:spPr>
+          <a:xfrm>
+            <a:off x="539495" y="1645920"/>
+            <a:ext cx="3520440" cy="4069080"/>
+          </a:xfrm>
+          <a:prstGeom prst="rect">
+            <a:avLst/>
+          </a:prstGeom>
+          <a:solidFill>
+            <a:srgbClr val="3D1730"/>
+          </a:solidFill>
+          <a:ln>
+            <a:noFill/>
+          </a:ln>
+          <a:effectLst/>
+        </p:spPr>
+        <p:style>
+          <a:lnRef idx="1">
+            <a:schemeClr val="accent1"/>
+          </a:lnRef>
+          <a:fillRef idx="3">
+            <a:schemeClr val="accent1"/>
+          </a:fillRef>
+          <a:effectRef idx="2">
+            <a:schemeClr val="accent1"/>
+          </a:effectRef>
+          <a:fontRef idx="minor">
+            <a:schemeClr val="lt1"/>
+          </a:fontRef>
+        </p:style>
+        <p:txBody>
+          <a:bodyPr rtlCol="0" anchor="ctr"/>
+          <a:lstStyle/>
+          <a:p/>
+        </p:txBody>
+      </p:sp>
+      <p:sp>
+        <p:nvSpPr>
+          <p:cNvPr id="17" name="TextBox 16"/>
           <p:cNvSpPr txBox="1"/>
           <p:nvPr/>
         </p:nvSpPr>
@@ -39065,7 +40850,7 @@
       </p:sp>
       <p:sp>
         <p:nvSpPr>
-          <p:cNvPr id="16" name="TextBox 15"/>
+          <p:cNvPr id="18" name="TextBox 17"/>
           <p:cNvSpPr txBox="1"/>
           <p:nvPr/>
         </p:nvSpPr>
@@ -39111,7 +40896,7 @@
       </p:sp>
       <p:sp>
         <p:nvSpPr>
-          <p:cNvPr id="17" name="TextBox 16"/>
+          <p:cNvPr id="19" name="TextBox 18"/>
           <p:cNvSpPr txBox="1"/>
           <p:nvPr/>
         </p:nvSpPr>
@@ -39157,7 +40942,7 @@
       </p:sp>
       <p:sp>
         <p:nvSpPr>
-          <p:cNvPr id="18" name="TextBox 17"/>
+          <p:cNvPr id="20" name="TextBox 19"/>
           <p:cNvSpPr txBox="1"/>
           <p:nvPr/>
         </p:nvSpPr>

--- a/thesis/Defense_Slides_Rose.pptx
+++ b/thesis/Defense_Slides_Rose.pptx
@@ -5454,7 +5454,7 @@
                 <a:latin typeface="Vazir"/>
                 <a:cs typeface="Vazir"/>
               </a:rPr>
-              <a:t>یادگیری چندنمونه‌ای ضعیف‌نظارت با ستون فقرات ترنسفورمر ویدیویی</a:t>
+              <a:t>یادگیری چندنمونه‌ای ضعیف‌نظارت با ستون فقرات مبدل ویدیویی</a:t>
             </a:r>
           </a:p>
         </p:txBody>
@@ -15769,7 +15769,7 @@
                 <a:latin typeface="Vazir"/>
                 <a:cs typeface="Vazir"/>
               </a:rPr>
-              <a:t>سر ترنسفورمر</a:t>
+              <a:t>سر مبدل</a:t>
             </a:r>
           </a:p>
         </p:txBody>
@@ -16597,7 +16597,7 @@
                 <a:latin typeface="Vazir"/>
                 <a:cs typeface="Vazir"/>
               </a:rPr>
-              <a:t>سر ترنسفورمر روی محور زمان</a:t>
+              <a:t>سر مبدل روی محور زمان</a:t>
             </a:r>
           </a:p>
         </p:txBody>
@@ -17831,7 +17831,7 @@
                           <a:latin typeface="Vazir"/>
                           <a:cs typeface="Vazir"/>
                         </a:rPr>
-                        <a:t>سر ترنسفورمر زمانی</a:t>
+                        <a:t>سر مبدل زمانی</a:t>
                       </a:r>
                     </a:p>
                   </a:txBody>
@@ -29284,7 +29284,7 @@
                           <a:latin typeface="Vazir"/>
                           <a:cs typeface="Vazir"/>
                         </a:rPr>
-                        <a:t>مسیر دوم — سر ترنسفورمر زمانی</a:t>
+                        <a:t>مسیر دوم — سر مبدل زمانی</a:t>
                       </a:r>
                     </a:p>
                   </a:txBody>
@@ -31227,7 +31227,7 @@
                 <a:latin typeface="Vazir"/>
                 <a:cs typeface="Vazir"/>
               </a:rPr>
-              <a:t>اصلاح سه اشکال بنیادی، بازطراحی معماری با رمزگذار منجمد، سر ترنسفورمر زمانی، و پروتکل ارزیابی با کف نوفه</a:t>
+              <a:t>اصلاح سه اشکال بنیادی، بازطراحی معماری با رمزگذار منجمد، سر مبدل زمانی، و پروتکل ارزیابی با کف نوفه</a:t>
             </a:r>
           </a:p>
         </p:txBody>
